--- a/proposal/LUMA_Business_Proposal.pptx
+++ b/proposal/LUMA_Business_Proposal.pptx
@@ -5082,7 +5082,7 @@
                 </a:solidFill>
                 <a:latin typeface="JetBrains Mono"/>
               </a:rPr>
-              <a:t>☰  Menu</a:t>
+              <a:t>‹  Menu</a:t>
             </a:r>
           </a:p>
         </p:txBody>
@@ -5300,36 +5300,45 @@
       </p:sp>
       <p:sp>
         <p:nvSpPr>
-          <p:cNvPr id="6" name="TextBox 5"/>
-          <p:cNvSpPr txBox="1"/>
-          <p:nvPr/>
-        </p:nvSpPr>
-        <p:spPr>
-          <a:xfrm>
-            <a:off x="1051560" y="2880360"/>
-            <a:ext cx="914400" cy="731520"/>
-          </a:xfrm>
-          <a:prstGeom prst="rect">
-            <a:avLst/>
-          </a:prstGeom>
-          <a:noFill/>
-        </p:spPr>
-        <p:txBody>
-          <a:bodyPr wrap="square" anchor="t" lIns="0" rIns="0" tIns="0" bIns="0">
-            <a:spAutoFit/>
-          </a:bodyPr>
-          <a:lstStyle/>
-          <a:p>
-            <a:pPr algn="l"/>
-            <a:r>
-              <a:rPr sz="3200" b="0" i="0">
-                <a:solidFill>
-                  <a:srgbClr val="7AA8FF"/>
-                </a:solidFill>
-                <a:latin typeface="Open Sans"/>
-              </a:rPr>
-              <a:t>🔐</a:t>
-            </a:r>
+          <p:cNvPr id="6" name="Oval 5"/>
+          <p:cNvSpPr/>
+          <p:nvPr/>
+        </p:nvSpPr>
+        <p:spPr>
+          <a:xfrm>
+            <a:off x="1097280" y="2990088"/>
+            <a:ext cx="182880" cy="182880"/>
+          </a:xfrm>
+          <a:prstGeom prst="ellipse">
+            <a:avLst/>
+          </a:prstGeom>
+          <a:solidFill>
+            <a:srgbClr val="7AA8FF"/>
+          </a:solidFill>
+          <a:ln>
+            <a:noFill/>
+          </a:ln>
+          <a:effectLst/>
+        </p:spPr>
+        <p:style>
+          <a:lnRef idx="1">
+            <a:schemeClr val="accent1"/>
+          </a:lnRef>
+          <a:fillRef idx="3">
+            <a:schemeClr val="accent1"/>
+          </a:fillRef>
+          <a:effectRef idx="2">
+            <a:schemeClr val="accent1"/>
+          </a:effectRef>
+          <a:fontRef idx="minor">
+            <a:schemeClr val="lt1"/>
+          </a:fontRef>
+        </p:style>
+        <p:txBody>
+          <a:bodyPr rtlCol="0" anchor="ctr"/>
+          <a:lstStyle/>
+          <a:p>
+            <a:pPr algn="ctr"/>
           </a:p>
         </p:txBody>
       </p:sp>
@@ -5341,8 +5350,8 @@
         </p:nvSpPr>
         <p:spPr>
           <a:xfrm>
-            <a:off x="2011680" y="2898648"/>
-            <a:ext cx="3794760" cy="1188720"/>
+            <a:off x="1645920" y="2898648"/>
+            <a:ext cx="4160520" cy="1188720"/>
           </a:xfrm>
           <a:prstGeom prst="rect">
             <a:avLst/>
@@ -5370,7 +5379,7 @@
                 </a:solidFill>
                 <a:latin typeface="Sora"/>
               </a:rPr>
-              <a:t>Per-tenant isolation</a:t>
+              <a:t>Your data stays yours</a:t>
             </a:r>
           </a:p>
           <a:p>
@@ -5389,7 +5398,7 @@
                 </a:solidFill>
                 <a:latin typeface="Open Sans"/>
               </a:rPr>
-              <a:t>Every store’s data is fully separated — never shared or co-mingled.</a:t>
+              <a:t>Every store’s information is kept completely separate and private.</a:t>
             </a:r>
           </a:p>
         </p:txBody>
@@ -5448,36 +5457,45 @@
       </p:sp>
       <p:sp>
         <p:nvSpPr>
-          <p:cNvPr id="9" name="TextBox 8"/>
-          <p:cNvSpPr txBox="1"/>
-          <p:nvPr/>
-        </p:nvSpPr>
-        <p:spPr>
-          <a:xfrm>
-            <a:off x="6675120" y="2880360"/>
-            <a:ext cx="914400" cy="731520"/>
-          </a:xfrm>
-          <a:prstGeom prst="rect">
-            <a:avLst/>
-          </a:prstGeom>
-          <a:noFill/>
-        </p:spPr>
-        <p:txBody>
-          <a:bodyPr wrap="square" anchor="t" lIns="0" rIns="0" tIns="0" bIns="0">
-            <a:spAutoFit/>
-          </a:bodyPr>
-          <a:lstStyle/>
-          <a:p>
-            <a:pPr algn="l"/>
-            <a:r>
-              <a:rPr sz="3200" b="0" i="0">
-                <a:solidFill>
-                  <a:srgbClr val="7AA8FF"/>
-                </a:solidFill>
-                <a:latin typeface="Open Sans"/>
-              </a:rPr>
-              <a:t>🔒</a:t>
-            </a:r>
+          <p:cNvPr id="9" name="Oval 8"/>
+          <p:cNvSpPr/>
+          <p:nvPr/>
+        </p:nvSpPr>
+        <p:spPr>
+          <a:xfrm>
+            <a:off x="6720840" y="2990088"/>
+            <a:ext cx="182880" cy="182880"/>
+          </a:xfrm>
+          <a:prstGeom prst="ellipse">
+            <a:avLst/>
+          </a:prstGeom>
+          <a:solidFill>
+            <a:srgbClr val="7AA8FF"/>
+          </a:solidFill>
+          <a:ln>
+            <a:noFill/>
+          </a:ln>
+          <a:effectLst/>
+        </p:spPr>
+        <p:style>
+          <a:lnRef idx="1">
+            <a:schemeClr val="accent1"/>
+          </a:lnRef>
+          <a:fillRef idx="3">
+            <a:schemeClr val="accent1"/>
+          </a:fillRef>
+          <a:effectRef idx="2">
+            <a:schemeClr val="accent1"/>
+          </a:effectRef>
+          <a:fontRef idx="minor">
+            <a:schemeClr val="lt1"/>
+          </a:fontRef>
+        </p:style>
+        <p:txBody>
+          <a:bodyPr rtlCol="0" anchor="ctr"/>
+          <a:lstStyle/>
+          <a:p>
+            <a:pPr algn="ctr"/>
           </a:p>
         </p:txBody>
       </p:sp>
@@ -5489,8 +5507,8 @@
         </p:nvSpPr>
         <p:spPr>
           <a:xfrm>
-            <a:off x="7635240" y="2898648"/>
-            <a:ext cx="3794760" cy="1188720"/>
+            <a:off x="7269480" y="2898648"/>
+            <a:ext cx="4160520" cy="1188720"/>
           </a:xfrm>
           <a:prstGeom prst="rect">
             <a:avLst/>
@@ -5518,7 +5536,7 @@
                 </a:solidFill>
                 <a:latin typeface="Sora"/>
               </a:rPr>
-              <a:t>HTTPS-only &amp; OAuth-scoped</a:t>
+              <a:t>Safe and secure</a:t>
             </a:r>
           </a:p>
           <a:p>
@@ -5537,7 +5555,7 @@
                 </a:solidFill>
                 <a:latin typeface="Open Sans"/>
               </a:rPr>
-              <a:t>Encrypted in transit; access limited to exactly what’s authorised.</a:t>
+              <a:t>Conversations are protected and access is tightly controlled.</a:t>
             </a:r>
           </a:p>
         </p:txBody>
@@ -5596,36 +5614,45 @@
       </p:sp>
       <p:sp>
         <p:nvSpPr>
-          <p:cNvPr id="12" name="TextBox 11"/>
-          <p:cNvSpPr txBox="1"/>
-          <p:nvPr/>
-        </p:nvSpPr>
-        <p:spPr>
-          <a:xfrm>
-            <a:off x="1051560" y="4846320"/>
-            <a:ext cx="914400" cy="731520"/>
-          </a:xfrm>
-          <a:prstGeom prst="rect">
-            <a:avLst/>
-          </a:prstGeom>
-          <a:noFill/>
-        </p:spPr>
-        <p:txBody>
-          <a:bodyPr wrap="square" anchor="t" lIns="0" rIns="0" tIns="0" bIns="0">
-            <a:spAutoFit/>
-          </a:bodyPr>
-          <a:lstStyle/>
-          <a:p>
-            <a:pPr algn="l"/>
-            <a:r>
-              <a:rPr sz="3200" b="0" i="0">
-                <a:solidFill>
-                  <a:srgbClr val="7AA8FF"/>
-                </a:solidFill>
-                <a:latin typeface="Open Sans"/>
-              </a:rPr>
-              <a:t>💳</a:t>
-            </a:r>
+          <p:cNvPr id="12" name="Oval 11"/>
+          <p:cNvSpPr/>
+          <p:nvPr/>
+        </p:nvSpPr>
+        <p:spPr>
+          <a:xfrm>
+            <a:off x="1097280" y="4956048"/>
+            <a:ext cx="182880" cy="182880"/>
+          </a:xfrm>
+          <a:prstGeom prst="ellipse">
+            <a:avLst/>
+          </a:prstGeom>
+          <a:solidFill>
+            <a:srgbClr val="7AA8FF"/>
+          </a:solidFill>
+          <a:ln>
+            <a:noFill/>
+          </a:ln>
+          <a:effectLst/>
+        </p:spPr>
+        <p:style>
+          <a:lnRef idx="1">
+            <a:schemeClr val="accent1"/>
+          </a:lnRef>
+          <a:fillRef idx="3">
+            <a:schemeClr val="accent1"/>
+          </a:fillRef>
+          <a:effectRef idx="2">
+            <a:schemeClr val="accent1"/>
+          </a:effectRef>
+          <a:fontRef idx="minor">
+            <a:schemeClr val="lt1"/>
+          </a:fontRef>
+        </p:style>
+        <p:txBody>
+          <a:bodyPr rtlCol="0" anchor="ctr"/>
+          <a:lstStyle/>
+          <a:p>
+            <a:pPr algn="ctr"/>
           </a:p>
         </p:txBody>
       </p:sp>
@@ -5637,8 +5664,8 @@
         </p:nvSpPr>
         <p:spPr>
           <a:xfrm>
-            <a:off x="2011680" y="4864608"/>
-            <a:ext cx="3794760" cy="1188720"/>
+            <a:off x="1645920" y="4864608"/>
+            <a:ext cx="4160520" cy="1188720"/>
           </a:xfrm>
           <a:prstGeom prst="rect">
             <a:avLst/>
@@ -5666,7 +5693,7 @@
                 </a:solidFill>
                 <a:latin typeface="Sora"/>
               </a:rPr>
-              <a:t>Card data never touches LUMA</a:t>
+              <a:t>Payments stay with your store</a:t>
             </a:r>
           </a:p>
           <a:p>
@@ -5685,7 +5712,7 @@
                 </a:solidFill>
                 <a:latin typeface="Open Sans"/>
               </a:rPr>
-              <a:t>All billing runs through Shopify’s native, PCI-compliant system.</a:t>
+              <a:t>Billing runs through your store’s trusted, secure checkout.</a:t>
             </a:r>
           </a:p>
         </p:txBody>
@@ -5744,36 +5771,45 @@
       </p:sp>
       <p:sp>
         <p:nvSpPr>
-          <p:cNvPr id="15" name="TextBox 14"/>
-          <p:cNvSpPr txBox="1"/>
-          <p:nvPr/>
-        </p:nvSpPr>
-        <p:spPr>
-          <a:xfrm>
-            <a:off x="6675120" y="4846320"/>
-            <a:ext cx="914400" cy="731520"/>
-          </a:xfrm>
-          <a:prstGeom prst="rect">
-            <a:avLst/>
-          </a:prstGeom>
-          <a:noFill/>
-        </p:spPr>
-        <p:txBody>
-          <a:bodyPr wrap="square" anchor="t" lIns="0" rIns="0" tIns="0" bIns="0">
-            <a:spAutoFit/>
-          </a:bodyPr>
-          <a:lstStyle/>
-          <a:p>
-            <a:pPr algn="l"/>
-            <a:r>
-              <a:rPr sz="3200" b="0" i="0">
-                <a:solidFill>
-                  <a:srgbClr val="7AA8FF"/>
-                </a:solidFill>
-                <a:latin typeface="Open Sans"/>
-              </a:rPr>
-              <a:t>📜</a:t>
-            </a:r>
+          <p:cNvPr id="15" name="Oval 14"/>
+          <p:cNvSpPr/>
+          <p:nvPr/>
+        </p:nvSpPr>
+        <p:spPr>
+          <a:xfrm>
+            <a:off x="6720840" y="4956048"/>
+            <a:ext cx="182880" cy="182880"/>
+          </a:xfrm>
+          <a:prstGeom prst="ellipse">
+            <a:avLst/>
+          </a:prstGeom>
+          <a:solidFill>
+            <a:srgbClr val="7AA8FF"/>
+          </a:solidFill>
+          <a:ln>
+            <a:noFill/>
+          </a:ln>
+          <a:effectLst/>
+        </p:spPr>
+        <p:style>
+          <a:lnRef idx="1">
+            <a:schemeClr val="accent1"/>
+          </a:lnRef>
+          <a:fillRef idx="3">
+            <a:schemeClr val="accent1"/>
+          </a:fillRef>
+          <a:effectRef idx="2">
+            <a:schemeClr val="accent1"/>
+          </a:effectRef>
+          <a:fontRef idx="minor">
+            <a:schemeClr val="lt1"/>
+          </a:fontRef>
+        </p:style>
+        <p:txBody>
+          <a:bodyPr rtlCol="0" anchor="ctr"/>
+          <a:lstStyle/>
+          <a:p>
+            <a:pPr algn="ctr"/>
           </a:p>
         </p:txBody>
       </p:sp>
@@ -5785,8 +5821,8 @@
         </p:nvSpPr>
         <p:spPr>
           <a:xfrm>
-            <a:off x="7635240" y="4864608"/>
-            <a:ext cx="3794760" cy="1188720"/>
+            <a:off x="7269480" y="4864608"/>
+            <a:ext cx="4160520" cy="1188720"/>
           </a:xfrm>
           <a:prstGeom prst="rect">
             <a:avLst/>
@@ -5814,7 +5850,7 @@
                 </a:solidFill>
                 <a:latin typeface="Sora"/>
               </a:rPr>
-              <a:t>GDPR webhooks honored</a:t>
+              <a:t>Privacy respected</a:t>
             </a:r>
           </a:p>
           <a:p>
@@ -5833,7 +5869,7 @@
                 </a:solidFill>
                 <a:latin typeface="Open Sans"/>
               </a:rPr>
-              <a:t>Shopify data-deletion &amp; access requests respected automatically.</a:t>
+              <a:t>Customer data-removal requests are handled automatically.</a:t>
             </a:r>
           </a:p>
         </p:txBody>
@@ -5892,7 +5928,7 @@
                 </a:solidFill>
                 <a:latin typeface="JetBrains Mono"/>
               </a:rPr>
-              <a:t>☰  Menu</a:t>
+              <a:t>‹  Menu</a:t>
             </a:r>
           </a:p>
         </p:txBody>
@@ -6266,7 +6302,7 @@
                 </a:solidFill>
                 <a:latin typeface="JetBrains Mono"/>
               </a:rPr>
-              <a:t>Private beta · limited onboarding · powered by Claude</a:t>
+              <a:t>Now welcoming a limited number of local businesses</a:t>
             </a:r>
           </a:p>
         </p:txBody>
@@ -6325,7 +6361,7 @@
                 </a:solidFill>
                 <a:latin typeface="JetBrains Mono"/>
               </a:rPr>
-              <a:t>☰  Back to menu</a:t>
+              <a:t>Back to menu</a:t>
             </a:r>
           </a:p>
         </p:txBody>
@@ -8176,8 +8212,8 @@
         </p:nvSpPr>
         <p:spPr>
           <a:xfrm>
-            <a:off x="1005840" y="2898648"/>
-            <a:ext cx="914400" cy="640080"/>
+            <a:off x="1024128" y="2898648"/>
+            <a:ext cx="1005840" cy="640080"/>
           </a:xfrm>
           <a:prstGeom prst="rect">
             <a:avLst/>
@@ -8192,13 +8228,13 @@
           <a:p>
             <a:pPr algn="l"/>
             <a:r>
-              <a:rPr sz="3000" b="0" i="0">
+              <a:rPr sz="3000" b="1" i="0">
                 <a:solidFill>
                   <a:srgbClr val="7AA8FF"/>
                 </a:solidFill>
-                <a:latin typeface="Open Sans"/>
-              </a:rPr>
-              <a:t>⏱</a:t>
+                <a:latin typeface="JetBrains Mono"/>
+              </a:rPr>
+              <a:t>01</a:t>
             </a:r>
           </a:p>
         </p:txBody>
@@ -8211,8 +8247,8 @@
         </p:nvSpPr>
         <p:spPr>
           <a:xfrm>
-            <a:off x="1005840" y="3410712"/>
-            <a:ext cx="4800600" cy="914400"/>
+            <a:off x="1920240" y="2953512"/>
+            <a:ext cx="3886200" cy="1097280"/>
           </a:xfrm>
           <a:prstGeom prst="rect">
             <a:avLst/>
@@ -8324,8 +8360,8 @@
         </p:nvSpPr>
         <p:spPr>
           <a:xfrm>
-            <a:off x="6629400" y="2898648"/>
-            <a:ext cx="914400" cy="640080"/>
+            <a:off x="6647688" y="2898648"/>
+            <a:ext cx="1005840" cy="640080"/>
           </a:xfrm>
           <a:prstGeom prst="rect">
             <a:avLst/>
@@ -8340,13 +8376,13 @@
           <a:p>
             <a:pPr algn="l"/>
             <a:r>
-              <a:rPr sz="3000" b="0" i="0">
+              <a:rPr sz="3000" b="1" i="0">
                 <a:solidFill>
                   <a:srgbClr val="7AA8FF"/>
                 </a:solidFill>
-                <a:latin typeface="Open Sans"/>
-              </a:rPr>
-              <a:t>💬</a:t>
+                <a:latin typeface="JetBrains Mono"/>
+              </a:rPr>
+              <a:t>02</a:t>
             </a:r>
           </a:p>
         </p:txBody>
@@ -8359,8 +8395,8 @@
         </p:nvSpPr>
         <p:spPr>
           <a:xfrm>
-            <a:off x="6629400" y="3410712"/>
-            <a:ext cx="4800600" cy="914400"/>
+            <a:off x="7543800" y="2953512"/>
+            <a:ext cx="3886200" cy="1097280"/>
           </a:xfrm>
           <a:prstGeom prst="rect">
             <a:avLst/>
@@ -8407,7 +8443,7 @@
                 </a:solidFill>
                 <a:latin typeface="Open Sans"/>
               </a:rPr>
-              <a:t>“Is this in stock?” “Where’s my order?” “Do you ship to me?” — answered manually, all day.</a:t>
+              <a:t>“Is this in stock?” “Where’s my order?” “Do you ship to me?” — answered by hand, all day long.</a:t>
             </a:r>
           </a:p>
         </p:txBody>
@@ -8472,8 +8508,8 @@
         </p:nvSpPr>
         <p:spPr>
           <a:xfrm>
-            <a:off x="1005840" y="4800600"/>
-            <a:ext cx="914400" cy="640080"/>
+            <a:off x="1024128" y="4800600"/>
+            <a:ext cx="1005840" cy="640080"/>
           </a:xfrm>
           <a:prstGeom prst="rect">
             <a:avLst/>
@@ -8488,13 +8524,13 @@
           <a:p>
             <a:pPr algn="l"/>
             <a:r>
-              <a:rPr sz="3000" b="0" i="0">
+              <a:rPr sz="3000" b="1" i="0">
                 <a:solidFill>
                   <a:srgbClr val="7AA8FF"/>
                 </a:solidFill>
-                <a:latin typeface="Open Sans"/>
-              </a:rPr>
-              <a:t>🌐</a:t>
+                <a:latin typeface="JetBrains Mono"/>
+              </a:rPr>
+              <a:t>03</a:t>
             </a:r>
           </a:p>
         </p:txBody>
@@ -8507,8 +8543,8 @@
         </p:nvSpPr>
         <p:spPr>
           <a:xfrm>
-            <a:off x="1005840" y="5312664"/>
-            <a:ext cx="4800600" cy="914400"/>
+            <a:off x="1920240" y="4855464"/>
+            <a:ext cx="3886200" cy="1097280"/>
           </a:xfrm>
           <a:prstGeom prst="rect">
             <a:avLst/>
@@ -8536,7 +8572,7 @@
                 </a:solidFill>
                 <a:latin typeface="Sora"/>
               </a:rPr>
-              <a:t>Customers write in 3 languages</a:t>
+              <a:t>Customers write in three languages</a:t>
             </a:r>
           </a:p>
           <a:p>
@@ -8555,7 +8591,7 @@
                 </a:solidFill>
                 <a:latin typeface="Open Sans"/>
               </a:rPr>
-              <a:t>Arabic, English, Franco-Arabic in the same inbox. Staff juggle tone and translation.</a:t>
+              <a:t>Arabic, English and Franco-Arabic in the same inbox. Your team juggles tone and translation.</a:t>
             </a:r>
           </a:p>
         </p:txBody>
@@ -8620,8 +8656,8 @@
         </p:nvSpPr>
         <p:spPr>
           <a:xfrm>
-            <a:off x="6629400" y="4800600"/>
-            <a:ext cx="914400" cy="640080"/>
+            <a:off x="6647688" y="4800600"/>
+            <a:ext cx="1005840" cy="640080"/>
           </a:xfrm>
           <a:prstGeom prst="rect">
             <a:avLst/>
@@ -8636,13 +8672,13 @@
           <a:p>
             <a:pPr algn="l"/>
             <a:r>
-              <a:rPr sz="3000" b="0" i="0">
+              <a:rPr sz="3000" b="1" i="0">
                 <a:solidFill>
                   <a:srgbClr val="7AA8FF"/>
                 </a:solidFill>
-                <a:latin typeface="Open Sans"/>
-              </a:rPr>
-              <a:t>📉</a:t>
+                <a:latin typeface="JetBrains Mono"/>
+              </a:rPr>
+              <a:t>04</a:t>
             </a:r>
           </a:p>
         </p:txBody>
@@ -8655,8 +8691,8 @@
         </p:nvSpPr>
         <p:spPr>
           <a:xfrm>
-            <a:off x="6629400" y="5312664"/>
-            <a:ext cx="4800600" cy="914400"/>
+            <a:off x="7543800" y="4855464"/>
+            <a:ext cx="3886200" cy="1097280"/>
           </a:xfrm>
           <a:prstGeom prst="rect">
             <a:avLst/>
@@ -8703,7 +8739,7 @@
                 </a:solidFill>
                 <a:latin typeface="Open Sans"/>
               </a:rPr>
-              <a:t>No idea how many messages convert, what gets asked most, or when your peak hours hit.</a:t>
+              <a:t>No idea how many messages turn into sales, what gets asked most, or when your busiest hours are.</a:t>
             </a:r>
           </a:p>
         </p:txBody>
@@ -8762,7 +8798,7 @@
                 </a:solidFill>
                 <a:latin typeface="JetBrains Mono"/>
               </a:rPr>
-              <a:t>☰  Menu</a:t>
+              <a:t>‹  Menu</a:t>
             </a:r>
           </a:p>
         </p:txBody>
@@ -8966,7 +9002,7 @@
                 </a:solidFill>
                 <a:latin typeface="Open Sans"/>
               </a:rPr>
-              <a:t>LUMA reads every Instagram DM and Shopify chat, answers in the customer’s own language with live catalog and order data, and hands off to your team only when it truly matters.</a:t>
+              <a:t>LUMA reads every Instagram message and website chat, answers in the customer’s own language using your live product and order information, and passes the conversation to your team whenever a personal touch is needed.</a:t>
             </a:r>
           </a:p>
         </p:txBody>
@@ -9045,7 +9081,7 @@
                 </a:solidFill>
                 <a:latin typeface="Open Sans"/>
               </a:rPr>
-              <a:t>Replies in under 2 seconds, 24/7</a:t>
+              <a:t>Replies instantly, day and night</a:t>
             </a:r>
           </a:p>
         </p:txBody>
@@ -9124,7 +9160,7 @@
                 </a:solidFill>
                 <a:latin typeface="Open Sans"/>
               </a:rPr>
-              <a:t>Speaks Egyptian Arabic, English &amp; Franco-Arabic natively</a:t>
+              <a:t>Speaks Egyptian Arabic, English and Franco-Arabic</a:t>
             </a:r>
           </a:p>
         </p:txBody>
@@ -9203,7 +9239,7 @@
                 </a:solidFill>
                 <a:latin typeface="Open Sans"/>
               </a:rPr>
-              <a:t>Pulls real Shopify orders &amp; catalog — no guessing</a:t>
+              <a:t>Answers order and product questions accurately</a:t>
             </a:r>
           </a:p>
         </p:txBody>
@@ -9282,7 +9318,7 @@
                 </a:solidFill>
                 <a:latin typeface="Open Sans"/>
               </a:rPr>
-              <a:t>Lives inside your Shopify Admin — not another app to learn</a:t>
+              <a:t>Works inside your store — no new app to learn</a:t>
             </a:r>
           </a:p>
         </p:txBody>
@@ -9426,8 +9462,8 @@
         </p:nvSpPr>
         <p:spPr>
           <a:xfrm>
-            <a:off x="8595360" y="1298448"/>
-            <a:ext cx="2743200" cy="457200"/>
+            <a:off x="8595360" y="1280160"/>
+            <a:ext cx="2743200" cy="365760"/>
           </a:xfrm>
           <a:prstGeom prst="rect">
             <a:avLst/>
@@ -9440,11 +9476,7 @@
           </a:bodyPr>
           <a:lstStyle/>
           <a:p>
-            <a:pPr algn="l">
-              <a:spcAft>
-                <a:spcPts val="0"/>
-              </a:spcAft>
-            </a:pPr>
+            <a:pPr algn="l"/>
             <a:r>
               <a:rPr sz="1300" b="1" i="0">
                 <a:solidFill>
@@ -9455,12 +9487,75 @@
               <a:t>LUMA</a:t>
             </a:r>
           </a:p>
-          <a:p>
-            <a:pPr algn="l">
-              <a:spcAft>
-                <a:spcPts val="0"/>
-              </a:spcAft>
-            </a:pPr>
+        </p:txBody>
+      </p:sp>
+      <p:sp>
+        <p:nvSpPr>
+          <p:cNvPr id="17" name="Oval 16"/>
+          <p:cNvSpPr/>
+          <p:nvPr/>
+        </p:nvSpPr>
+        <p:spPr>
+          <a:xfrm>
+            <a:off x="8604504" y="1636776"/>
+            <a:ext cx="77724" cy="77724"/>
+          </a:xfrm>
+          <a:prstGeom prst="ellipse">
+            <a:avLst/>
+          </a:prstGeom>
+          <a:solidFill>
+            <a:srgbClr val="22C55E"/>
+          </a:solidFill>
+          <a:ln>
+            <a:noFill/>
+          </a:ln>
+          <a:effectLst/>
+        </p:spPr>
+        <p:style>
+          <a:lnRef idx="1">
+            <a:schemeClr val="accent1"/>
+          </a:lnRef>
+          <a:fillRef idx="3">
+            <a:schemeClr val="accent1"/>
+          </a:fillRef>
+          <a:effectRef idx="2">
+            <a:schemeClr val="accent1"/>
+          </a:effectRef>
+          <a:fontRef idx="minor">
+            <a:schemeClr val="lt1"/>
+          </a:fontRef>
+        </p:style>
+        <p:txBody>
+          <a:bodyPr rtlCol="0" anchor="ctr"/>
+          <a:lstStyle/>
+          <a:p>
+            <a:pPr algn="ctr"/>
+          </a:p>
+        </p:txBody>
+      </p:sp>
+      <p:sp>
+        <p:nvSpPr>
+          <p:cNvPr id="18" name="TextBox 17"/>
+          <p:cNvSpPr txBox="1"/>
+          <p:nvPr/>
+        </p:nvSpPr>
+        <p:spPr>
+          <a:xfrm>
+            <a:off x="8750808" y="1563624"/>
+            <a:ext cx="1828800" cy="274320"/>
+          </a:xfrm>
+          <a:prstGeom prst="rect">
+            <a:avLst/>
+          </a:prstGeom>
+          <a:noFill/>
+        </p:spPr>
+        <p:txBody>
+          <a:bodyPr wrap="square" anchor="t" lIns="0" rIns="0" tIns="0" bIns="0">
+            <a:spAutoFit/>
+          </a:bodyPr>
+          <a:lstStyle/>
+          <a:p>
+            <a:pPr algn="l"/>
             <a:r>
               <a:rPr sz="900" b="0" i="0">
                 <a:solidFill>
@@ -9468,14 +9563,14 @@
                 </a:solidFill>
                 <a:latin typeface="JetBrains Mono"/>
               </a:rPr>
-              <a:t>● online</a:t>
-            </a:r>
-          </a:p>
-        </p:txBody>
-      </p:sp>
-      <p:sp>
-        <p:nvSpPr>
-          <p:cNvPr id="17" name="Rounded Rectangle 16"/>
+              <a:t>Online now</a:t>
+            </a:r>
+          </a:p>
+        </p:txBody>
+      </p:sp>
+      <p:sp>
+        <p:nvSpPr>
+          <p:cNvPr id="19" name="Rounded Rectangle 18"/>
           <p:cNvSpPr/>
           <p:nvPr/>
         </p:nvSpPr>
@@ -9532,7 +9627,7 @@
       </p:sp>
       <p:sp>
         <p:nvSpPr>
-          <p:cNvPr id="18" name="Rounded Rectangle 17"/>
+          <p:cNvPr id="20" name="Rounded Rectangle 19"/>
           <p:cNvSpPr/>
           <p:nvPr/>
         </p:nvSpPr>
@@ -9580,14 +9675,14 @@
                 </a:solidFill>
                 <a:latin typeface="Open Sans"/>
               </a:rPr>
-              <a:t>Yes! The black jacket is in stock in size M — EGP 1,250. Want me to reserve one? 🧥</a:t>
-            </a:r>
-          </a:p>
-        </p:txBody>
-      </p:sp>
-      <p:sp>
-        <p:nvSpPr>
-          <p:cNvPr id="19" name="Rounded Rectangle 18"/>
+              <a:t>Yes! The black jacket is in stock in size M — EGP 1,250. Would you like me to reserve one?</a:t>
+            </a:r>
+          </a:p>
+        </p:txBody>
+      </p:sp>
+      <p:sp>
+        <p:nvSpPr>
+          <p:cNvPr id="21" name="Rounded Rectangle 20"/>
           <p:cNvSpPr/>
           <p:nvPr/>
         </p:nvSpPr>
@@ -9644,7 +9739,7 @@
       </p:sp>
       <p:sp>
         <p:nvSpPr>
-          <p:cNvPr id="20" name="Rounded Rectangle 19"/>
+          <p:cNvPr id="22" name="Rounded Rectangle 21"/>
           <p:cNvSpPr/>
           <p:nvPr/>
         </p:nvSpPr>
@@ -9692,14 +9787,14 @@
                 </a:solidFill>
                 <a:latin typeface="Open Sans"/>
               </a:rPr>
-              <a:t>Out for delivery today, arriving by 6 PM 📦</a:t>
-            </a:r>
-          </a:p>
-        </p:txBody>
-      </p:sp>
-      <p:sp>
-        <p:nvSpPr>
-          <p:cNvPr id="21" name="Rounded Rectangle 20">
+              <a:t>It’s out for delivery today and should arrive by 6 PM.</a:t>
+            </a:r>
+          </a:p>
+        </p:txBody>
+      </p:sp>
+      <p:sp>
+        <p:nvSpPr>
+          <p:cNvPr id="23" name="Rounded Rectangle 22">
             <a:hlinkClick r:id="rId4" action="ppaction://hlinksldjump"/>
           </p:cNvPr>
           <p:cNvSpPr/>
@@ -9751,14 +9846,14 @@
                 </a:solidFill>
                 <a:latin typeface="JetBrains Mono"/>
               </a:rPr>
-              <a:t>☰  Menu</a:t>
-            </a:r>
-          </a:p>
-        </p:txBody>
-      </p:sp>
-      <p:sp>
-        <p:nvSpPr>
-          <p:cNvPr id="22" name="TextBox 21"/>
+              <a:t>‹  Menu</a:t>
+            </a:r>
+          </a:p>
+        </p:txBody>
+      </p:sp>
+      <p:sp>
+        <p:nvSpPr>
+          <p:cNvPr id="24" name="TextBox 23"/>
           <p:cNvSpPr txBox="1"/>
           <p:nvPr/>
         </p:nvSpPr>
@@ -9936,7 +10031,7 @@
                 </a:solidFill>
                 <a:latin typeface="Open Sans"/>
               </a:rPr>
-              <a:t>Each message routes to the lightest path that solves it — keeping replies instant and costs low.</a:t>
+              <a:t>Every message is handled the right way — keeping replies instant and your customers looked after.</a:t>
             </a:r>
           </a:p>
         </p:txBody>
@@ -10042,13 +10137,13 @@
           <a:p>
             <a:pPr algn="ctr"/>
             <a:r>
-              <a:rPr sz="2400" b="0" i="0">
+              <a:rPr sz="3000" b="1" i="0">
                 <a:solidFill>
                   <a:srgbClr val="FFFFFF"/>
                 </a:solidFill>
-                <a:latin typeface="Open Sans"/>
-              </a:rPr>
-              <a:t>⚡</a:t>
+                <a:latin typeface="Sora"/>
+              </a:rPr>
+              <a:t>1</a:t>
             </a:r>
           </a:p>
         </p:txBody>
@@ -10061,7 +10156,7 @@
         </p:nvSpPr>
         <p:spPr>
           <a:xfrm>
-            <a:off x="1005840" y="3474720"/>
+            <a:off x="1005840" y="3566160"/>
             <a:ext cx="3063240" cy="1463040"/>
           </a:xfrm>
           <a:prstGeom prst="rect">
@@ -10084,13 +10179,13 @@
               </a:spcAft>
             </a:pPr>
             <a:r>
-              <a:rPr sz="1200" b="1" i="0">
-                <a:solidFill>
-                  <a:srgbClr val="7AA8FF"/>
-                </a:solidFill>
-                <a:latin typeface="JetBrains Mono"/>
-              </a:rPr>
-              <a:t>01</a:t>
+              <a:rPr sz="2000" b="1" i="0">
+                <a:solidFill>
+                  <a:srgbClr val="FFFFFF"/>
+                </a:solidFill>
+                <a:latin typeface="Sora"/>
+              </a:rPr>
+              <a:t>Instant answer</a:t>
             </a:r>
           </a:p>
           <a:p>
@@ -10103,32 +10198,13 @@
               </a:spcAft>
             </a:pPr>
             <a:r>
-              <a:rPr sz="2000" b="1" i="0">
-                <a:solidFill>
-                  <a:srgbClr val="FFFFFF"/>
-                </a:solidFill>
-                <a:latin typeface="Sora"/>
-              </a:rPr>
-              <a:t>Instant answer</a:t>
-            </a:r>
-          </a:p>
-          <a:p>
-            <a:pPr algn="l">
-              <a:lnSpc>
-                <a:spcPct val="108000"/>
-              </a:lnSpc>
-              <a:spcAft>
-                <a:spcPts val="400"/>
-              </a:spcAft>
-            </a:pPr>
-            <a:r>
               <a:rPr sz="1200" b="0" i="0">
                 <a:solidFill>
                   <a:srgbClr val="B3C2E0"/>
                 </a:solidFill>
                 <a:latin typeface="Open Sans"/>
               </a:rPr>
-              <a:t>Greetings, thank-yous and duplicate pings are caught by a mechanical pre-filter — zero AI cost.</a:t>
+              <a:t>Greetings, thank-yous and repeat questions are recognised and answered straight away.</a:t>
             </a:r>
           </a:p>
         </p:txBody>
@@ -10189,7 +10265,7 @@
                 </a:solidFill>
                 <a:latin typeface="JetBrains Mono"/>
               </a:rPr>
-              <a:t>“Hey 👋”</a:t>
+              <a:t>“Hi there”</a:t>
             </a:r>
           </a:p>
         </p:txBody>
@@ -10250,7 +10326,7 @@
                 </a:solidFill>
                 <a:latin typeface="JetBrains Mono"/>
               </a:rPr>
-              <a:t>“شكراً 🙏”</a:t>
+              <a:t>“شكراً”</a:t>
             </a:r>
           </a:p>
         </p:txBody>
@@ -10417,13 +10493,13 @@
           <a:p>
             <a:pPr algn="ctr"/>
             <a:r>
-              <a:rPr sz="2400" b="0" i="0">
+              <a:rPr sz="3000" b="1" i="0">
                 <a:solidFill>
                   <a:srgbClr val="FFFFFF"/>
                 </a:solidFill>
-                <a:latin typeface="Open Sans"/>
-              </a:rPr>
-              <a:t>🧠</a:t>
+                <a:latin typeface="Sora"/>
+              </a:rPr>
+              <a:t>2</a:t>
             </a:r>
           </a:p>
         </p:txBody>
@@ -10436,7 +10512,7 @@
         </p:nvSpPr>
         <p:spPr>
           <a:xfrm>
-            <a:off x="4864608" y="3474720"/>
+            <a:off x="4864608" y="3566160"/>
             <a:ext cx="3063240" cy="1463040"/>
           </a:xfrm>
           <a:prstGeom prst="rect">
@@ -10459,13 +10535,13 @@
               </a:spcAft>
             </a:pPr>
             <a:r>
-              <a:rPr sz="1200" b="1" i="0">
-                <a:solidFill>
-                  <a:srgbClr val="7AA8FF"/>
-                </a:solidFill>
-                <a:latin typeface="JetBrains Mono"/>
-              </a:rPr>
-              <a:t>02</a:t>
+              <a:rPr sz="2000" b="1" i="0">
+                <a:solidFill>
+                  <a:srgbClr val="FFFFFF"/>
+                </a:solidFill>
+                <a:latin typeface="Sora"/>
+              </a:rPr>
+              <a:t>Smart reply</a:t>
             </a:r>
           </a:p>
           <a:p>
@@ -10478,32 +10554,13 @@
               </a:spcAft>
             </a:pPr>
             <a:r>
-              <a:rPr sz="2000" b="1" i="0">
-                <a:solidFill>
-                  <a:srgbClr val="FFFFFF"/>
-                </a:solidFill>
-                <a:latin typeface="Sora"/>
-              </a:rPr>
-              <a:t>Smart reply</a:t>
-            </a:r>
-          </a:p>
-          <a:p>
-            <a:pPr algn="l">
-              <a:lnSpc>
-                <a:spcPct val="108000"/>
-              </a:lnSpc>
-              <a:spcAft>
-                <a:spcPts val="400"/>
-              </a:spcAft>
-            </a:pPr>
-            <a:r>
               <a:rPr sz="1200" b="0" i="0">
                 <a:solidFill>
                   <a:srgbClr val="B3C2E0"/>
                 </a:solidFill>
                 <a:latin typeface="Open Sans"/>
               </a:rPr>
-              <a:t>Real product questions trigger an AI search across your live catalog &amp; knowledge base, answered in-language.</a:t>
+              <a:t>Real product questions are answered from your live catalogue, in the customer’s own language.</a:t>
             </a:r>
           </a:p>
         </p:txBody>
@@ -10792,13 +10849,13 @@
           <a:p>
             <a:pPr algn="ctr"/>
             <a:r>
-              <a:rPr sz="2400" b="0" i="0">
+              <a:rPr sz="3000" b="1" i="0">
                 <a:solidFill>
                   <a:srgbClr val="FFFFFF"/>
                 </a:solidFill>
-                <a:latin typeface="Open Sans"/>
-              </a:rPr>
-              <a:t>🤝</a:t>
+                <a:latin typeface="Sora"/>
+              </a:rPr>
+              <a:t>3</a:t>
             </a:r>
           </a:p>
         </p:txBody>
@@ -10811,7 +10868,7 @@
         </p:nvSpPr>
         <p:spPr>
           <a:xfrm>
-            <a:off x="8723376" y="3474720"/>
+            <a:off x="8723376" y="3566160"/>
             <a:ext cx="3063240" cy="1463040"/>
           </a:xfrm>
           <a:prstGeom prst="rect">
@@ -10834,13 +10891,13 @@
               </a:spcAft>
             </a:pPr>
             <a:r>
-              <a:rPr sz="1200" b="1" i="0">
-                <a:solidFill>
-                  <a:srgbClr val="7AA8FF"/>
-                </a:solidFill>
-                <a:latin typeface="JetBrains Mono"/>
-              </a:rPr>
-              <a:t>03</a:t>
+              <a:rPr sz="2000" b="1" i="0">
+                <a:solidFill>
+                  <a:srgbClr val="FFFFFF"/>
+                </a:solidFill>
+                <a:latin typeface="Sora"/>
+              </a:rPr>
+              <a:t>Personal handoff</a:t>
             </a:r>
           </a:p>
           <a:p>
@@ -10853,32 +10910,13 @@
               </a:spcAft>
             </a:pPr>
             <a:r>
-              <a:rPr sz="2000" b="1" i="0">
-                <a:solidFill>
-                  <a:srgbClr val="FFFFFF"/>
-                </a:solidFill>
-                <a:latin typeface="Sora"/>
-              </a:rPr>
-              <a:t>Graceful handoff</a:t>
-            </a:r>
-          </a:p>
-          <a:p>
-            <a:pPr algn="l">
-              <a:lnSpc>
-                <a:spcPct val="108000"/>
-              </a:lnSpc>
-              <a:spcAft>
-                <a:spcPts val="400"/>
-              </a:spcAft>
-            </a:pPr>
-            <a:r>
               <a:rPr sz="1200" b="0" i="0">
                 <a:solidFill>
                   <a:srgbClr val="B3C2E0"/>
                 </a:solidFill>
                 <a:latin typeface="Open Sans"/>
               </a:rPr>
-              <a:t>Low confidence or a complaint? LUMA acknowledges the customer and opens a ticket for your team.</a:t>
+              <a:t>Complaints or anything unusual? LUMA reassures the customer and passes it straight to your team.</a:t>
             </a:r>
           </a:p>
         </p:txBody>
@@ -10939,7 +10977,7 @@
                 </a:solidFill>
                 <a:latin typeface="JetBrains Mono"/>
               </a:rPr>
-              <a:t>“I want a human”</a:t>
+              <a:t>“I’d like to speak to someone”</a:t>
             </a:r>
           </a:p>
         </p:txBody>
@@ -11120,7 +11158,7 @@
                 </a:solidFill>
                 <a:latin typeface="JetBrains Mono"/>
               </a:rPr>
-              <a:t>☰  Menu</a:t>
+              <a:t>‹  Menu</a:t>
             </a:r>
           </a:p>
         </p:txBody>
@@ -11279,7 +11317,7 @@
                 </a:solidFill>
                 <a:latin typeface="Sora"/>
               </a:rPr>
-              <a:t>no code, no new app</a:t>
+              <a:t>no setup headaches</a:t>
             </a:r>
           </a:p>
         </p:txBody>
@@ -11457,7 +11495,7 @@
                 </a:solidFill>
                 <a:latin typeface="Open Sans"/>
               </a:rPr>
-              <a:t>Install from Shopify, link your Instagram Business account. Your catalog syncs automatically.</a:t>
+              <a:t>Link your store and Instagram account in a few clicks. Your products load in automatically.</a:t>
             </a:r>
           </a:p>
         </p:txBody>
@@ -11651,7 +11689,7 @@
                 </a:solidFill>
                 <a:latin typeface="Sora"/>
               </a:rPr>
-              <a:t>Teach</a:t>
+              <a:t>Personalise</a:t>
             </a:r>
           </a:p>
           <a:p>
@@ -11670,7 +11708,7 @@
                 </a:solidFill>
                 <a:latin typeface="Open Sans"/>
               </a:rPr>
-              <a:t>Set your bot’s tone, auto-reply templates, escalation rules, business hours &amp; product facts — once.</a:t>
+              <a:t>Set the tone, your opening hours and a few product details so LUMA sounds just like your brand.</a:t>
             </a:r>
           </a:p>
         </p:txBody>
@@ -11883,7 +11921,7 @@
                 </a:solidFill>
                 <a:latin typeface="Open Sans"/>
               </a:rPr>
-              <a:t>Watch conversations in real time inside Shopify Admin and jump into any thread whenever you want.</a:t>
+              <a:t>Watch conversations as they happen and step into any chat yourself whenever you’d like.</a:t>
             </a:r>
           </a:p>
         </p:txBody>
@@ -11942,7 +11980,7 @@
                 </a:solidFill>
                 <a:latin typeface="JetBrains Mono"/>
               </a:rPr>
-              <a:t>☰  Menu</a:t>
+              <a:t>‹  Menu</a:t>
             </a:r>
           </a:p>
         </p:txBody>
@@ -12151,36 +12189,45 @@
       </p:sp>
       <p:sp>
         <p:nvSpPr>
-          <p:cNvPr id="6" name="TextBox 5"/>
-          <p:cNvSpPr txBox="1"/>
-          <p:nvPr/>
-        </p:nvSpPr>
-        <p:spPr>
-          <a:xfrm>
-            <a:off x="987552" y="1965960"/>
-            <a:ext cx="914400" cy="548640"/>
-          </a:xfrm>
-          <a:prstGeom prst="rect">
-            <a:avLst/>
-          </a:prstGeom>
-          <a:noFill/>
-        </p:spPr>
-        <p:txBody>
-          <a:bodyPr wrap="square" anchor="t" lIns="0" rIns="0" tIns="0" bIns="0">
-            <a:spAutoFit/>
-          </a:bodyPr>
-          <a:lstStyle/>
-          <a:p>
-            <a:pPr algn="l"/>
-            <a:r>
-              <a:rPr sz="2400" b="0" i="0">
-                <a:solidFill>
-                  <a:srgbClr val="7AA8FF"/>
-                </a:solidFill>
-                <a:latin typeface="Open Sans"/>
-              </a:rPr>
-              <a:t>📥</a:t>
-            </a:r>
+          <p:cNvPr id="6" name="Oval 5"/>
+          <p:cNvSpPr/>
+          <p:nvPr/>
+        </p:nvSpPr>
+        <p:spPr>
+          <a:xfrm>
+            <a:off x="1005840" y="2075688"/>
+            <a:ext cx="146304" cy="146304"/>
+          </a:xfrm>
+          <a:prstGeom prst="ellipse">
+            <a:avLst/>
+          </a:prstGeom>
+          <a:solidFill>
+            <a:srgbClr val="7AA8FF"/>
+          </a:solidFill>
+          <a:ln>
+            <a:noFill/>
+          </a:ln>
+          <a:effectLst/>
+        </p:spPr>
+        <p:style>
+          <a:lnRef idx="1">
+            <a:schemeClr val="accent1"/>
+          </a:lnRef>
+          <a:fillRef idx="3">
+            <a:schemeClr val="accent1"/>
+          </a:fillRef>
+          <a:effectRef idx="2">
+            <a:schemeClr val="accent1"/>
+          </a:effectRef>
+          <a:fontRef idx="minor">
+            <a:schemeClr val="lt1"/>
+          </a:fontRef>
+        </p:style>
+        <p:txBody>
+          <a:bodyPr rtlCol="0" anchor="ctr"/>
+          <a:lstStyle/>
+          <a:p>
+            <a:pPr algn="ctr"/>
           </a:p>
         </p:txBody>
       </p:sp>
@@ -12192,7 +12239,7 @@
         </p:nvSpPr>
         <p:spPr>
           <a:xfrm>
-            <a:off x="987552" y="2441448"/>
+            <a:off x="987552" y="2386584"/>
             <a:ext cx="3008376" cy="731520"/>
           </a:xfrm>
           <a:prstGeom prst="rect">
@@ -12221,7 +12268,7 @@
                 </a:solidFill>
                 <a:latin typeface="Sora"/>
               </a:rPr>
-              <a:t>Unified inbox</a:t>
+              <a:t>One inbox</a:t>
             </a:r>
           </a:p>
           <a:p>
@@ -12240,7 +12287,7 @@
                 </a:solidFill>
                 <a:latin typeface="Open Sans"/>
               </a:rPr>
-              <a:t>Instagram DMs + Shopify chat in one queue</a:t>
+              <a:t>Instagram and website chats together in one place</a:t>
             </a:r>
           </a:p>
         </p:txBody>
@@ -12299,36 +12346,45 @@
       </p:sp>
       <p:sp>
         <p:nvSpPr>
-          <p:cNvPr id="9" name="TextBox 8"/>
-          <p:cNvSpPr txBox="1"/>
-          <p:nvPr/>
-        </p:nvSpPr>
-        <p:spPr>
-          <a:xfrm>
-            <a:off x="4800600" y="1965960"/>
-            <a:ext cx="914400" cy="548640"/>
-          </a:xfrm>
-          <a:prstGeom prst="rect">
-            <a:avLst/>
-          </a:prstGeom>
-          <a:noFill/>
-        </p:spPr>
-        <p:txBody>
-          <a:bodyPr wrap="square" anchor="t" lIns="0" rIns="0" tIns="0" bIns="0">
-            <a:spAutoFit/>
-          </a:bodyPr>
-          <a:lstStyle/>
-          <a:p>
-            <a:pPr algn="l"/>
-            <a:r>
-              <a:rPr sz="2400" b="0" i="0">
-                <a:solidFill>
-                  <a:srgbClr val="7AA8FF"/>
-                </a:solidFill>
-                <a:latin typeface="Open Sans"/>
-              </a:rPr>
-              <a:t>🌐</a:t>
-            </a:r>
+          <p:cNvPr id="9" name="Oval 8"/>
+          <p:cNvSpPr/>
+          <p:nvPr/>
+        </p:nvSpPr>
+        <p:spPr>
+          <a:xfrm>
+            <a:off x="4818888" y="2075688"/>
+            <a:ext cx="146304" cy="146304"/>
+          </a:xfrm>
+          <a:prstGeom prst="ellipse">
+            <a:avLst/>
+          </a:prstGeom>
+          <a:solidFill>
+            <a:srgbClr val="7AA8FF"/>
+          </a:solidFill>
+          <a:ln>
+            <a:noFill/>
+          </a:ln>
+          <a:effectLst/>
+        </p:spPr>
+        <p:style>
+          <a:lnRef idx="1">
+            <a:schemeClr val="accent1"/>
+          </a:lnRef>
+          <a:fillRef idx="3">
+            <a:schemeClr val="accent1"/>
+          </a:fillRef>
+          <a:effectRef idx="2">
+            <a:schemeClr val="accent1"/>
+          </a:effectRef>
+          <a:fontRef idx="minor">
+            <a:schemeClr val="lt1"/>
+          </a:fontRef>
+        </p:style>
+        <p:txBody>
+          <a:bodyPr rtlCol="0" anchor="ctr"/>
+          <a:lstStyle/>
+          <a:p>
+            <a:pPr algn="ctr"/>
           </a:p>
         </p:txBody>
       </p:sp>
@@ -12340,7 +12396,7 @@
         </p:nvSpPr>
         <p:spPr>
           <a:xfrm>
-            <a:off x="4800600" y="2441448"/>
+            <a:off x="4800600" y="2386584"/>
             <a:ext cx="3008376" cy="731520"/>
           </a:xfrm>
           <a:prstGeom prst="rect">
@@ -12369,7 +12425,7 @@
                 </a:solidFill>
                 <a:latin typeface="Sora"/>
               </a:rPr>
-              <a:t>Native trilingual</a:t>
+              <a:t>Three languages</a:t>
             </a:r>
           </a:p>
           <a:p>
@@ -12388,7 +12444,7 @@
                 </a:solidFill>
                 <a:latin typeface="Open Sans"/>
               </a:rPr>
-              <a:t>Arabic, English &amp; Franco-Arabic per message</a:t>
+              <a:t>Speaks Arabic, English and Franco-Arabic</a:t>
             </a:r>
           </a:p>
         </p:txBody>
@@ -12447,36 +12503,45 @@
       </p:sp>
       <p:sp>
         <p:nvSpPr>
-          <p:cNvPr id="12" name="TextBox 11"/>
-          <p:cNvSpPr txBox="1"/>
-          <p:nvPr/>
-        </p:nvSpPr>
-        <p:spPr>
-          <a:xfrm>
-            <a:off x="8613648" y="1965960"/>
-            <a:ext cx="914400" cy="548640"/>
-          </a:xfrm>
-          <a:prstGeom prst="rect">
-            <a:avLst/>
-          </a:prstGeom>
-          <a:noFill/>
-        </p:spPr>
-        <p:txBody>
-          <a:bodyPr wrap="square" anchor="t" lIns="0" rIns="0" tIns="0" bIns="0">
-            <a:spAutoFit/>
-          </a:bodyPr>
-          <a:lstStyle/>
-          <a:p>
-            <a:pPr algn="l"/>
-            <a:r>
-              <a:rPr sz="2400" b="0" i="0">
-                <a:solidFill>
-                  <a:srgbClr val="7AA8FF"/>
-                </a:solidFill>
-                <a:latin typeface="Open Sans"/>
-              </a:rPr>
-              <a:t>📦</a:t>
-            </a:r>
+          <p:cNvPr id="12" name="Oval 11"/>
+          <p:cNvSpPr/>
+          <p:nvPr/>
+        </p:nvSpPr>
+        <p:spPr>
+          <a:xfrm>
+            <a:off x="8631936" y="2075688"/>
+            <a:ext cx="146304" cy="146304"/>
+          </a:xfrm>
+          <a:prstGeom prst="ellipse">
+            <a:avLst/>
+          </a:prstGeom>
+          <a:solidFill>
+            <a:srgbClr val="7AA8FF"/>
+          </a:solidFill>
+          <a:ln>
+            <a:noFill/>
+          </a:ln>
+          <a:effectLst/>
+        </p:spPr>
+        <p:style>
+          <a:lnRef idx="1">
+            <a:schemeClr val="accent1"/>
+          </a:lnRef>
+          <a:fillRef idx="3">
+            <a:schemeClr val="accent1"/>
+          </a:fillRef>
+          <a:effectRef idx="2">
+            <a:schemeClr val="accent1"/>
+          </a:effectRef>
+          <a:fontRef idx="minor">
+            <a:schemeClr val="lt1"/>
+          </a:fontRef>
+        </p:style>
+        <p:txBody>
+          <a:bodyPr rtlCol="0" anchor="ctr"/>
+          <a:lstStyle/>
+          <a:p>
+            <a:pPr algn="ctr"/>
           </a:p>
         </p:txBody>
       </p:sp>
@@ -12488,7 +12553,7 @@
         </p:nvSpPr>
         <p:spPr>
           <a:xfrm>
-            <a:off x="8613648" y="2441448"/>
+            <a:off x="8613648" y="2386584"/>
             <a:ext cx="3008376" cy="731520"/>
           </a:xfrm>
           <a:prstGeom prst="rect">
@@ -12517,7 +12582,7 @@
                 </a:solidFill>
                 <a:latin typeface="Sora"/>
               </a:rPr>
-              <a:t>Live order tracking</a:t>
+              <a:t>Order tracking</a:t>
             </a:r>
           </a:p>
           <a:p>
@@ -12536,7 +12601,7 @@
                 </a:solidFill>
                 <a:latin typeface="Open Sans"/>
               </a:rPr>
-              <a:t>Real Shopify order data, zero hallucination</a:t>
+              <a:t>Tells customers exactly where their order is</a:t>
             </a:r>
           </a:p>
         </p:txBody>
@@ -12595,36 +12660,45 @@
       </p:sp>
       <p:sp>
         <p:nvSpPr>
-          <p:cNvPr id="15" name="TextBox 14"/>
-          <p:cNvSpPr txBox="1"/>
-          <p:nvPr/>
-        </p:nvSpPr>
-        <p:spPr>
-          <a:xfrm>
-            <a:off x="987552" y="3657600"/>
-            <a:ext cx="914400" cy="548640"/>
-          </a:xfrm>
-          <a:prstGeom prst="rect">
-            <a:avLst/>
-          </a:prstGeom>
-          <a:noFill/>
-        </p:spPr>
-        <p:txBody>
-          <a:bodyPr wrap="square" anchor="t" lIns="0" rIns="0" tIns="0" bIns="0">
-            <a:spAutoFit/>
-          </a:bodyPr>
-          <a:lstStyle/>
-          <a:p>
-            <a:pPr algn="l"/>
-            <a:r>
-              <a:rPr sz="2400" b="0" i="0">
-                <a:solidFill>
-                  <a:srgbClr val="7AA8FF"/>
-                </a:solidFill>
-                <a:latin typeface="Open Sans"/>
-              </a:rPr>
-              <a:t>⚡</a:t>
-            </a:r>
+          <p:cNvPr id="15" name="Oval 14"/>
+          <p:cNvSpPr/>
+          <p:nvPr/>
+        </p:nvSpPr>
+        <p:spPr>
+          <a:xfrm>
+            <a:off x="1005840" y="3767328"/>
+            <a:ext cx="146304" cy="146304"/>
+          </a:xfrm>
+          <a:prstGeom prst="ellipse">
+            <a:avLst/>
+          </a:prstGeom>
+          <a:solidFill>
+            <a:srgbClr val="7AA8FF"/>
+          </a:solidFill>
+          <a:ln>
+            <a:noFill/>
+          </a:ln>
+          <a:effectLst/>
+        </p:spPr>
+        <p:style>
+          <a:lnRef idx="1">
+            <a:schemeClr val="accent1"/>
+          </a:lnRef>
+          <a:fillRef idx="3">
+            <a:schemeClr val="accent1"/>
+          </a:fillRef>
+          <a:effectRef idx="2">
+            <a:schemeClr val="accent1"/>
+          </a:effectRef>
+          <a:fontRef idx="minor">
+            <a:schemeClr val="lt1"/>
+          </a:fontRef>
+        </p:style>
+        <p:txBody>
+          <a:bodyPr rtlCol="0" anchor="ctr"/>
+          <a:lstStyle/>
+          <a:p>
+            <a:pPr algn="ctr"/>
           </a:p>
         </p:txBody>
       </p:sp>
@@ -12636,7 +12710,7 @@
         </p:nvSpPr>
         <p:spPr>
           <a:xfrm>
-            <a:off x="987552" y="4133088"/>
+            <a:off x="987552" y="4078224"/>
             <a:ext cx="3008376" cy="731520"/>
           </a:xfrm>
           <a:prstGeom prst="rect">
@@ -12665,7 +12739,7 @@
                 </a:solidFill>
                 <a:latin typeface="Sora"/>
               </a:rPr>
-              <a:t>Smart pre-filter</a:t>
+              <a:t>Instant answers</a:t>
             </a:r>
           </a:p>
           <a:p>
@@ -12684,7 +12758,7 @@
                 </a:solidFill>
                 <a:latin typeface="Open Sans"/>
               </a:rPr>
-              <a:t>Mechanical checks before any AI is called</a:t>
+              <a:t>Common questions answered in a moment</a:t>
             </a:r>
           </a:p>
         </p:txBody>
@@ -12743,36 +12817,45 @@
       </p:sp>
       <p:sp>
         <p:nvSpPr>
-          <p:cNvPr id="18" name="TextBox 17"/>
-          <p:cNvSpPr txBox="1"/>
-          <p:nvPr/>
-        </p:nvSpPr>
-        <p:spPr>
-          <a:xfrm>
-            <a:off x="4800600" y="3657600"/>
-            <a:ext cx="914400" cy="548640"/>
-          </a:xfrm>
-          <a:prstGeom prst="rect">
-            <a:avLst/>
-          </a:prstGeom>
-          <a:noFill/>
-        </p:spPr>
-        <p:txBody>
-          <a:bodyPr wrap="square" anchor="t" lIns="0" rIns="0" tIns="0" bIns="0">
-            <a:spAutoFit/>
-          </a:bodyPr>
-          <a:lstStyle/>
-          <a:p>
-            <a:pPr algn="l"/>
-            <a:r>
-              <a:rPr sz="2400" b="0" i="0">
-                <a:solidFill>
-                  <a:srgbClr val="7AA8FF"/>
-                </a:solidFill>
-                <a:latin typeface="Open Sans"/>
-              </a:rPr>
-              <a:t>🎯</a:t>
-            </a:r>
+          <p:cNvPr id="18" name="Oval 17"/>
+          <p:cNvSpPr/>
+          <p:nvPr/>
+        </p:nvSpPr>
+        <p:spPr>
+          <a:xfrm>
+            <a:off x="4818888" y="3767328"/>
+            <a:ext cx="146304" cy="146304"/>
+          </a:xfrm>
+          <a:prstGeom prst="ellipse">
+            <a:avLst/>
+          </a:prstGeom>
+          <a:solidFill>
+            <a:srgbClr val="7AA8FF"/>
+          </a:solidFill>
+          <a:ln>
+            <a:noFill/>
+          </a:ln>
+          <a:effectLst/>
+        </p:spPr>
+        <p:style>
+          <a:lnRef idx="1">
+            <a:schemeClr val="accent1"/>
+          </a:lnRef>
+          <a:fillRef idx="3">
+            <a:schemeClr val="accent1"/>
+          </a:fillRef>
+          <a:effectRef idx="2">
+            <a:schemeClr val="accent1"/>
+          </a:effectRef>
+          <a:fontRef idx="minor">
+            <a:schemeClr val="lt1"/>
+          </a:fontRef>
+        </p:style>
+        <p:txBody>
+          <a:bodyPr rtlCol="0" anchor="ctr"/>
+          <a:lstStyle/>
+          <a:p>
+            <a:pPr algn="ctr"/>
           </a:p>
         </p:txBody>
       </p:sp>
@@ -12784,7 +12867,7 @@
         </p:nvSpPr>
         <p:spPr>
           <a:xfrm>
-            <a:off x="4800600" y="4133088"/>
+            <a:off x="4800600" y="4078224"/>
             <a:ext cx="3008376" cy="731520"/>
           </a:xfrm>
           <a:prstGeom prst="rect">
@@ -12813,7 +12896,7 @@
                 </a:solidFill>
                 <a:latin typeface="Sora"/>
               </a:rPr>
-              <a:t>Confidence scoring</a:t>
+              <a:t>Smart handoff</a:t>
             </a:r>
           </a:p>
           <a:p>
@@ -12832,7 +12915,7 @@
                 </a:solidFill>
                 <a:latin typeface="Open Sans"/>
               </a:rPr>
-              <a:t>Auto-escalates on low confidence or negativity</a:t>
+              <a:t>Knows when to bring in your team</a:t>
             </a:r>
           </a:p>
         </p:txBody>
@@ -12891,36 +12974,45 @@
       </p:sp>
       <p:sp>
         <p:nvSpPr>
-          <p:cNvPr id="21" name="TextBox 20"/>
-          <p:cNvSpPr txBox="1"/>
-          <p:nvPr/>
-        </p:nvSpPr>
-        <p:spPr>
-          <a:xfrm>
-            <a:off x="8613648" y="3657600"/>
-            <a:ext cx="914400" cy="548640"/>
-          </a:xfrm>
-          <a:prstGeom prst="rect">
-            <a:avLst/>
-          </a:prstGeom>
-          <a:noFill/>
-        </p:spPr>
-        <p:txBody>
-          <a:bodyPr wrap="square" anchor="t" lIns="0" rIns="0" tIns="0" bIns="0">
-            <a:spAutoFit/>
-          </a:bodyPr>
-          <a:lstStyle/>
-          <a:p>
-            <a:pPr algn="l"/>
-            <a:r>
-              <a:rPr sz="2400" b="0" i="0">
-                <a:solidFill>
-                  <a:srgbClr val="7AA8FF"/>
-                </a:solidFill>
-                <a:latin typeface="Open Sans"/>
-              </a:rPr>
-              <a:t>📊</a:t>
-            </a:r>
+          <p:cNvPr id="21" name="Oval 20"/>
+          <p:cNvSpPr/>
+          <p:nvPr/>
+        </p:nvSpPr>
+        <p:spPr>
+          <a:xfrm>
+            <a:off x="8631936" y="3767328"/>
+            <a:ext cx="146304" cy="146304"/>
+          </a:xfrm>
+          <a:prstGeom prst="ellipse">
+            <a:avLst/>
+          </a:prstGeom>
+          <a:solidFill>
+            <a:srgbClr val="7AA8FF"/>
+          </a:solidFill>
+          <a:ln>
+            <a:noFill/>
+          </a:ln>
+          <a:effectLst/>
+        </p:spPr>
+        <p:style>
+          <a:lnRef idx="1">
+            <a:schemeClr val="accent1"/>
+          </a:lnRef>
+          <a:fillRef idx="3">
+            <a:schemeClr val="accent1"/>
+          </a:fillRef>
+          <a:effectRef idx="2">
+            <a:schemeClr val="accent1"/>
+          </a:effectRef>
+          <a:fontRef idx="minor">
+            <a:schemeClr val="lt1"/>
+          </a:fontRef>
+        </p:style>
+        <p:txBody>
+          <a:bodyPr rtlCol="0" anchor="ctr"/>
+          <a:lstStyle/>
+          <a:p>
+            <a:pPr algn="ctr"/>
           </a:p>
         </p:txBody>
       </p:sp>
@@ -12932,7 +13024,7 @@
         </p:nvSpPr>
         <p:spPr>
           <a:xfrm>
-            <a:off x="8613648" y="4133088"/>
+            <a:off x="8613648" y="4078224"/>
             <a:ext cx="3008376" cy="731520"/>
           </a:xfrm>
           <a:prstGeom prst="rect">
@@ -12961,7 +13053,7 @@
                 </a:solidFill>
                 <a:latin typeface="Sora"/>
               </a:rPr>
-              <a:t>Analytics dashboard</a:t>
+              <a:t>Simple dashboard</a:t>
             </a:r>
           </a:p>
           <a:p>
@@ -12980,7 +13072,7 @@
                 </a:solidFill>
                 <a:latin typeface="Open Sans"/>
               </a:rPr>
-              <a:t>Volume, resolution rate, peak-hour heatmap</a:t>
+              <a:t>See your busiest hours and top questions</a:t>
             </a:r>
           </a:p>
         </p:txBody>
@@ -13039,36 +13131,45 @@
       </p:sp>
       <p:sp>
         <p:nvSpPr>
-          <p:cNvPr id="24" name="TextBox 23"/>
-          <p:cNvSpPr txBox="1"/>
-          <p:nvPr/>
-        </p:nvSpPr>
-        <p:spPr>
-          <a:xfrm>
-            <a:off x="987552" y="5349240"/>
-            <a:ext cx="914400" cy="548640"/>
-          </a:xfrm>
-          <a:prstGeom prst="rect">
-            <a:avLst/>
-          </a:prstGeom>
-          <a:noFill/>
-        </p:spPr>
-        <p:txBody>
-          <a:bodyPr wrap="square" anchor="t" lIns="0" rIns="0" tIns="0" bIns="0">
-            <a:spAutoFit/>
-          </a:bodyPr>
-          <a:lstStyle/>
-          <a:p>
-            <a:pPr algn="l"/>
-            <a:r>
-              <a:rPr sz="2400" b="0" i="0">
-                <a:solidFill>
-                  <a:srgbClr val="7AA8FF"/>
-                </a:solidFill>
-                <a:latin typeface="Open Sans"/>
-              </a:rPr>
-              <a:t>📚</a:t>
-            </a:r>
+          <p:cNvPr id="24" name="Oval 23"/>
+          <p:cNvSpPr/>
+          <p:nvPr/>
+        </p:nvSpPr>
+        <p:spPr>
+          <a:xfrm>
+            <a:off x="1005840" y="5458968"/>
+            <a:ext cx="146304" cy="146304"/>
+          </a:xfrm>
+          <a:prstGeom prst="ellipse">
+            <a:avLst/>
+          </a:prstGeom>
+          <a:solidFill>
+            <a:srgbClr val="7AA8FF"/>
+          </a:solidFill>
+          <a:ln>
+            <a:noFill/>
+          </a:ln>
+          <a:effectLst/>
+        </p:spPr>
+        <p:style>
+          <a:lnRef idx="1">
+            <a:schemeClr val="accent1"/>
+          </a:lnRef>
+          <a:fillRef idx="3">
+            <a:schemeClr val="accent1"/>
+          </a:fillRef>
+          <a:effectRef idx="2">
+            <a:schemeClr val="accent1"/>
+          </a:effectRef>
+          <a:fontRef idx="minor">
+            <a:schemeClr val="lt1"/>
+          </a:fontRef>
+        </p:style>
+        <p:txBody>
+          <a:bodyPr rtlCol="0" anchor="ctr"/>
+          <a:lstStyle/>
+          <a:p>
+            <a:pPr algn="ctr"/>
           </a:p>
         </p:txBody>
       </p:sp>
@@ -13080,7 +13181,7 @@
         </p:nvSpPr>
         <p:spPr>
           <a:xfrm>
-            <a:off x="987552" y="5824728"/>
+            <a:off x="987552" y="5769864"/>
             <a:ext cx="3008376" cy="731520"/>
           </a:xfrm>
           <a:prstGeom prst="rect">
@@ -13128,7 +13229,7 @@
                 </a:solidFill>
                 <a:latin typeface="Open Sans"/>
               </a:rPr>
-              <a:t>Attach facts to products; bot cites verbatim</a:t>
+              <a:t>Shares accurate details about your products</a:t>
             </a:r>
           </a:p>
         </p:txBody>
@@ -13187,36 +13288,45 @@
       </p:sp>
       <p:sp>
         <p:nvSpPr>
-          <p:cNvPr id="27" name="TextBox 26"/>
-          <p:cNvSpPr txBox="1"/>
-          <p:nvPr/>
-        </p:nvSpPr>
-        <p:spPr>
-          <a:xfrm>
-            <a:off x="4800600" y="5349240"/>
-            <a:ext cx="914400" cy="548640"/>
-          </a:xfrm>
-          <a:prstGeom prst="rect">
-            <a:avLst/>
-          </a:prstGeom>
-          <a:noFill/>
-        </p:spPr>
-        <p:txBody>
-          <a:bodyPr wrap="square" anchor="t" lIns="0" rIns="0" tIns="0" bIns="0">
-            <a:spAutoFit/>
-          </a:bodyPr>
-          <a:lstStyle/>
-          <a:p>
-            <a:pPr algn="l"/>
-            <a:r>
-              <a:rPr sz="2400" b="0" i="0">
-                <a:solidFill>
-                  <a:srgbClr val="7AA8FF"/>
-                </a:solidFill>
-                <a:latin typeface="Open Sans"/>
-              </a:rPr>
-              <a:t>🌙</a:t>
-            </a:r>
+          <p:cNvPr id="27" name="Oval 26"/>
+          <p:cNvSpPr/>
+          <p:nvPr/>
+        </p:nvSpPr>
+        <p:spPr>
+          <a:xfrm>
+            <a:off x="4818888" y="5458968"/>
+            <a:ext cx="146304" cy="146304"/>
+          </a:xfrm>
+          <a:prstGeom prst="ellipse">
+            <a:avLst/>
+          </a:prstGeom>
+          <a:solidFill>
+            <a:srgbClr val="7AA8FF"/>
+          </a:solidFill>
+          <a:ln>
+            <a:noFill/>
+          </a:ln>
+          <a:effectLst/>
+        </p:spPr>
+        <p:style>
+          <a:lnRef idx="1">
+            <a:schemeClr val="accent1"/>
+          </a:lnRef>
+          <a:fillRef idx="3">
+            <a:schemeClr val="accent1"/>
+          </a:fillRef>
+          <a:effectRef idx="2">
+            <a:schemeClr val="accent1"/>
+          </a:effectRef>
+          <a:fontRef idx="minor">
+            <a:schemeClr val="lt1"/>
+          </a:fontRef>
+        </p:style>
+        <p:txBody>
+          <a:bodyPr rtlCol="0" anchor="ctr"/>
+          <a:lstStyle/>
+          <a:p>
+            <a:pPr algn="ctr"/>
           </a:p>
         </p:txBody>
       </p:sp>
@@ -13228,7 +13338,7 @@
         </p:nvSpPr>
         <p:spPr>
           <a:xfrm>
-            <a:off x="4800600" y="5824728"/>
+            <a:off x="4800600" y="5769864"/>
             <a:ext cx="3008376" cy="731520"/>
           </a:xfrm>
           <a:prstGeom prst="rect">
@@ -13276,7 +13386,7 @@
                 </a:solidFill>
                 <a:latin typeface="Open Sans"/>
               </a:rPr>
-              <a:t>Context-aware off-hours messages, not templates</a:t>
+              <a:t>Keeps answering when you’re closed</a:t>
             </a:r>
           </a:p>
         </p:txBody>
@@ -13335,36 +13445,45 @@
       </p:sp>
       <p:sp>
         <p:nvSpPr>
-          <p:cNvPr id="30" name="TextBox 29"/>
-          <p:cNvSpPr txBox="1"/>
-          <p:nvPr/>
-        </p:nvSpPr>
-        <p:spPr>
-          <a:xfrm>
-            <a:off x="8613648" y="5349240"/>
-            <a:ext cx="914400" cy="548640"/>
-          </a:xfrm>
-          <a:prstGeom prst="rect">
-            <a:avLst/>
-          </a:prstGeom>
-          <a:noFill/>
-        </p:spPr>
-        <p:txBody>
-          <a:bodyPr wrap="square" anchor="t" lIns="0" rIns="0" tIns="0" bIns="0">
-            <a:spAutoFit/>
-          </a:bodyPr>
-          <a:lstStyle/>
-          <a:p>
-            <a:pPr algn="l"/>
-            <a:r>
-              <a:rPr sz="2400" b="0" i="0">
-                <a:solidFill>
-                  <a:srgbClr val="7AA8FF"/>
-                </a:solidFill>
-                <a:latin typeface="Open Sans"/>
-              </a:rPr>
-              <a:t>👍</a:t>
-            </a:r>
+          <p:cNvPr id="30" name="Oval 29"/>
+          <p:cNvSpPr/>
+          <p:nvPr/>
+        </p:nvSpPr>
+        <p:spPr>
+          <a:xfrm>
+            <a:off x="8631936" y="5458968"/>
+            <a:ext cx="146304" cy="146304"/>
+          </a:xfrm>
+          <a:prstGeom prst="ellipse">
+            <a:avLst/>
+          </a:prstGeom>
+          <a:solidFill>
+            <a:srgbClr val="7AA8FF"/>
+          </a:solidFill>
+          <a:ln>
+            <a:noFill/>
+          </a:ln>
+          <a:effectLst/>
+        </p:spPr>
+        <p:style>
+          <a:lnRef idx="1">
+            <a:schemeClr val="accent1"/>
+          </a:lnRef>
+          <a:fillRef idx="3">
+            <a:schemeClr val="accent1"/>
+          </a:fillRef>
+          <a:effectRef idx="2">
+            <a:schemeClr val="accent1"/>
+          </a:effectRef>
+          <a:fontRef idx="minor">
+            <a:schemeClr val="lt1"/>
+          </a:fontRef>
+        </p:style>
+        <p:txBody>
+          <a:bodyPr rtlCol="0" anchor="ctr"/>
+          <a:lstStyle/>
+          <a:p>
+            <a:pPr algn="ctr"/>
           </a:p>
         </p:txBody>
       </p:sp>
@@ -13376,7 +13495,7 @@
         </p:nvSpPr>
         <p:spPr>
           <a:xfrm>
-            <a:off x="8613648" y="5824728"/>
+            <a:off x="8613648" y="5769864"/>
             <a:ext cx="3008376" cy="731520"/>
           </a:xfrm>
           <a:prstGeom prst="rect">
@@ -13405,7 +13524,7 @@
                 </a:solidFill>
                 <a:latin typeface="Sora"/>
               </a:rPr>
-              <a:t>Feedback loop</a:t>
+              <a:t>Customer feedback</a:t>
             </a:r>
           </a:p>
           <a:p>
@@ -13424,7 +13543,7 @@
                 </a:solidFill>
                 <a:latin typeface="Open Sans"/>
               </a:rPr>
-              <a:t>“Was this helpful?” tunes future replies</a:t>
+              <a:t>Asks each customer if the answer helped</a:t>
             </a:r>
           </a:p>
         </p:txBody>
@@ -13483,7 +13602,7 @@
                 </a:solidFill>
                 <a:latin typeface="JetBrains Mono"/>
               </a:rPr>
-              <a:t>☰  Menu</a:t>
+              <a:t>‹  Menu</a:t>
             </a:r>
           </a:p>
         </p:txBody>
@@ -13927,7 +14046,7 @@
                 </a:solidFill>
                 <a:latin typeface="Open Sans"/>
               </a:rPr>
-              <a:t>Speaks Arabic &amp; Franco natively</a:t>
+              <a:t>Speaks Arabic and Franco-Arabic naturally</a:t>
             </a:r>
           </a:p>
         </p:txBody>
@@ -14067,7 +14186,7 @@
                 </a:solidFill>
                 <a:latin typeface="Open Sans"/>
               </a:rPr>
-              <a:t>Reads real Shopify order data</a:t>
+              <a:t>Gives accurate, up-to-date order updates</a:t>
             </a:r>
           </a:p>
         </p:txBody>
@@ -14137,7 +14256,7 @@
                 </a:solidFill>
                 <a:latin typeface="Open Sans"/>
               </a:rPr>
-              <a:t>Yet another dashboard to open</a:t>
+              <a:t>Yet another app to open</a:t>
             </a:r>
           </a:p>
         </p:txBody>
@@ -14207,7 +14326,7 @@
                 </a:solidFill>
                 <a:latin typeface="Open Sans"/>
               </a:rPr>
-              <a:t>Embedded in your Shopify Admin</a:t>
+              <a:t>Works right inside your store</a:t>
             </a:r>
           </a:p>
         </p:txBody>
@@ -14277,7 +14396,7 @@
                 </a:solidFill>
                 <a:latin typeface="Open Sans"/>
               </a:rPr>
-              <a:t>Burns tokens on “hi”</a:t>
+              <a:t>Replies sound robotic</a:t>
             </a:r>
           </a:p>
         </p:txBody>
@@ -14347,7 +14466,7 @@
                 </a:solidFill>
                 <a:latin typeface="Open Sans"/>
               </a:rPr>
-              <a:t>Pre-filters trivial messages free</a:t>
+              <a:t>Sounds like your brand</a:t>
             </a:r>
           </a:p>
         </p:txBody>
@@ -14417,7 +14536,7 @@
                 </a:solidFill>
                 <a:latin typeface="Open Sans"/>
               </a:rPr>
-              <a:t>Loops when confused</a:t>
+              <a:t>Gets stuck when confused</a:t>
             </a:r>
           </a:p>
         </p:txBody>
@@ -14487,7 +14606,7 @@
                 </a:solidFill>
                 <a:latin typeface="Open Sans"/>
               </a:rPr>
-              <a:t>Escalates to a human gracefully</a:t>
+              <a:t>Hands off to your team smoothly</a:t>
             </a:r>
           </a:p>
         </p:txBody>
@@ -14546,7 +14665,7 @@
                 </a:solidFill>
                 <a:latin typeface="JetBrains Mono"/>
               </a:rPr>
-              <a:t>☰  Menu</a:t>
+              <a:t>‹  Menu</a:t>
             </a:r>
           </a:p>
         </p:txBody>
@@ -14799,7 +14918,7 @@
                 </a:solidFill>
                 <a:latin typeface="Sora"/>
               </a:rPr>
-              <a:t>&lt; 2s</a:t>
+              <a:t>Seconds</a:t>
             </a:r>
           </a:p>
         </p:txBody>
@@ -14860,7 +14979,7 @@
                 </a:solidFill>
                 <a:latin typeface="Open Sans"/>
               </a:rPr>
-              <a:t>From customer message to a visible answer.</a:t>
+              <a:t>Customers get an answer almost the moment they ask.</a:t>
             </a:r>
           </a:p>
         </p:txBody>
@@ -15015,7 +15134,7 @@
                 </a:solidFill>
                 <a:latin typeface="Open Sans"/>
               </a:rPr>
-              <a:t>Arabic, English &amp; Franco-Arabic, auto-detected.</a:t>
+              <a:t>Arabic, English and Franco-Arabic, understood automatically.</a:t>
             </a:r>
           </a:p>
         </p:txBody>
@@ -15170,7 +15289,7 @@
                 </a:solidFill>
                 <a:latin typeface="Open Sans"/>
               </a:rPr>
-              <a:t>Never sleeps — customers always hear back.</a:t>
+              <a:t>Never sleeps — your customers always hear back.</a:t>
             </a:r>
           </a:p>
         </p:txBody>
@@ -15264,7 +15383,7 @@
                 </a:solidFill>
                 <a:latin typeface="Sora"/>
               </a:rPr>
-              <a:t>2+1</a:t>
+              <a:t>3</a:t>
             </a:r>
           </a:p>
         </p:txBody>
@@ -15325,7 +15444,7 @@
                 </a:solidFill>
                 <a:latin typeface="Open Sans"/>
               </a:rPr>
-              <a:t>Instagram + Shopify chat. WhatsApp coming soon.</a:t>
+              <a:t>Instagram and website chat today, WhatsApp soon.</a:t>
             </a:r>
           </a:p>
         </p:txBody>
@@ -15384,7 +15503,7 @@
                 </a:solidFill>
                 <a:latin typeface="JetBrains Mono"/>
               </a:rPr>
-              <a:t>☰  Menu</a:t>
+              <a:t>‹  Menu</a:t>
             </a:r>
           </a:p>
         </p:txBody>

--- a/proposal/LUMA_Business_Proposal.pptx
+++ b/proposal/LUMA_Business_Proposal.pptx
@@ -17,6 +17,8 @@
     <p:sldId id="265" r:id="rId16"/>
     <p:sldId id="266" r:id="rId17"/>
     <p:sldId id="267" r:id="rId18"/>
+    <p:sldId id="268" r:id="rId19"/>
+    <p:sldId id="269" r:id="rId20"/>
   </p:sldIdLst>
   <p:sldSz cx="12191695" cy="6858000" type="screen4x3"/>
   <p:notesSz cx="6858000" cy="9144000"/>
@@ -3455,7 +3457,7 @@
       <p:grpSpPr/>
       <p:pic>
         <p:nvPicPr>
-          <p:cNvPr id="2" name="Picture 1" descr="bg_light.png"/>
+          <p:cNvPr id="2" name="Picture 1" descr="bg_dark2.png"/>
           <p:cNvPicPr>
             <a:picLocks noChangeAspect="1"/>
           </p:cNvPicPr>
@@ -3485,7 +3487,7 @@
         </p:nvSpPr>
         <p:spPr>
           <a:xfrm>
-            <a:off x="777240" y="640080"/>
+            <a:off x="777240" y="777240"/>
             <a:ext cx="7315200" cy="365760"/>
           </a:xfrm>
           <a:prstGeom prst="rect">
@@ -3503,11 +3505,1912 @@
             <a:r>
               <a:rPr sz="1250" b="1" i="0" spc="260">
                 <a:solidFill>
+                  <a:srgbClr val="7AA8FF"/>
+                </a:solidFill>
+                <a:latin typeface="JetBrains Mono"/>
+              </a:rPr>
+              <a:t>07 · WHY LUMA</a:t>
+            </a:r>
+          </a:p>
+        </p:txBody>
+      </p:sp>
+      <p:sp>
+        <p:nvSpPr>
+          <p:cNvPr id="4" name="TextBox 3"/>
+          <p:cNvSpPr txBox="1"/>
+          <p:nvPr/>
+        </p:nvSpPr>
+        <p:spPr>
+          <a:xfrm>
+            <a:off x="731520" y="1143000"/>
+            <a:ext cx="10515600" cy="1280160"/>
+          </a:xfrm>
+          <a:prstGeom prst="rect">
+            <a:avLst/>
+          </a:prstGeom>
+          <a:noFill/>
+        </p:spPr>
+        <p:txBody>
+          <a:bodyPr wrap="square" anchor="t" lIns="0" rIns="0" tIns="0" bIns="0">
+            <a:spAutoFit/>
+          </a:bodyPr>
+          <a:lstStyle/>
+          <a:p>
+            <a:pPr algn="l">
+              <a:lnSpc>
+                <a:spcPct val="105000"/>
+              </a:lnSpc>
+              <a:spcAft>
+                <a:spcPts val="800"/>
+              </a:spcAft>
+            </a:pPr>
+            <a:r>
+              <a:rPr sz="3800" b="1" i="0">
+                <a:solidFill>
+                  <a:srgbClr val="FFFFFF"/>
+                </a:solidFill>
+                <a:latin typeface="Sora"/>
+              </a:rPr>
+              <a:t>Not a generic chatbot. </a:t>
+            </a:r>
+            <a:r>
+              <a:rPr sz="3800" b="1" i="0">
+                <a:solidFill>
+                  <a:srgbClr val="7AA8FF"/>
+                </a:solidFill>
+                <a:latin typeface="Sora"/>
+              </a:rPr>
+              <a:t>A real teammate.</a:t>
+            </a:r>
+          </a:p>
+          <a:p>
+            <a:pPr algn="l">
+              <a:lnSpc>
+                <a:spcPct val="105000"/>
+              </a:lnSpc>
+              <a:spcAft>
+                <a:spcPts val="800"/>
+              </a:spcAft>
+            </a:pPr>
+            <a:r>
+              <a:rPr sz="1500" b="0" i="0">
+                <a:solidFill>
+                  <a:srgbClr val="B3C2E0"/>
+                </a:solidFill>
+                <a:latin typeface="Open Sans"/>
+              </a:rPr>
+              <a:t>Built from the ground up for merchants who know that fast answers drive sales.</a:t>
+            </a:r>
+          </a:p>
+        </p:txBody>
+      </p:sp>
+      <p:sp>
+        <p:nvSpPr>
+          <p:cNvPr id="5" name="Rounded Rectangle 4"/>
+          <p:cNvSpPr/>
+          <p:nvPr/>
+        </p:nvSpPr>
+        <p:spPr>
+          <a:xfrm>
+            <a:off x="731520" y="2697480"/>
+            <a:ext cx="5349240" cy="548640"/>
+          </a:xfrm>
+          <a:prstGeom prst="roundRect">
+            <a:avLst>
+              <a:gd name="adj" fmla="val 18000"/>
+            </a:avLst>
+          </a:prstGeom>
+          <a:solidFill>
+            <a:srgbClr val="020108">
+              <a:alpha val="70000"/>
+            </a:srgbClr>
+          </a:solidFill>
+          <a:ln>
+            <a:noFill/>
+          </a:ln>
+          <a:effectLst/>
+        </p:spPr>
+        <p:style>
+          <a:lnRef idx="1">
+            <a:schemeClr val="accent1"/>
+          </a:lnRef>
+          <a:fillRef idx="3">
+            <a:schemeClr val="accent1"/>
+          </a:fillRef>
+          <a:effectRef idx="2">
+            <a:schemeClr val="accent1"/>
+          </a:effectRef>
+          <a:fontRef idx="minor">
+            <a:schemeClr val="lt1"/>
+          </a:fontRef>
+        </p:style>
+        <p:txBody>
+          <a:bodyPr rtlCol="0" anchor="ctr" wrap="square" lIns="164592" rIns="164592" tIns="73152" bIns="73152"/>
+          <a:lstStyle/>
+          <a:p>
+            <a:pPr algn="ctr"/>
+            <a:r>
+              <a:rPr sz="1300" b="1" i="0" spc="200">
+                <a:solidFill>
+                  <a:srgbClr val="B3C2E0"/>
+                </a:solidFill>
+                <a:latin typeface="JetBrains Mono"/>
+              </a:rPr>
+              <a:t>GENERIC CHATBOT</a:t>
+            </a:r>
+          </a:p>
+        </p:txBody>
+      </p:sp>
+      <p:sp>
+        <p:nvSpPr>
+          <p:cNvPr id="6" name="Rounded Rectangle 5"/>
+          <p:cNvSpPr/>
+          <p:nvPr/>
+        </p:nvSpPr>
+        <p:spPr>
+          <a:xfrm>
+            <a:off x="6355080" y="2697480"/>
+            <a:ext cx="5074920" cy="548640"/>
+          </a:xfrm>
+          <a:prstGeom prst="roundRect">
+            <a:avLst>
+              <a:gd name="adj" fmla="val 18000"/>
+            </a:avLst>
+          </a:prstGeom>
+          <a:solidFill>
+            <a:srgbClr val="4466FF"/>
+          </a:solidFill>
+          <a:ln>
+            <a:noFill/>
+          </a:ln>
+          <a:effectLst/>
+          <a:effectLst>
+            <a:outerShdw blurRad="180000" dist="90000" dir="5400000" rotWithShape="0">
+              <a:srgbClr val="1A1A6E">
+                <a:alpha val="34000"/>
+              </a:srgbClr>
+            </a:outerShdw>
+          </a:effectLst>
+        </p:spPr>
+        <p:style>
+          <a:lnRef idx="1">
+            <a:schemeClr val="accent1"/>
+          </a:lnRef>
+          <a:fillRef idx="3">
+            <a:schemeClr val="accent1"/>
+          </a:fillRef>
+          <a:effectRef idx="2">
+            <a:schemeClr val="accent1"/>
+          </a:effectRef>
+          <a:fontRef idx="minor">
+            <a:schemeClr val="lt1"/>
+          </a:fontRef>
+        </p:style>
+        <p:txBody>
+          <a:bodyPr rtlCol="0" anchor="ctr" wrap="square" lIns="164592" rIns="164592" tIns="73152" bIns="73152"/>
+          <a:lstStyle/>
+          <a:p>
+            <a:pPr algn="ctr"/>
+            <a:r>
+              <a:rPr sz="1300" b="1" i="0" spc="200">
+                <a:solidFill>
+                  <a:srgbClr val="FFFFFF"/>
+                </a:solidFill>
+                <a:latin typeface="JetBrains Mono"/>
+              </a:rPr>
+              <a:t>LUMA</a:t>
+            </a:r>
+          </a:p>
+        </p:txBody>
+      </p:sp>
+      <p:sp>
+        <p:nvSpPr>
+          <p:cNvPr id="7" name="Rounded Rectangle 6"/>
+          <p:cNvSpPr/>
+          <p:nvPr/>
+        </p:nvSpPr>
+        <p:spPr>
+          <a:xfrm>
+            <a:off x="731520" y="3410712"/>
+            <a:ext cx="5349240" cy="548640"/>
+          </a:xfrm>
+          <a:prstGeom prst="roundRect">
+            <a:avLst>
+              <a:gd name="adj" fmla="val 14000"/>
+            </a:avLst>
+          </a:prstGeom>
+          <a:solidFill>
+            <a:srgbClr val="080330">
+              <a:alpha val="45000"/>
+            </a:srgbClr>
+          </a:solidFill>
+          <a:ln w="5080">
+            <a:solidFill>
+              <a:srgbClr val="B3C2E0">
+                <a:alpha val="20000"/>
+              </a:srgbClr>
+            </a:solidFill>
+          </a:ln>
+          <a:effectLst/>
+        </p:spPr>
+        <p:style>
+          <a:lnRef idx="1">
+            <a:schemeClr val="accent1"/>
+          </a:lnRef>
+          <a:fillRef idx="3">
+            <a:schemeClr val="accent1"/>
+          </a:fillRef>
+          <a:effectRef idx="2">
+            <a:schemeClr val="accent1"/>
+          </a:effectRef>
+          <a:fontRef idx="minor">
+            <a:schemeClr val="lt1"/>
+          </a:fontRef>
+        </p:style>
+        <p:txBody>
+          <a:bodyPr rtlCol="0" anchor="ctr" wrap="square" lIns="164592" rIns="164592" tIns="73152" bIns="73152"/>
+          <a:lstStyle/>
+          <a:p>
+            <a:pPr algn="l"/>
+            <a:r>
+              <a:rPr sz="1200" b="1" i="0">
+                <a:solidFill>
+                  <a:srgbClr val="FF7A7A"/>
+                </a:solidFill>
+                <a:latin typeface="Open Sans"/>
+              </a:rPr>
+              <a:t>✕  </a:t>
+            </a:r>
+            <a:r>
+              <a:rPr sz="1250" b="0" i="0">
+                <a:solidFill>
+                  <a:srgbClr val="B3C2E0"/>
+                </a:solidFill>
+                <a:latin typeface="Open Sans"/>
+              </a:rPr>
+              <a:t>Translates word-for-word</a:t>
+            </a:r>
+          </a:p>
+        </p:txBody>
+      </p:sp>
+      <p:sp>
+        <p:nvSpPr>
+          <p:cNvPr id="8" name="Rounded Rectangle 7"/>
+          <p:cNvSpPr/>
+          <p:nvPr/>
+        </p:nvSpPr>
+        <p:spPr>
+          <a:xfrm>
+            <a:off x="6355080" y="3410712"/>
+            <a:ext cx="5074920" cy="548640"/>
+          </a:xfrm>
+          <a:prstGeom prst="roundRect">
+            <a:avLst>
+              <a:gd name="adj" fmla="val 14000"/>
+            </a:avLst>
+          </a:prstGeom>
+          <a:solidFill>
+            <a:srgbClr val="080330">
+              <a:alpha val="70000"/>
+            </a:srgbClr>
+          </a:solidFill>
+          <a:ln w="10160">
+            <a:solidFill>
+              <a:srgbClr val="4466FF">
+                <a:alpha val="60000"/>
+              </a:srgbClr>
+            </a:solidFill>
+          </a:ln>
+          <a:effectLst/>
+        </p:spPr>
+        <p:style>
+          <a:lnRef idx="1">
+            <a:schemeClr val="accent1"/>
+          </a:lnRef>
+          <a:fillRef idx="3">
+            <a:schemeClr val="accent1"/>
+          </a:fillRef>
+          <a:effectRef idx="2">
+            <a:schemeClr val="accent1"/>
+          </a:effectRef>
+          <a:fontRef idx="minor">
+            <a:schemeClr val="lt1"/>
+          </a:fontRef>
+        </p:style>
+        <p:txBody>
+          <a:bodyPr rtlCol="0" anchor="ctr" wrap="square" lIns="164592" rIns="164592" tIns="73152" bIns="73152"/>
+          <a:lstStyle/>
+          <a:p>
+            <a:pPr algn="l"/>
+            <a:r>
+              <a:rPr sz="1200" b="1" i="0">
+                <a:solidFill>
+                  <a:srgbClr val="22C55E"/>
+                </a:solidFill>
+                <a:latin typeface="Open Sans"/>
+              </a:rPr>
+              <a:t>✓  </a:t>
+            </a:r>
+            <a:r>
+              <a:rPr sz="1250" b="1" i="0">
+                <a:solidFill>
+                  <a:srgbClr val="FFFFFF"/>
+                </a:solidFill>
+                <a:latin typeface="Open Sans"/>
+              </a:rPr>
+              <a:t>Speaks Arabic and Franco-Arabic naturally</a:t>
+            </a:r>
+          </a:p>
+        </p:txBody>
+      </p:sp>
+      <p:sp>
+        <p:nvSpPr>
+          <p:cNvPr id="9" name="Rounded Rectangle 8"/>
+          <p:cNvSpPr/>
+          <p:nvPr/>
+        </p:nvSpPr>
+        <p:spPr>
+          <a:xfrm>
+            <a:off x="731520" y="4050792"/>
+            <a:ext cx="5349240" cy="548640"/>
+          </a:xfrm>
+          <a:prstGeom prst="roundRect">
+            <a:avLst>
+              <a:gd name="adj" fmla="val 14000"/>
+            </a:avLst>
+          </a:prstGeom>
+          <a:solidFill>
+            <a:srgbClr val="080330">
+              <a:alpha val="45000"/>
+            </a:srgbClr>
+          </a:solidFill>
+          <a:ln w="5080">
+            <a:solidFill>
+              <a:srgbClr val="B3C2E0">
+                <a:alpha val="20000"/>
+              </a:srgbClr>
+            </a:solidFill>
+          </a:ln>
+          <a:effectLst/>
+        </p:spPr>
+        <p:style>
+          <a:lnRef idx="1">
+            <a:schemeClr val="accent1"/>
+          </a:lnRef>
+          <a:fillRef idx="3">
+            <a:schemeClr val="accent1"/>
+          </a:fillRef>
+          <a:effectRef idx="2">
+            <a:schemeClr val="accent1"/>
+          </a:effectRef>
+          <a:fontRef idx="minor">
+            <a:schemeClr val="lt1"/>
+          </a:fontRef>
+        </p:style>
+        <p:txBody>
+          <a:bodyPr rtlCol="0" anchor="ctr" wrap="square" lIns="164592" rIns="164592" tIns="73152" bIns="73152"/>
+          <a:lstStyle/>
+          <a:p>
+            <a:pPr algn="l"/>
+            <a:r>
+              <a:rPr sz="1200" b="1" i="0">
+                <a:solidFill>
+                  <a:srgbClr val="FF7A7A"/>
+                </a:solidFill>
+                <a:latin typeface="Open Sans"/>
+              </a:rPr>
+              <a:t>✕  </a:t>
+            </a:r>
+            <a:r>
+              <a:rPr sz="1250" b="0" i="0">
+                <a:solidFill>
+                  <a:srgbClr val="B3C2E0"/>
+                </a:solidFill>
+                <a:latin typeface="Open Sans"/>
+              </a:rPr>
+              <a:t>Guesses order status</a:t>
+            </a:r>
+          </a:p>
+        </p:txBody>
+      </p:sp>
+      <p:sp>
+        <p:nvSpPr>
+          <p:cNvPr id="10" name="Rounded Rectangle 9"/>
+          <p:cNvSpPr/>
+          <p:nvPr/>
+        </p:nvSpPr>
+        <p:spPr>
+          <a:xfrm>
+            <a:off x="6355080" y="4050792"/>
+            <a:ext cx="5074920" cy="548640"/>
+          </a:xfrm>
+          <a:prstGeom prst="roundRect">
+            <a:avLst>
+              <a:gd name="adj" fmla="val 14000"/>
+            </a:avLst>
+          </a:prstGeom>
+          <a:solidFill>
+            <a:srgbClr val="080330">
+              <a:alpha val="70000"/>
+            </a:srgbClr>
+          </a:solidFill>
+          <a:ln w="10160">
+            <a:solidFill>
+              <a:srgbClr val="4466FF">
+                <a:alpha val="60000"/>
+              </a:srgbClr>
+            </a:solidFill>
+          </a:ln>
+          <a:effectLst/>
+        </p:spPr>
+        <p:style>
+          <a:lnRef idx="1">
+            <a:schemeClr val="accent1"/>
+          </a:lnRef>
+          <a:fillRef idx="3">
+            <a:schemeClr val="accent1"/>
+          </a:fillRef>
+          <a:effectRef idx="2">
+            <a:schemeClr val="accent1"/>
+          </a:effectRef>
+          <a:fontRef idx="minor">
+            <a:schemeClr val="lt1"/>
+          </a:fontRef>
+        </p:style>
+        <p:txBody>
+          <a:bodyPr rtlCol="0" anchor="ctr" wrap="square" lIns="164592" rIns="164592" tIns="73152" bIns="73152"/>
+          <a:lstStyle/>
+          <a:p>
+            <a:pPr algn="l"/>
+            <a:r>
+              <a:rPr sz="1200" b="1" i="0">
+                <a:solidFill>
+                  <a:srgbClr val="22C55E"/>
+                </a:solidFill>
+                <a:latin typeface="Open Sans"/>
+              </a:rPr>
+              <a:t>✓  </a:t>
+            </a:r>
+            <a:r>
+              <a:rPr sz="1250" b="1" i="0">
+                <a:solidFill>
+                  <a:srgbClr val="FFFFFF"/>
+                </a:solidFill>
+                <a:latin typeface="Open Sans"/>
+              </a:rPr>
+              <a:t>Gives accurate, up-to-date order updates</a:t>
+            </a:r>
+          </a:p>
+        </p:txBody>
+      </p:sp>
+      <p:sp>
+        <p:nvSpPr>
+          <p:cNvPr id="11" name="Rounded Rectangle 10"/>
+          <p:cNvSpPr/>
+          <p:nvPr/>
+        </p:nvSpPr>
+        <p:spPr>
+          <a:xfrm>
+            <a:off x="731520" y="4690872"/>
+            <a:ext cx="5349240" cy="548640"/>
+          </a:xfrm>
+          <a:prstGeom prst="roundRect">
+            <a:avLst>
+              <a:gd name="adj" fmla="val 14000"/>
+            </a:avLst>
+          </a:prstGeom>
+          <a:solidFill>
+            <a:srgbClr val="080330">
+              <a:alpha val="45000"/>
+            </a:srgbClr>
+          </a:solidFill>
+          <a:ln w="5080">
+            <a:solidFill>
+              <a:srgbClr val="B3C2E0">
+                <a:alpha val="20000"/>
+              </a:srgbClr>
+            </a:solidFill>
+          </a:ln>
+          <a:effectLst/>
+        </p:spPr>
+        <p:style>
+          <a:lnRef idx="1">
+            <a:schemeClr val="accent1"/>
+          </a:lnRef>
+          <a:fillRef idx="3">
+            <a:schemeClr val="accent1"/>
+          </a:fillRef>
+          <a:effectRef idx="2">
+            <a:schemeClr val="accent1"/>
+          </a:effectRef>
+          <a:fontRef idx="minor">
+            <a:schemeClr val="lt1"/>
+          </a:fontRef>
+        </p:style>
+        <p:txBody>
+          <a:bodyPr rtlCol="0" anchor="ctr" wrap="square" lIns="164592" rIns="164592" tIns="73152" bIns="73152"/>
+          <a:lstStyle/>
+          <a:p>
+            <a:pPr algn="l"/>
+            <a:r>
+              <a:rPr sz="1200" b="1" i="0">
+                <a:solidFill>
+                  <a:srgbClr val="FF7A7A"/>
+                </a:solidFill>
+                <a:latin typeface="Open Sans"/>
+              </a:rPr>
+              <a:t>✕  </a:t>
+            </a:r>
+            <a:r>
+              <a:rPr sz="1250" b="0" i="0">
+                <a:solidFill>
+                  <a:srgbClr val="B3C2E0"/>
+                </a:solidFill>
+                <a:latin typeface="Open Sans"/>
+              </a:rPr>
+              <a:t>Yet another app to open</a:t>
+            </a:r>
+          </a:p>
+        </p:txBody>
+      </p:sp>
+      <p:sp>
+        <p:nvSpPr>
+          <p:cNvPr id="12" name="Rounded Rectangle 11"/>
+          <p:cNvSpPr/>
+          <p:nvPr/>
+        </p:nvSpPr>
+        <p:spPr>
+          <a:xfrm>
+            <a:off x="6355080" y="4690872"/>
+            <a:ext cx="5074920" cy="548640"/>
+          </a:xfrm>
+          <a:prstGeom prst="roundRect">
+            <a:avLst>
+              <a:gd name="adj" fmla="val 14000"/>
+            </a:avLst>
+          </a:prstGeom>
+          <a:solidFill>
+            <a:srgbClr val="080330">
+              <a:alpha val="70000"/>
+            </a:srgbClr>
+          </a:solidFill>
+          <a:ln w="10160">
+            <a:solidFill>
+              <a:srgbClr val="4466FF">
+                <a:alpha val="60000"/>
+              </a:srgbClr>
+            </a:solidFill>
+          </a:ln>
+          <a:effectLst/>
+        </p:spPr>
+        <p:style>
+          <a:lnRef idx="1">
+            <a:schemeClr val="accent1"/>
+          </a:lnRef>
+          <a:fillRef idx="3">
+            <a:schemeClr val="accent1"/>
+          </a:fillRef>
+          <a:effectRef idx="2">
+            <a:schemeClr val="accent1"/>
+          </a:effectRef>
+          <a:fontRef idx="minor">
+            <a:schemeClr val="lt1"/>
+          </a:fontRef>
+        </p:style>
+        <p:txBody>
+          <a:bodyPr rtlCol="0" anchor="ctr" wrap="square" lIns="164592" rIns="164592" tIns="73152" bIns="73152"/>
+          <a:lstStyle/>
+          <a:p>
+            <a:pPr algn="l"/>
+            <a:r>
+              <a:rPr sz="1200" b="1" i="0">
+                <a:solidFill>
+                  <a:srgbClr val="22C55E"/>
+                </a:solidFill>
+                <a:latin typeface="Open Sans"/>
+              </a:rPr>
+              <a:t>✓  </a:t>
+            </a:r>
+            <a:r>
+              <a:rPr sz="1250" b="1" i="0">
+                <a:solidFill>
+                  <a:srgbClr val="FFFFFF"/>
+                </a:solidFill>
+                <a:latin typeface="Open Sans"/>
+              </a:rPr>
+              <a:t>Works right inside your store</a:t>
+            </a:r>
+          </a:p>
+        </p:txBody>
+      </p:sp>
+      <p:sp>
+        <p:nvSpPr>
+          <p:cNvPr id="13" name="Rounded Rectangle 12"/>
+          <p:cNvSpPr/>
+          <p:nvPr/>
+        </p:nvSpPr>
+        <p:spPr>
+          <a:xfrm>
+            <a:off x="731520" y="5330952"/>
+            <a:ext cx="5349240" cy="548640"/>
+          </a:xfrm>
+          <a:prstGeom prst="roundRect">
+            <a:avLst>
+              <a:gd name="adj" fmla="val 14000"/>
+            </a:avLst>
+          </a:prstGeom>
+          <a:solidFill>
+            <a:srgbClr val="080330">
+              <a:alpha val="45000"/>
+            </a:srgbClr>
+          </a:solidFill>
+          <a:ln w="5080">
+            <a:solidFill>
+              <a:srgbClr val="B3C2E0">
+                <a:alpha val="20000"/>
+              </a:srgbClr>
+            </a:solidFill>
+          </a:ln>
+          <a:effectLst/>
+        </p:spPr>
+        <p:style>
+          <a:lnRef idx="1">
+            <a:schemeClr val="accent1"/>
+          </a:lnRef>
+          <a:fillRef idx="3">
+            <a:schemeClr val="accent1"/>
+          </a:fillRef>
+          <a:effectRef idx="2">
+            <a:schemeClr val="accent1"/>
+          </a:effectRef>
+          <a:fontRef idx="minor">
+            <a:schemeClr val="lt1"/>
+          </a:fontRef>
+        </p:style>
+        <p:txBody>
+          <a:bodyPr rtlCol="0" anchor="ctr" wrap="square" lIns="164592" rIns="164592" tIns="73152" bIns="73152"/>
+          <a:lstStyle/>
+          <a:p>
+            <a:pPr algn="l"/>
+            <a:r>
+              <a:rPr sz="1200" b="1" i="0">
+                <a:solidFill>
+                  <a:srgbClr val="FF7A7A"/>
+                </a:solidFill>
+                <a:latin typeface="Open Sans"/>
+              </a:rPr>
+              <a:t>✕  </a:t>
+            </a:r>
+            <a:r>
+              <a:rPr sz="1250" b="0" i="0">
+                <a:solidFill>
+                  <a:srgbClr val="B3C2E0"/>
+                </a:solidFill>
+                <a:latin typeface="Open Sans"/>
+              </a:rPr>
+              <a:t>Replies sound robotic</a:t>
+            </a:r>
+          </a:p>
+        </p:txBody>
+      </p:sp>
+      <p:sp>
+        <p:nvSpPr>
+          <p:cNvPr id="14" name="Rounded Rectangle 13"/>
+          <p:cNvSpPr/>
+          <p:nvPr/>
+        </p:nvSpPr>
+        <p:spPr>
+          <a:xfrm>
+            <a:off x="6355080" y="5330952"/>
+            <a:ext cx="5074920" cy="548640"/>
+          </a:xfrm>
+          <a:prstGeom prst="roundRect">
+            <a:avLst>
+              <a:gd name="adj" fmla="val 14000"/>
+            </a:avLst>
+          </a:prstGeom>
+          <a:solidFill>
+            <a:srgbClr val="080330">
+              <a:alpha val="70000"/>
+            </a:srgbClr>
+          </a:solidFill>
+          <a:ln w="10160">
+            <a:solidFill>
+              <a:srgbClr val="4466FF">
+                <a:alpha val="60000"/>
+              </a:srgbClr>
+            </a:solidFill>
+          </a:ln>
+          <a:effectLst/>
+        </p:spPr>
+        <p:style>
+          <a:lnRef idx="1">
+            <a:schemeClr val="accent1"/>
+          </a:lnRef>
+          <a:fillRef idx="3">
+            <a:schemeClr val="accent1"/>
+          </a:fillRef>
+          <a:effectRef idx="2">
+            <a:schemeClr val="accent1"/>
+          </a:effectRef>
+          <a:fontRef idx="minor">
+            <a:schemeClr val="lt1"/>
+          </a:fontRef>
+        </p:style>
+        <p:txBody>
+          <a:bodyPr rtlCol="0" anchor="ctr" wrap="square" lIns="164592" rIns="164592" tIns="73152" bIns="73152"/>
+          <a:lstStyle/>
+          <a:p>
+            <a:pPr algn="l"/>
+            <a:r>
+              <a:rPr sz="1200" b="1" i="0">
+                <a:solidFill>
+                  <a:srgbClr val="22C55E"/>
+                </a:solidFill>
+                <a:latin typeface="Open Sans"/>
+              </a:rPr>
+              <a:t>✓  </a:t>
+            </a:r>
+            <a:r>
+              <a:rPr sz="1250" b="1" i="0">
+                <a:solidFill>
+                  <a:srgbClr val="FFFFFF"/>
+                </a:solidFill>
+                <a:latin typeface="Open Sans"/>
+              </a:rPr>
+              <a:t>Sounds like your brand</a:t>
+            </a:r>
+          </a:p>
+        </p:txBody>
+      </p:sp>
+      <p:sp>
+        <p:nvSpPr>
+          <p:cNvPr id="15" name="Rounded Rectangle 14"/>
+          <p:cNvSpPr/>
+          <p:nvPr/>
+        </p:nvSpPr>
+        <p:spPr>
+          <a:xfrm>
+            <a:off x="731520" y="5971032"/>
+            <a:ext cx="5349240" cy="548640"/>
+          </a:xfrm>
+          <a:prstGeom prst="roundRect">
+            <a:avLst>
+              <a:gd name="adj" fmla="val 14000"/>
+            </a:avLst>
+          </a:prstGeom>
+          <a:solidFill>
+            <a:srgbClr val="080330">
+              <a:alpha val="45000"/>
+            </a:srgbClr>
+          </a:solidFill>
+          <a:ln w="5080">
+            <a:solidFill>
+              <a:srgbClr val="B3C2E0">
+                <a:alpha val="20000"/>
+              </a:srgbClr>
+            </a:solidFill>
+          </a:ln>
+          <a:effectLst/>
+        </p:spPr>
+        <p:style>
+          <a:lnRef idx="1">
+            <a:schemeClr val="accent1"/>
+          </a:lnRef>
+          <a:fillRef idx="3">
+            <a:schemeClr val="accent1"/>
+          </a:fillRef>
+          <a:effectRef idx="2">
+            <a:schemeClr val="accent1"/>
+          </a:effectRef>
+          <a:fontRef idx="minor">
+            <a:schemeClr val="lt1"/>
+          </a:fontRef>
+        </p:style>
+        <p:txBody>
+          <a:bodyPr rtlCol="0" anchor="ctr" wrap="square" lIns="164592" rIns="164592" tIns="73152" bIns="73152"/>
+          <a:lstStyle/>
+          <a:p>
+            <a:pPr algn="l"/>
+            <a:r>
+              <a:rPr sz="1200" b="1" i="0">
+                <a:solidFill>
+                  <a:srgbClr val="FF7A7A"/>
+                </a:solidFill>
+                <a:latin typeface="Open Sans"/>
+              </a:rPr>
+              <a:t>✕  </a:t>
+            </a:r>
+            <a:r>
+              <a:rPr sz="1250" b="0" i="0">
+                <a:solidFill>
+                  <a:srgbClr val="B3C2E0"/>
+                </a:solidFill>
+                <a:latin typeface="Open Sans"/>
+              </a:rPr>
+              <a:t>Gets stuck when confused</a:t>
+            </a:r>
+          </a:p>
+        </p:txBody>
+      </p:sp>
+      <p:sp>
+        <p:nvSpPr>
+          <p:cNvPr id="16" name="Rounded Rectangle 15"/>
+          <p:cNvSpPr/>
+          <p:nvPr/>
+        </p:nvSpPr>
+        <p:spPr>
+          <a:xfrm>
+            <a:off x="6355080" y="5971032"/>
+            <a:ext cx="5074920" cy="548640"/>
+          </a:xfrm>
+          <a:prstGeom prst="roundRect">
+            <a:avLst>
+              <a:gd name="adj" fmla="val 14000"/>
+            </a:avLst>
+          </a:prstGeom>
+          <a:solidFill>
+            <a:srgbClr val="080330">
+              <a:alpha val="70000"/>
+            </a:srgbClr>
+          </a:solidFill>
+          <a:ln w="10160">
+            <a:solidFill>
+              <a:srgbClr val="4466FF">
+                <a:alpha val="60000"/>
+              </a:srgbClr>
+            </a:solidFill>
+          </a:ln>
+          <a:effectLst/>
+        </p:spPr>
+        <p:style>
+          <a:lnRef idx="1">
+            <a:schemeClr val="accent1"/>
+          </a:lnRef>
+          <a:fillRef idx="3">
+            <a:schemeClr val="accent1"/>
+          </a:fillRef>
+          <a:effectRef idx="2">
+            <a:schemeClr val="accent1"/>
+          </a:effectRef>
+          <a:fontRef idx="minor">
+            <a:schemeClr val="lt1"/>
+          </a:fontRef>
+        </p:style>
+        <p:txBody>
+          <a:bodyPr rtlCol="0" anchor="ctr" wrap="square" lIns="164592" rIns="164592" tIns="73152" bIns="73152"/>
+          <a:lstStyle/>
+          <a:p>
+            <a:pPr algn="l"/>
+            <a:r>
+              <a:rPr sz="1200" b="1" i="0">
+                <a:solidFill>
+                  <a:srgbClr val="22C55E"/>
+                </a:solidFill>
+                <a:latin typeface="Open Sans"/>
+              </a:rPr>
+              <a:t>✓  </a:t>
+            </a:r>
+            <a:r>
+              <a:rPr sz="1250" b="1" i="0">
+                <a:solidFill>
+                  <a:srgbClr val="FFFFFF"/>
+                </a:solidFill>
+                <a:latin typeface="Open Sans"/>
+              </a:rPr>
+              <a:t>Hands off to your team smoothly</a:t>
+            </a:r>
+          </a:p>
+        </p:txBody>
+      </p:sp>
+      <p:sp>
+        <p:nvSpPr>
+          <p:cNvPr id="17" name="Rounded Rectangle 16">
+            <a:hlinkClick r:id="rId3" action="ppaction://hlinksldjump"/>
+          </p:cNvPr>
+          <p:cNvSpPr/>
+          <p:nvPr/>
+        </p:nvSpPr>
+        <p:spPr>
+          <a:xfrm>
+            <a:off x="411480" y="6327648"/>
+            <a:ext cx="1051560" cy="384048"/>
+          </a:xfrm>
+          <a:prstGeom prst="roundRect">
+            <a:avLst>
+              <a:gd name="adj" fmla="val 50000"/>
+            </a:avLst>
+          </a:prstGeom>
+          <a:noFill/>
+          <a:ln w="12700">
+            <a:solidFill>
+              <a:srgbClr val="7AA8FF">
+                <a:alpha val="70000"/>
+              </a:srgbClr>
+            </a:solidFill>
+          </a:ln>
+          <a:effectLst/>
+        </p:spPr>
+        <p:style>
+          <a:lnRef idx="1">
+            <a:schemeClr val="accent1"/>
+          </a:lnRef>
+          <a:fillRef idx="3">
+            <a:schemeClr val="accent1"/>
+          </a:fillRef>
+          <a:effectRef idx="2">
+            <a:schemeClr val="accent1"/>
+          </a:effectRef>
+          <a:fontRef idx="minor">
+            <a:schemeClr val="lt1"/>
+          </a:fontRef>
+        </p:style>
+        <p:txBody>
+          <a:bodyPr rtlCol="0" anchor="ctr" wrap="square" lIns="164592" rIns="164592" tIns="73152" bIns="73152"/>
+          <a:lstStyle/>
+          <a:p>
+            <a:pPr algn="ctr"/>
+            <a:r>
+              <a:rPr sz="1050" b="1" i="0">
+                <a:solidFill>
+                  <a:srgbClr val="7AA8FF"/>
+                </a:solidFill>
+                <a:latin typeface="JetBrains Mono"/>
+              </a:rPr>
+              <a:t>‹  Menu</a:t>
+            </a:r>
+          </a:p>
+        </p:txBody>
+      </p:sp>
+      <p:sp>
+        <p:nvSpPr>
+          <p:cNvPr id="18" name="TextBox 17"/>
+          <p:cNvSpPr txBox="1"/>
+          <p:nvPr/>
+        </p:nvSpPr>
+        <p:spPr>
+          <a:xfrm>
+            <a:off x="10881360" y="6355080"/>
+            <a:ext cx="914400" cy="365760"/>
+          </a:xfrm>
+          <a:prstGeom prst="rect">
+            <a:avLst/>
+          </a:prstGeom>
+          <a:noFill/>
+        </p:spPr>
+        <p:txBody>
+          <a:bodyPr wrap="square" anchor="t" lIns="0" rIns="0" tIns="0" bIns="0">
+            <a:spAutoFit/>
+          </a:bodyPr>
+          <a:lstStyle/>
+          <a:p>
+            <a:pPr algn="r"/>
+            <a:r>
+              <a:rPr sz="1000" b="0" i="0">
+                <a:solidFill>
+                  <a:srgbClr val="B3C2E0"/>
+                </a:solidFill>
+                <a:latin typeface="JetBrains Mono"/>
+              </a:rPr>
+              <a:t>10 / 14</a:t>
+            </a:r>
+          </a:p>
+        </p:txBody>
+      </p:sp>
+    </p:spTree>
+  </p:cSld>
+  <p:clrMapOvr>
+    <a:masterClrMapping/>
+  </p:clrMapOvr>
+  <p:transition spd="med">
+    <p:wipe dir="u"/>
+  </p:transition>
+</p:sld>
+</file>
+
+<file path=ppt/slides/slide11.xml><?xml version="1.0" encoding="utf-8"?>
+<p:sld xmlns:a="http://schemas.openxmlformats.org/drawingml/2006/main" xmlns:p="http://schemas.openxmlformats.org/presentationml/2006/main" xmlns:r="http://schemas.openxmlformats.org/officeDocument/2006/relationships">
+  <p:cSld>
+    <p:spTree>
+      <p:nvGrpSpPr>
+        <p:cNvPr id="1" name=""/>
+        <p:cNvGrpSpPr/>
+        <p:nvPr/>
+      </p:nvGrpSpPr>
+      <p:grpSpPr/>
+      <p:pic>
+        <p:nvPicPr>
+          <p:cNvPr id="2" name="Picture 1" descr="bg_cover.png"/>
+          <p:cNvPicPr>
+            <a:picLocks noChangeAspect="1"/>
+          </p:cNvPicPr>
+          <p:nvPr/>
+        </p:nvPicPr>
+        <p:blipFill>
+          <a:blip r:embed="rId2"/>
+          <a:stretch>
+            <a:fillRect/>
+          </a:stretch>
+        </p:blipFill>
+        <p:spPr>
+          <a:xfrm>
+            <a:off x="0" y="0"/>
+            <a:ext cx="12191695" cy="6858000"/>
+          </a:xfrm>
+          <a:prstGeom prst="rect">
+            <a:avLst/>
+          </a:prstGeom>
+        </p:spPr>
+      </p:pic>
+      <p:sp>
+        <p:nvSpPr>
+          <p:cNvPr id="3" name="TextBox 2"/>
+          <p:cNvSpPr txBox="1"/>
+          <p:nvPr/>
+        </p:nvSpPr>
+        <p:spPr>
+          <a:xfrm>
+            <a:off x="777240" y="868680"/>
+            <a:ext cx="7315200" cy="365760"/>
+          </a:xfrm>
+          <a:prstGeom prst="rect">
+            <a:avLst/>
+          </a:prstGeom>
+          <a:noFill/>
+        </p:spPr>
+        <p:txBody>
+          <a:bodyPr wrap="square" anchor="t" lIns="0" rIns="0" tIns="0" bIns="0">
+            <a:spAutoFit/>
+          </a:bodyPr>
+          <a:lstStyle/>
+          <a:p>
+            <a:pPr algn="l"/>
+            <a:r>
+              <a:rPr sz="1250" b="1" i="0" spc="260">
+                <a:solidFill>
+                  <a:srgbClr val="B3CCFF"/>
+                </a:solidFill>
+                <a:latin typeface="JetBrains Mono"/>
+              </a:rPr>
+              <a:t>08 · PROVEN PERFORMANCE</a:t>
+            </a:r>
+          </a:p>
+        </p:txBody>
+      </p:sp>
+      <p:sp>
+        <p:nvSpPr>
+          <p:cNvPr id="4" name="TextBox 3"/>
+          <p:cNvSpPr txBox="1"/>
+          <p:nvPr/>
+        </p:nvSpPr>
+        <p:spPr>
+          <a:xfrm>
+            <a:off x="731520" y="1234440"/>
+            <a:ext cx="10515600" cy="914400"/>
+          </a:xfrm>
+          <a:prstGeom prst="rect">
+            <a:avLst/>
+          </a:prstGeom>
+          <a:noFill/>
+        </p:spPr>
+        <p:txBody>
+          <a:bodyPr wrap="square" anchor="t" lIns="0" rIns="0" tIns="0" bIns="0">
+            <a:spAutoFit/>
+          </a:bodyPr>
+          <a:lstStyle/>
+          <a:p>
+            <a:pPr algn="l"/>
+            <a:r>
+              <a:rPr sz="3400" b="1" i="0">
+                <a:solidFill>
+                  <a:srgbClr val="FFFFFF"/>
+                </a:solidFill>
+                <a:latin typeface="Sora"/>
+              </a:rPr>
+              <a:t>Numbers that turn conversations into </a:t>
+            </a:r>
+            <a:r>
+              <a:rPr sz="3400" b="1" i="0">
+                <a:solidFill>
+                  <a:srgbClr val="7AA8FF"/>
+                </a:solidFill>
+                <a:latin typeface="Sora"/>
+              </a:rPr>
+              <a:t>revenue</a:t>
+            </a:r>
+          </a:p>
+        </p:txBody>
+      </p:sp>
+      <p:sp>
+        <p:nvSpPr>
+          <p:cNvPr id="5" name="Rounded Rectangle 4"/>
+          <p:cNvSpPr/>
+          <p:nvPr/>
+        </p:nvSpPr>
+        <p:spPr>
+          <a:xfrm>
+            <a:off x="731520" y="2743200"/>
+            <a:ext cx="2606040" cy="2743200"/>
+          </a:xfrm>
+          <a:prstGeom prst="roundRect">
+            <a:avLst>
+              <a:gd name="adj" fmla="val 8000"/>
+            </a:avLst>
+          </a:prstGeom>
+          <a:solidFill>
+            <a:srgbClr val="080330">
+              <a:alpha val="70000"/>
+            </a:srgbClr>
+          </a:solidFill>
+          <a:ln w="12700">
+            <a:solidFill>
+              <a:srgbClr val="4466FF">
+                <a:alpha val="55000"/>
+              </a:srgbClr>
+            </a:solidFill>
+          </a:ln>
+          <a:effectLst/>
+          <a:effectLst>
+            <a:outerShdw blurRad="180000" dist="90000" dir="5400000" rotWithShape="0">
+              <a:srgbClr val="1A1A6E">
+                <a:alpha val="34000"/>
+              </a:srgbClr>
+            </a:outerShdw>
+          </a:effectLst>
+        </p:spPr>
+        <p:style>
+          <a:lnRef idx="1">
+            <a:schemeClr val="accent1"/>
+          </a:lnRef>
+          <a:fillRef idx="3">
+            <a:schemeClr val="accent1"/>
+          </a:fillRef>
+          <a:effectRef idx="2">
+            <a:schemeClr val="accent1"/>
+          </a:effectRef>
+          <a:fontRef idx="minor">
+            <a:schemeClr val="lt1"/>
+          </a:fontRef>
+        </p:style>
+        <p:txBody>
+          <a:bodyPr rtlCol="0" anchor="ctr"/>
+          <a:lstStyle/>
+          <a:p>
+            <a:pPr algn="ctr"/>
+          </a:p>
+        </p:txBody>
+      </p:sp>
+      <p:sp>
+        <p:nvSpPr>
+          <p:cNvPr id="6" name="TextBox 5"/>
+          <p:cNvSpPr txBox="1"/>
+          <p:nvPr/>
+        </p:nvSpPr>
+        <p:spPr>
+          <a:xfrm>
+            <a:off x="731520" y="3154680"/>
+            <a:ext cx="2606040" cy="1097280"/>
+          </a:xfrm>
+          <a:prstGeom prst="rect">
+            <a:avLst/>
+          </a:prstGeom>
+          <a:noFill/>
+        </p:spPr>
+        <p:txBody>
+          <a:bodyPr wrap="square" anchor="t" lIns="0" rIns="0" tIns="0" bIns="0">
+            <a:spAutoFit/>
+          </a:bodyPr>
+          <a:lstStyle/>
+          <a:p>
+            <a:pPr algn="ctr"/>
+            <a:r>
+              <a:rPr sz="5800" b="1" i="0">
+                <a:solidFill>
+                  <a:srgbClr val="7AA8FF"/>
+                </a:solidFill>
+                <a:latin typeface="Sora"/>
+              </a:rPr>
+              <a:t>Seconds</a:t>
+            </a:r>
+          </a:p>
+        </p:txBody>
+      </p:sp>
+      <p:sp>
+        <p:nvSpPr>
+          <p:cNvPr id="7" name="TextBox 6"/>
+          <p:cNvSpPr txBox="1"/>
+          <p:nvPr/>
+        </p:nvSpPr>
+        <p:spPr>
+          <a:xfrm>
+            <a:off x="960120" y="4343400"/>
+            <a:ext cx="2148840" cy="1005840"/>
+          </a:xfrm>
+          <a:prstGeom prst="rect">
+            <a:avLst/>
+          </a:prstGeom>
+          <a:noFill/>
+        </p:spPr>
+        <p:txBody>
+          <a:bodyPr wrap="square" anchor="t" lIns="0" rIns="0" tIns="0" bIns="0">
+            <a:spAutoFit/>
+          </a:bodyPr>
+          <a:lstStyle/>
+          <a:p>
+            <a:pPr algn="ctr">
+              <a:lnSpc>
+                <a:spcPct val="105000"/>
+              </a:lnSpc>
+              <a:spcAft>
+                <a:spcPts val="400"/>
+              </a:spcAft>
+            </a:pPr>
+            <a:r>
+              <a:rPr sz="1800" b="1" i="0">
+                <a:solidFill>
+                  <a:srgbClr val="FFFFFF"/>
+                </a:solidFill>
+                <a:latin typeface="Sora"/>
+              </a:rPr>
+              <a:t>Reply time</a:t>
+            </a:r>
+          </a:p>
+          <a:p>
+            <a:pPr algn="ctr">
+              <a:lnSpc>
+                <a:spcPct val="105000"/>
+              </a:lnSpc>
+              <a:spcAft>
+                <a:spcPts val="400"/>
+              </a:spcAft>
+            </a:pPr>
+            <a:r>
+              <a:rPr sz="1150" b="0" i="0">
+                <a:solidFill>
+                  <a:srgbClr val="B3C2E0"/>
+                </a:solidFill>
+                <a:latin typeface="Open Sans"/>
+              </a:rPr>
+              <a:t>Customers get an answer almost the moment they ask.</a:t>
+            </a:r>
+          </a:p>
+        </p:txBody>
+      </p:sp>
+      <p:sp>
+        <p:nvSpPr>
+          <p:cNvPr id="8" name="Rounded Rectangle 7"/>
+          <p:cNvSpPr/>
+          <p:nvPr/>
+        </p:nvSpPr>
+        <p:spPr>
+          <a:xfrm>
+            <a:off x="3611880" y="2743200"/>
+            <a:ext cx="2606040" cy="2743200"/>
+          </a:xfrm>
+          <a:prstGeom prst="roundRect">
+            <a:avLst>
+              <a:gd name="adj" fmla="val 8000"/>
+            </a:avLst>
+          </a:prstGeom>
+          <a:solidFill>
+            <a:srgbClr val="080330">
+              <a:alpha val="70000"/>
+            </a:srgbClr>
+          </a:solidFill>
+          <a:ln w="12700">
+            <a:solidFill>
+              <a:srgbClr val="4466FF">
+                <a:alpha val="55000"/>
+              </a:srgbClr>
+            </a:solidFill>
+          </a:ln>
+          <a:effectLst/>
+          <a:effectLst>
+            <a:outerShdw blurRad="180000" dist="90000" dir="5400000" rotWithShape="0">
+              <a:srgbClr val="1A1A6E">
+                <a:alpha val="34000"/>
+              </a:srgbClr>
+            </a:outerShdw>
+          </a:effectLst>
+        </p:spPr>
+        <p:style>
+          <a:lnRef idx="1">
+            <a:schemeClr val="accent1"/>
+          </a:lnRef>
+          <a:fillRef idx="3">
+            <a:schemeClr val="accent1"/>
+          </a:fillRef>
+          <a:effectRef idx="2">
+            <a:schemeClr val="accent1"/>
+          </a:effectRef>
+          <a:fontRef idx="minor">
+            <a:schemeClr val="lt1"/>
+          </a:fontRef>
+        </p:style>
+        <p:txBody>
+          <a:bodyPr rtlCol="0" anchor="ctr"/>
+          <a:lstStyle/>
+          <a:p>
+            <a:pPr algn="ctr"/>
+          </a:p>
+        </p:txBody>
+      </p:sp>
+      <p:sp>
+        <p:nvSpPr>
+          <p:cNvPr id="9" name="TextBox 8"/>
+          <p:cNvSpPr txBox="1"/>
+          <p:nvPr/>
+        </p:nvSpPr>
+        <p:spPr>
+          <a:xfrm>
+            <a:off x="3611880" y="3154680"/>
+            <a:ext cx="2606040" cy="1097280"/>
+          </a:xfrm>
+          <a:prstGeom prst="rect">
+            <a:avLst/>
+          </a:prstGeom>
+          <a:noFill/>
+        </p:spPr>
+        <p:txBody>
+          <a:bodyPr wrap="square" anchor="t" lIns="0" rIns="0" tIns="0" bIns="0">
+            <a:spAutoFit/>
+          </a:bodyPr>
+          <a:lstStyle/>
+          <a:p>
+            <a:pPr algn="ctr"/>
+            <a:r>
+              <a:rPr sz="5800" b="1" i="0">
+                <a:solidFill>
+                  <a:srgbClr val="7AA8FF"/>
+                </a:solidFill>
+                <a:latin typeface="Sora"/>
+              </a:rPr>
+              <a:t>3</a:t>
+            </a:r>
+          </a:p>
+        </p:txBody>
+      </p:sp>
+      <p:sp>
+        <p:nvSpPr>
+          <p:cNvPr id="10" name="TextBox 9"/>
+          <p:cNvSpPr txBox="1"/>
+          <p:nvPr/>
+        </p:nvSpPr>
+        <p:spPr>
+          <a:xfrm>
+            <a:off x="3840480" y="4343400"/>
+            <a:ext cx="2148840" cy="1005840"/>
+          </a:xfrm>
+          <a:prstGeom prst="rect">
+            <a:avLst/>
+          </a:prstGeom>
+          <a:noFill/>
+        </p:spPr>
+        <p:txBody>
+          <a:bodyPr wrap="square" anchor="t" lIns="0" rIns="0" tIns="0" bIns="0">
+            <a:spAutoFit/>
+          </a:bodyPr>
+          <a:lstStyle/>
+          <a:p>
+            <a:pPr algn="ctr">
+              <a:lnSpc>
+                <a:spcPct val="105000"/>
+              </a:lnSpc>
+              <a:spcAft>
+                <a:spcPts val="400"/>
+              </a:spcAft>
+            </a:pPr>
+            <a:r>
+              <a:rPr sz="1800" b="1" i="0">
+                <a:solidFill>
+                  <a:srgbClr val="FFFFFF"/>
+                </a:solidFill>
+                <a:latin typeface="Sora"/>
+              </a:rPr>
+              <a:t>Languages</a:t>
+            </a:r>
+          </a:p>
+          <a:p>
+            <a:pPr algn="ctr">
+              <a:lnSpc>
+                <a:spcPct val="105000"/>
+              </a:lnSpc>
+              <a:spcAft>
+                <a:spcPts val="400"/>
+              </a:spcAft>
+            </a:pPr>
+            <a:r>
+              <a:rPr sz="1150" b="0" i="0">
+                <a:solidFill>
+                  <a:srgbClr val="B3C2E0"/>
+                </a:solidFill>
+                <a:latin typeface="Open Sans"/>
+              </a:rPr>
+              <a:t>Arabic, English and Franco-Arabic, understood automatically.</a:t>
+            </a:r>
+          </a:p>
+        </p:txBody>
+      </p:sp>
+      <p:sp>
+        <p:nvSpPr>
+          <p:cNvPr id="11" name="Rounded Rectangle 10"/>
+          <p:cNvSpPr/>
+          <p:nvPr/>
+        </p:nvSpPr>
+        <p:spPr>
+          <a:xfrm>
+            <a:off x="6492240" y="2743200"/>
+            <a:ext cx="2606040" cy="2743200"/>
+          </a:xfrm>
+          <a:prstGeom prst="roundRect">
+            <a:avLst>
+              <a:gd name="adj" fmla="val 8000"/>
+            </a:avLst>
+          </a:prstGeom>
+          <a:solidFill>
+            <a:srgbClr val="080330">
+              <a:alpha val="70000"/>
+            </a:srgbClr>
+          </a:solidFill>
+          <a:ln w="12700">
+            <a:solidFill>
+              <a:srgbClr val="4466FF">
+                <a:alpha val="55000"/>
+              </a:srgbClr>
+            </a:solidFill>
+          </a:ln>
+          <a:effectLst/>
+          <a:effectLst>
+            <a:outerShdw blurRad="180000" dist="90000" dir="5400000" rotWithShape="0">
+              <a:srgbClr val="1A1A6E">
+                <a:alpha val="34000"/>
+              </a:srgbClr>
+            </a:outerShdw>
+          </a:effectLst>
+        </p:spPr>
+        <p:style>
+          <a:lnRef idx="1">
+            <a:schemeClr val="accent1"/>
+          </a:lnRef>
+          <a:fillRef idx="3">
+            <a:schemeClr val="accent1"/>
+          </a:fillRef>
+          <a:effectRef idx="2">
+            <a:schemeClr val="accent1"/>
+          </a:effectRef>
+          <a:fontRef idx="minor">
+            <a:schemeClr val="lt1"/>
+          </a:fontRef>
+        </p:style>
+        <p:txBody>
+          <a:bodyPr rtlCol="0" anchor="ctr"/>
+          <a:lstStyle/>
+          <a:p>
+            <a:pPr algn="ctr"/>
+          </a:p>
+        </p:txBody>
+      </p:sp>
+      <p:sp>
+        <p:nvSpPr>
+          <p:cNvPr id="12" name="TextBox 11"/>
+          <p:cNvSpPr txBox="1"/>
+          <p:nvPr/>
+        </p:nvSpPr>
+        <p:spPr>
+          <a:xfrm>
+            <a:off x="6492240" y="3154680"/>
+            <a:ext cx="2606040" cy="1097280"/>
+          </a:xfrm>
+          <a:prstGeom prst="rect">
+            <a:avLst/>
+          </a:prstGeom>
+          <a:noFill/>
+        </p:spPr>
+        <p:txBody>
+          <a:bodyPr wrap="square" anchor="t" lIns="0" rIns="0" tIns="0" bIns="0">
+            <a:spAutoFit/>
+          </a:bodyPr>
+          <a:lstStyle/>
+          <a:p>
+            <a:pPr algn="ctr"/>
+            <a:r>
+              <a:rPr sz="5800" b="1" i="0">
+                <a:solidFill>
+                  <a:srgbClr val="7AA8FF"/>
+                </a:solidFill>
+                <a:latin typeface="Sora"/>
+              </a:rPr>
+              <a:t>24/7</a:t>
+            </a:r>
+          </a:p>
+        </p:txBody>
+      </p:sp>
+      <p:sp>
+        <p:nvSpPr>
+          <p:cNvPr id="13" name="TextBox 12"/>
+          <p:cNvSpPr txBox="1"/>
+          <p:nvPr/>
+        </p:nvSpPr>
+        <p:spPr>
+          <a:xfrm>
+            <a:off x="6720840" y="4343400"/>
+            <a:ext cx="2148840" cy="1005840"/>
+          </a:xfrm>
+          <a:prstGeom prst="rect">
+            <a:avLst/>
+          </a:prstGeom>
+          <a:noFill/>
+        </p:spPr>
+        <p:txBody>
+          <a:bodyPr wrap="square" anchor="t" lIns="0" rIns="0" tIns="0" bIns="0">
+            <a:spAutoFit/>
+          </a:bodyPr>
+          <a:lstStyle/>
+          <a:p>
+            <a:pPr algn="ctr">
+              <a:lnSpc>
+                <a:spcPct val="105000"/>
+              </a:lnSpc>
+              <a:spcAft>
+                <a:spcPts val="400"/>
+              </a:spcAft>
+            </a:pPr>
+            <a:r>
+              <a:rPr sz="1800" b="1" i="0">
+                <a:solidFill>
+                  <a:srgbClr val="FFFFFF"/>
+                </a:solidFill>
+                <a:latin typeface="Sora"/>
+              </a:rPr>
+              <a:t>Always on</a:t>
+            </a:r>
+          </a:p>
+          <a:p>
+            <a:pPr algn="ctr">
+              <a:lnSpc>
+                <a:spcPct val="105000"/>
+              </a:lnSpc>
+              <a:spcAft>
+                <a:spcPts val="400"/>
+              </a:spcAft>
+            </a:pPr>
+            <a:r>
+              <a:rPr sz="1150" b="0" i="0">
+                <a:solidFill>
+                  <a:srgbClr val="B3C2E0"/>
+                </a:solidFill>
+                <a:latin typeface="Open Sans"/>
+              </a:rPr>
+              <a:t>Never sleeps — your customers always hear back.</a:t>
+            </a:r>
+          </a:p>
+        </p:txBody>
+      </p:sp>
+      <p:sp>
+        <p:nvSpPr>
+          <p:cNvPr id="14" name="Rounded Rectangle 13"/>
+          <p:cNvSpPr/>
+          <p:nvPr/>
+        </p:nvSpPr>
+        <p:spPr>
+          <a:xfrm>
+            <a:off x="9372600" y="2743200"/>
+            <a:ext cx="2606040" cy="2743200"/>
+          </a:xfrm>
+          <a:prstGeom prst="roundRect">
+            <a:avLst>
+              <a:gd name="adj" fmla="val 8000"/>
+            </a:avLst>
+          </a:prstGeom>
+          <a:solidFill>
+            <a:srgbClr val="080330">
+              <a:alpha val="70000"/>
+            </a:srgbClr>
+          </a:solidFill>
+          <a:ln w="12700">
+            <a:solidFill>
+              <a:srgbClr val="4466FF">
+                <a:alpha val="55000"/>
+              </a:srgbClr>
+            </a:solidFill>
+          </a:ln>
+          <a:effectLst/>
+          <a:effectLst>
+            <a:outerShdw blurRad="180000" dist="90000" dir="5400000" rotWithShape="0">
+              <a:srgbClr val="1A1A6E">
+                <a:alpha val="34000"/>
+              </a:srgbClr>
+            </a:outerShdw>
+          </a:effectLst>
+        </p:spPr>
+        <p:style>
+          <a:lnRef idx="1">
+            <a:schemeClr val="accent1"/>
+          </a:lnRef>
+          <a:fillRef idx="3">
+            <a:schemeClr val="accent1"/>
+          </a:fillRef>
+          <a:effectRef idx="2">
+            <a:schemeClr val="accent1"/>
+          </a:effectRef>
+          <a:fontRef idx="minor">
+            <a:schemeClr val="lt1"/>
+          </a:fontRef>
+        </p:style>
+        <p:txBody>
+          <a:bodyPr rtlCol="0" anchor="ctr"/>
+          <a:lstStyle/>
+          <a:p>
+            <a:pPr algn="ctr"/>
+          </a:p>
+        </p:txBody>
+      </p:sp>
+      <p:sp>
+        <p:nvSpPr>
+          <p:cNvPr id="15" name="TextBox 14"/>
+          <p:cNvSpPr txBox="1"/>
+          <p:nvPr/>
+        </p:nvSpPr>
+        <p:spPr>
+          <a:xfrm>
+            <a:off x="9372600" y="3154680"/>
+            <a:ext cx="2606040" cy="1097280"/>
+          </a:xfrm>
+          <a:prstGeom prst="rect">
+            <a:avLst/>
+          </a:prstGeom>
+          <a:noFill/>
+        </p:spPr>
+        <p:txBody>
+          <a:bodyPr wrap="square" anchor="t" lIns="0" rIns="0" tIns="0" bIns="0">
+            <a:spAutoFit/>
+          </a:bodyPr>
+          <a:lstStyle/>
+          <a:p>
+            <a:pPr algn="ctr"/>
+            <a:r>
+              <a:rPr sz="5800" b="1" i="0">
+                <a:solidFill>
+                  <a:srgbClr val="7AA8FF"/>
+                </a:solidFill>
+                <a:latin typeface="Sora"/>
+              </a:rPr>
+              <a:t>3</a:t>
+            </a:r>
+          </a:p>
+        </p:txBody>
+      </p:sp>
+      <p:sp>
+        <p:nvSpPr>
+          <p:cNvPr id="16" name="TextBox 15"/>
+          <p:cNvSpPr txBox="1"/>
+          <p:nvPr/>
+        </p:nvSpPr>
+        <p:spPr>
+          <a:xfrm>
+            <a:off x="9601200" y="4343400"/>
+            <a:ext cx="2148840" cy="1005840"/>
+          </a:xfrm>
+          <a:prstGeom prst="rect">
+            <a:avLst/>
+          </a:prstGeom>
+          <a:noFill/>
+        </p:spPr>
+        <p:txBody>
+          <a:bodyPr wrap="square" anchor="t" lIns="0" rIns="0" tIns="0" bIns="0">
+            <a:spAutoFit/>
+          </a:bodyPr>
+          <a:lstStyle/>
+          <a:p>
+            <a:pPr algn="ctr">
+              <a:lnSpc>
+                <a:spcPct val="105000"/>
+              </a:lnSpc>
+              <a:spcAft>
+                <a:spcPts val="400"/>
+              </a:spcAft>
+            </a:pPr>
+            <a:r>
+              <a:rPr sz="1800" b="1" i="0">
+                <a:solidFill>
+                  <a:srgbClr val="FFFFFF"/>
+                </a:solidFill>
+                <a:latin typeface="Sora"/>
+              </a:rPr>
+              <a:t>Channels</a:t>
+            </a:r>
+          </a:p>
+          <a:p>
+            <a:pPr algn="ctr">
+              <a:lnSpc>
+                <a:spcPct val="105000"/>
+              </a:lnSpc>
+              <a:spcAft>
+                <a:spcPts val="400"/>
+              </a:spcAft>
+            </a:pPr>
+            <a:r>
+              <a:rPr sz="1150" b="0" i="0">
+                <a:solidFill>
+                  <a:srgbClr val="B3C2E0"/>
+                </a:solidFill>
+                <a:latin typeface="Open Sans"/>
+              </a:rPr>
+              <a:t>Instagram and website chat today, WhatsApp soon.</a:t>
+            </a:r>
+          </a:p>
+        </p:txBody>
+      </p:sp>
+      <p:sp>
+        <p:nvSpPr>
+          <p:cNvPr id="17" name="Rounded Rectangle 16">
+            <a:hlinkClick r:id="rId3" action="ppaction://hlinksldjump"/>
+          </p:cNvPr>
+          <p:cNvSpPr/>
+          <p:nvPr/>
+        </p:nvSpPr>
+        <p:spPr>
+          <a:xfrm>
+            <a:off x="411480" y="6327648"/>
+            <a:ext cx="1051560" cy="384048"/>
+          </a:xfrm>
+          <a:prstGeom prst="roundRect">
+            <a:avLst>
+              <a:gd name="adj" fmla="val 50000"/>
+            </a:avLst>
+          </a:prstGeom>
+          <a:noFill/>
+          <a:ln w="12700">
+            <a:solidFill>
+              <a:srgbClr val="7AA8FF">
+                <a:alpha val="70000"/>
+              </a:srgbClr>
+            </a:solidFill>
+          </a:ln>
+          <a:effectLst/>
+        </p:spPr>
+        <p:style>
+          <a:lnRef idx="1">
+            <a:schemeClr val="accent1"/>
+          </a:lnRef>
+          <a:fillRef idx="3">
+            <a:schemeClr val="accent1"/>
+          </a:fillRef>
+          <a:effectRef idx="2">
+            <a:schemeClr val="accent1"/>
+          </a:effectRef>
+          <a:fontRef idx="minor">
+            <a:schemeClr val="lt1"/>
+          </a:fontRef>
+        </p:style>
+        <p:txBody>
+          <a:bodyPr rtlCol="0" anchor="ctr" wrap="square" lIns="164592" rIns="164592" tIns="73152" bIns="73152"/>
+          <a:lstStyle/>
+          <a:p>
+            <a:pPr algn="ctr"/>
+            <a:r>
+              <a:rPr sz="1050" b="1" i="0">
+                <a:solidFill>
+                  <a:srgbClr val="7AA8FF"/>
+                </a:solidFill>
+                <a:latin typeface="JetBrains Mono"/>
+              </a:rPr>
+              <a:t>‹  Menu</a:t>
+            </a:r>
+          </a:p>
+        </p:txBody>
+      </p:sp>
+      <p:sp>
+        <p:nvSpPr>
+          <p:cNvPr id="18" name="TextBox 17"/>
+          <p:cNvSpPr txBox="1"/>
+          <p:nvPr/>
+        </p:nvSpPr>
+        <p:spPr>
+          <a:xfrm>
+            <a:off x="10881360" y="6355080"/>
+            <a:ext cx="914400" cy="365760"/>
+          </a:xfrm>
+          <a:prstGeom prst="rect">
+            <a:avLst/>
+          </a:prstGeom>
+          <a:noFill/>
+        </p:spPr>
+        <p:txBody>
+          <a:bodyPr wrap="square" anchor="t" lIns="0" rIns="0" tIns="0" bIns="0">
+            <a:spAutoFit/>
+          </a:bodyPr>
+          <a:lstStyle/>
+          <a:p>
+            <a:pPr algn="r"/>
+            <a:r>
+              <a:rPr sz="1000" b="0" i="0">
+                <a:solidFill>
+                  <a:srgbClr val="B3C2E0"/>
+                </a:solidFill>
+                <a:latin typeface="JetBrains Mono"/>
+              </a:rPr>
+              <a:t>11 / 14</a:t>
+            </a:r>
+          </a:p>
+        </p:txBody>
+      </p:sp>
+    </p:spTree>
+  </p:cSld>
+  <p:clrMapOvr>
+    <a:masterClrMapping/>
+  </p:clrMapOvr>
+  <p:transition spd="med">
+    <p:cover dir="u"/>
+  </p:transition>
+</p:sld>
+</file>
+
+<file path=ppt/slides/slide12.xml><?xml version="1.0" encoding="utf-8"?>
+<p:sld xmlns:a="http://schemas.openxmlformats.org/drawingml/2006/main" xmlns:p="http://schemas.openxmlformats.org/presentationml/2006/main" xmlns:r="http://schemas.openxmlformats.org/officeDocument/2006/relationships">
+  <p:cSld>
+    <p:spTree>
+      <p:nvGrpSpPr>
+        <p:cNvPr id="1" name=""/>
+        <p:cNvGrpSpPr/>
+        <p:nvPr/>
+      </p:nvGrpSpPr>
+      <p:grpSpPr/>
+      <p:pic>
+        <p:nvPicPr>
+          <p:cNvPr id="2" name="Picture 1" descr="bg_light.png"/>
+          <p:cNvPicPr>
+            <a:picLocks noChangeAspect="1"/>
+          </p:cNvPicPr>
+          <p:nvPr/>
+        </p:nvPicPr>
+        <p:blipFill>
+          <a:blip r:embed="rId2"/>
+          <a:stretch>
+            <a:fillRect/>
+          </a:stretch>
+        </p:blipFill>
+        <p:spPr>
+          <a:xfrm>
+            <a:off x="0" y="0"/>
+            <a:ext cx="12191695" cy="6858000"/>
+          </a:xfrm>
+          <a:prstGeom prst="rect">
+            <a:avLst/>
+          </a:prstGeom>
+        </p:spPr>
+      </p:pic>
+      <p:sp>
+        <p:nvSpPr>
+          <p:cNvPr id="3" name="TextBox 2"/>
+          <p:cNvSpPr txBox="1"/>
+          <p:nvPr/>
+        </p:nvSpPr>
+        <p:spPr>
+          <a:xfrm>
+            <a:off x="777240" y="640080"/>
+            <a:ext cx="7315200" cy="365760"/>
+          </a:xfrm>
+          <a:prstGeom prst="rect">
+            <a:avLst/>
+          </a:prstGeom>
+          <a:noFill/>
+        </p:spPr>
+        <p:txBody>
+          <a:bodyPr wrap="square" anchor="t" lIns="0" rIns="0" tIns="0" bIns="0">
+            <a:spAutoFit/>
+          </a:bodyPr>
+          <a:lstStyle/>
+          <a:p>
+            <a:pPr algn="l"/>
+            <a:r>
+              <a:rPr sz="1250" b="1" i="0" spc="260">
+                <a:solidFill>
                   <a:srgbClr val="4466FF"/>
                 </a:solidFill>
                 <a:latin typeface="JetBrains Mono"/>
               </a:rPr>
-              <a:t>08 · PRICING</a:t>
+              <a:t>09 · PRICING</a:t>
             </a:r>
           </a:p>
         </p:txBody>
@@ -5117,7 +7020,7 @@
                 </a:solidFill>
                 <a:latin typeface="JetBrains Mono"/>
               </a:rPr>
-              <a:t>10 / 13</a:t>
+              <a:t>12 / 14</a:t>
             </a:r>
           </a:p>
         </p:txBody>
@@ -5133,7 +7036,7 @@
 </p:sld>
 </file>
 
-<file path=ppt/slides/slide11.xml><?xml version="1.0" encoding="utf-8"?>
+<file path=ppt/slides/slide13.xml><?xml version="1.0" encoding="utf-8"?>
 <p:sld xmlns:a="http://schemas.openxmlformats.org/drawingml/2006/main" xmlns:p="http://schemas.openxmlformats.org/presentationml/2006/main" xmlns:r="http://schemas.openxmlformats.org/officeDocument/2006/relationships">
   <p:cSld>
     <p:spTree>
@@ -5197,7 +7100,7 @@
                 </a:solidFill>
                 <a:latin typeface="JetBrains Mono"/>
               </a:rPr>
-              <a:t>09 · SECURITY &amp; TRUST</a:t>
+              <a:t>10 · SECURITY &amp; TRUST</a:t>
             </a:r>
           </a:p>
         </p:txBody>
@@ -5963,7 +7866,7 @@
                 </a:solidFill>
                 <a:latin typeface="JetBrains Mono"/>
               </a:rPr>
-              <a:t>11 / 13</a:t>
+              <a:t>13 / 14</a:t>
             </a:r>
           </a:p>
         </p:txBody>
@@ -5979,7 +7882,7 @@
 </p:sld>
 </file>
 
-<file path=ppt/slides/slide12.xml><?xml version="1.0" encoding="utf-8"?>
+<file path=ppt/slides/slide14.xml><?xml version="1.0" encoding="utf-8"?>
 <p:sld xmlns:a="http://schemas.openxmlformats.org/drawingml/2006/main" xmlns:p="http://schemas.openxmlformats.org/presentationml/2006/main" xmlns:r="http://schemas.openxmlformats.org/officeDocument/2006/relationships">
   <p:cSld>
     <p:spTree>
@@ -6515,8 +8418,8 @@
         </p:nvSpPr>
         <p:spPr>
           <a:xfrm>
-            <a:off x="731520" y="2331720"/>
-            <a:ext cx="5074920" cy="676656"/>
+            <a:off x="731520" y="2212848"/>
+            <a:ext cx="5074920" cy="603504"/>
           </a:xfrm>
           <a:prstGeom prst="roundRect">
             <a:avLst>
@@ -6567,7 +8470,7 @@
         </p:nvSpPr>
         <p:spPr>
           <a:xfrm>
-            <a:off x="932688" y="2441448"/>
+            <a:off x="932688" y="2322576"/>
             <a:ext cx="822960" cy="457200"/>
           </a:xfrm>
           <a:prstGeom prst="rect">
@@ -6602,7 +8505,7 @@
         </p:nvSpPr>
         <p:spPr>
           <a:xfrm>
-            <a:off x="1783080" y="2414016"/>
+            <a:off x="1783080" y="2295144"/>
             <a:ext cx="3840480" cy="548640"/>
           </a:xfrm>
           <a:prstGeom prst="rect">
@@ -6659,8 +8562,8 @@
         </p:nvSpPr>
         <p:spPr>
           <a:xfrm>
-            <a:off x="731520" y="3118104"/>
-            <a:ext cx="5074920" cy="676656"/>
+            <a:off x="731520" y="2926080"/>
+            <a:ext cx="5074920" cy="603504"/>
           </a:xfrm>
           <a:prstGeom prst="roundRect">
             <a:avLst>
@@ -6711,7 +8614,7 @@
         </p:nvSpPr>
         <p:spPr>
           <a:xfrm>
-            <a:off x="932688" y="3227832"/>
+            <a:off x="932688" y="3035808"/>
             <a:ext cx="822960" cy="457200"/>
           </a:xfrm>
           <a:prstGeom prst="rect">
@@ -6746,7 +8649,7 @@
         </p:nvSpPr>
         <p:spPr>
           <a:xfrm>
-            <a:off x="1783080" y="3200400"/>
+            <a:off x="1783080" y="3008376"/>
             <a:ext cx="3840480" cy="548640"/>
           </a:xfrm>
           <a:prstGeom prst="rect">
@@ -6803,8 +8706,8 @@
         </p:nvSpPr>
         <p:spPr>
           <a:xfrm>
-            <a:off x="731520" y="3904488"/>
-            <a:ext cx="5074920" cy="676656"/>
+            <a:off x="731520" y="3639312"/>
+            <a:ext cx="5074920" cy="603504"/>
           </a:xfrm>
           <a:prstGeom prst="roundRect">
             <a:avLst>
@@ -6855,7 +8758,7 @@
         </p:nvSpPr>
         <p:spPr>
           <a:xfrm>
-            <a:off x="932688" y="4014216"/>
+            <a:off x="932688" y="3749040"/>
             <a:ext cx="822960" cy="457200"/>
           </a:xfrm>
           <a:prstGeom prst="rect">
@@ -6890,7 +8793,7 @@
         </p:nvSpPr>
         <p:spPr>
           <a:xfrm>
-            <a:off x="1783080" y="3986784"/>
+            <a:off x="1783080" y="3721608"/>
             <a:ext cx="3840480" cy="548640"/>
           </a:xfrm>
           <a:prstGeom prst="rect">
@@ -6947,8 +8850,8 @@
         </p:nvSpPr>
         <p:spPr>
           <a:xfrm>
-            <a:off x="731520" y="4690872"/>
-            <a:ext cx="5074920" cy="676656"/>
+            <a:off x="731520" y="4352544"/>
+            <a:ext cx="5074920" cy="603504"/>
           </a:xfrm>
           <a:prstGeom prst="roundRect">
             <a:avLst>
@@ -6999,7 +8902,7 @@
         </p:nvSpPr>
         <p:spPr>
           <a:xfrm>
-            <a:off x="932688" y="4800600"/>
+            <a:off x="932688" y="4462272"/>
             <a:ext cx="822960" cy="457200"/>
           </a:xfrm>
           <a:prstGeom prst="rect">
@@ -7034,7 +8937,7 @@
         </p:nvSpPr>
         <p:spPr>
           <a:xfrm>
-            <a:off x="1783080" y="4773168"/>
+            <a:off x="1783080" y="4434840"/>
             <a:ext cx="3840480" cy="548640"/>
           </a:xfrm>
           <a:prstGeom prst="rect">
@@ -7091,8 +8994,8 @@
         </p:nvSpPr>
         <p:spPr>
           <a:xfrm>
-            <a:off x="731520" y="5477256"/>
-            <a:ext cx="5074920" cy="676656"/>
+            <a:off x="731520" y="5065776"/>
+            <a:ext cx="5074920" cy="603504"/>
           </a:xfrm>
           <a:prstGeom prst="roundRect">
             <a:avLst>
@@ -7143,7 +9046,7 @@
         </p:nvSpPr>
         <p:spPr>
           <a:xfrm>
-            <a:off x="932688" y="5586984"/>
+            <a:off x="932688" y="5175504"/>
             <a:ext cx="822960" cy="457200"/>
           </a:xfrm>
           <a:prstGeom prst="rect">
@@ -7178,7 +9081,7 @@
         </p:nvSpPr>
         <p:spPr>
           <a:xfrm>
-            <a:off x="1783080" y="5559552"/>
+            <a:off x="1783080" y="5148072"/>
             <a:ext cx="3840480" cy="548640"/>
           </a:xfrm>
           <a:prstGeom prst="rect">
@@ -7235,8 +9138,8 @@
         </p:nvSpPr>
         <p:spPr>
           <a:xfrm>
-            <a:off x="6355080" y="2331720"/>
-            <a:ext cx="5074920" cy="676656"/>
+            <a:off x="731520" y="5779008"/>
+            <a:ext cx="5074920" cy="603504"/>
           </a:xfrm>
           <a:prstGeom prst="roundRect">
             <a:avLst>
@@ -7287,7 +9190,7 @@
         </p:nvSpPr>
         <p:spPr>
           <a:xfrm>
-            <a:off x="6556248" y="2441448"/>
+            <a:off x="932688" y="5888736"/>
             <a:ext cx="822960" cy="457200"/>
           </a:xfrm>
           <a:prstGeom prst="rect">
@@ -7322,7 +9225,7 @@
         </p:nvSpPr>
         <p:spPr>
           <a:xfrm>
-            <a:off x="7406640" y="2414016"/>
+            <a:off x="1783080" y="5861304"/>
             <a:ext cx="3840480" cy="548640"/>
           </a:xfrm>
           <a:prstGeom prst="rect">
@@ -7348,7 +9251,7 @@
                 </a:solidFill>
                 <a:latin typeface="Sora"/>
               </a:rPr>
-              <a:t>Why LUMA</a:t>
+              <a:t>Insights &amp; analytics</a:t>
             </a:r>
           </a:p>
           <a:p>
@@ -7364,7 +9267,7 @@
                 </a:solidFill>
                 <a:latin typeface="Open Sans"/>
               </a:rPr>
-              <a:t>Built for merchants, not generic bots</a:t>
+              <a:t>Know your customers at a glance</a:t>
             </a:r>
           </a:p>
         </p:txBody>
@@ -7379,8 +9282,8 @@
         </p:nvSpPr>
         <p:spPr>
           <a:xfrm>
-            <a:off x="6355080" y="3118104"/>
-            <a:ext cx="5074920" cy="676656"/>
+            <a:off x="6355080" y="2212848"/>
+            <a:ext cx="5074920" cy="603504"/>
           </a:xfrm>
           <a:prstGeom prst="roundRect">
             <a:avLst>
@@ -7431,7 +9334,7 @@
         </p:nvSpPr>
         <p:spPr>
           <a:xfrm>
-            <a:off x="6556248" y="3227832"/>
+            <a:off x="6556248" y="2322576"/>
             <a:ext cx="822960" cy="457200"/>
           </a:xfrm>
           <a:prstGeom prst="rect">
@@ -7466,7 +9369,7 @@
         </p:nvSpPr>
         <p:spPr>
           <a:xfrm>
-            <a:off x="7406640" y="3200400"/>
+            <a:off x="7406640" y="2295144"/>
             <a:ext cx="3840480" cy="548640"/>
           </a:xfrm>
           <a:prstGeom prst="rect">
@@ -7492,7 +9395,7 @@
                 </a:solidFill>
                 <a:latin typeface="Sora"/>
               </a:rPr>
-              <a:t>Proven performance</a:t>
+              <a:t>Why LUMA</a:t>
             </a:r>
           </a:p>
           <a:p>
@@ -7508,7 +9411,7 @@
                 </a:solidFill>
                 <a:latin typeface="Open Sans"/>
               </a:rPr>
-              <a:t>Speed, languages, uptime</a:t>
+              <a:t>Built for merchants, not generic bots</a:t>
             </a:r>
           </a:p>
         </p:txBody>
@@ -7523,8 +9426,8 @@
         </p:nvSpPr>
         <p:spPr>
           <a:xfrm>
-            <a:off x="6355080" y="3904488"/>
-            <a:ext cx="5074920" cy="676656"/>
+            <a:off x="6355080" y="2926080"/>
+            <a:ext cx="5074920" cy="603504"/>
           </a:xfrm>
           <a:prstGeom prst="roundRect">
             <a:avLst>
@@ -7575,7 +9478,7 @@
         </p:nvSpPr>
         <p:spPr>
           <a:xfrm>
-            <a:off x="6556248" y="4014216"/>
+            <a:off x="6556248" y="3035808"/>
             <a:ext cx="822960" cy="457200"/>
           </a:xfrm>
           <a:prstGeom prst="rect">
@@ -7610,7 +9513,7 @@
         </p:nvSpPr>
         <p:spPr>
           <a:xfrm>
-            <a:off x="7406640" y="3986784"/>
+            <a:off x="7406640" y="3008376"/>
             <a:ext cx="3840480" cy="548640"/>
           </a:xfrm>
           <a:prstGeom prst="rect">
@@ -7636,7 +9539,7 @@
                 </a:solidFill>
                 <a:latin typeface="Sora"/>
               </a:rPr>
-              <a:t>Pricing</a:t>
+              <a:t>Proven performance</a:t>
             </a:r>
           </a:p>
           <a:p>
@@ -7652,7 +9555,7 @@
                 </a:solidFill>
                 <a:latin typeface="Open Sans"/>
               </a:rPr>
-              <a:t>Plans that scale with you</a:t>
+              <a:t>Speed, languages, uptime</a:t>
             </a:r>
           </a:p>
         </p:txBody>
@@ -7667,8 +9570,8 @@
         </p:nvSpPr>
         <p:spPr>
           <a:xfrm>
-            <a:off x="6355080" y="4690872"/>
-            <a:ext cx="5074920" cy="676656"/>
+            <a:off x="6355080" y="3639312"/>
+            <a:ext cx="5074920" cy="603504"/>
           </a:xfrm>
           <a:prstGeom prst="roundRect">
             <a:avLst>
@@ -7719,7 +9622,7 @@
         </p:nvSpPr>
         <p:spPr>
           <a:xfrm>
-            <a:off x="6556248" y="4800600"/>
+            <a:off x="6556248" y="3749040"/>
             <a:ext cx="822960" cy="457200"/>
           </a:xfrm>
           <a:prstGeom prst="rect">
@@ -7754,7 +9657,7 @@
         </p:nvSpPr>
         <p:spPr>
           <a:xfrm>
-            <a:off x="7406640" y="4773168"/>
+            <a:off x="7406640" y="3721608"/>
             <a:ext cx="3840480" cy="548640"/>
           </a:xfrm>
           <a:prstGeom prst="rect">
@@ -7780,7 +9683,7 @@
                 </a:solidFill>
                 <a:latin typeface="Sora"/>
               </a:rPr>
-              <a:t>Security &amp; trust</a:t>
+              <a:t>Pricing</a:t>
             </a:r>
           </a:p>
           <a:p>
@@ -7796,7 +9699,7 @@
                 </a:solidFill>
                 <a:latin typeface="Open Sans"/>
               </a:rPr>
-              <a:t>Your data, protected</a:t>
+              <a:t>Plans that scale with you</a:t>
             </a:r>
           </a:p>
         </p:txBody>
@@ -7811,8 +9714,8 @@
         </p:nvSpPr>
         <p:spPr>
           <a:xfrm>
-            <a:off x="6355080" y="5477256"/>
-            <a:ext cx="5074920" cy="676656"/>
+            <a:off x="6355080" y="4352544"/>
+            <a:ext cx="5074920" cy="603504"/>
           </a:xfrm>
           <a:prstGeom prst="roundRect">
             <a:avLst>
@@ -7863,7 +9766,7 @@
         </p:nvSpPr>
         <p:spPr>
           <a:xfrm>
-            <a:off x="6556248" y="5586984"/>
+            <a:off x="6556248" y="4462272"/>
             <a:ext cx="822960" cy="457200"/>
           </a:xfrm>
           <a:prstGeom prst="rect">
@@ -7898,7 +9801,7 @@
         </p:nvSpPr>
         <p:spPr>
           <a:xfrm>
-            <a:off x="7406640" y="5559552"/>
+            <a:off x="7406640" y="4434840"/>
             <a:ext cx="3840480" cy="548640"/>
           </a:xfrm>
           <a:prstGeom prst="rect">
@@ -7924,7 +9827,7 @@
                 </a:solidFill>
                 <a:latin typeface="Sora"/>
               </a:rPr>
-              <a:t>Next steps</a:t>
+              <a:t>Security &amp; trust</a:t>
             </a:r>
           </a:p>
           <a:p>
@@ -7940,21 +9843,75 @@
                 </a:solidFill>
                 <a:latin typeface="Open Sans"/>
               </a:rPr>
-              <a:t>Start your free trial</a:t>
-            </a:r>
-          </a:p>
-        </p:txBody>
-      </p:sp>
-      <p:sp>
-        <p:nvSpPr>
-          <p:cNvPr id="36" name="TextBox 35"/>
+              <a:t>Your data, protected</a:t>
+            </a:r>
+          </a:p>
+        </p:txBody>
+      </p:sp>
+      <p:sp>
+        <p:nvSpPr>
+          <p:cNvPr id="36" name="Rounded Rectangle 35">
+            <a:hlinkClick r:id="rId14" action="ppaction://hlinksldjump"/>
+          </p:cNvPr>
+          <p:cNvSpPr/>
+          <p:nvPr/>
+        </p:nvSpPr>
+        <p:spPr>
+          <a:xfrm>
+            <a:off x="6355080" y="5065776"/>
+            <a:ext cx="5074920" cy="603504"/>
+          </a:xfrm>
+          <a:prstGeom prst="roundRect">
+            <a:avLst>
+              <a:gd name="adj" fmla="val 18000"/>
+            </a:avLst>
+          </a:prstGeom>
+          <a:solidFill>
+            <a:srgbClr val="080330">
+              <a:alpha val="45000"/>
+            </a:srgbClr>
+          </a:solidFill>
+          <a:ln w="9525">
+            <a:solidFill>
+              <a:srgbClr val="4466FF">
+                <a:alpha val="45000"/>
+              </a:srgbClr>
+            </a:solidFill>
+          </a:ln>
+          <a:effectLst/>
+        </p:spPr>
+        <p:style>
+          <a:lnRef idx="1">
+            <a:schemeClr val="accent1"/>
+          </a:lnRef>
+          <a:fillRef idx="3">
+            <a:schemeClr val="accent1"/>
+          </a:fillRef>
+          <a:effectRef idx="2">
+            <a:schemeClr val="accent1"/>
+          </a:effectRef>
+          <a:fontRef idx="minor">
+            <a:schemeClr val="lt1"/>
+          </a:fontRef>
+        </p:style>
+        <p:txBody>
+          <a:bodyPr rtlCol="0" anchor="ctr"/>
+          <a:lstStyle/>
+          <a:p>
+            <a:pPr algn="ctr"/>
+          </a:p>
+        </p:txBody>
+      </p:sp>
+      <p:sp>
+        <p:nvSpPr>
+          <p:cNvPr id="37" name="TextBox 36"/>
           <p:cNvSpPr txBox="1"/>
           <p:nvPr/>
         </p:nvSpPr>
         <p:spPr>
           <a:xfrm>
-            <a:off x="731520" y="6400800"/>
-            <a:ext cx="7315200" cy="365760"/>
+            <a:off x="6556248" y="5175504"/>
+            <a:ext cx="822960" cy="457200"/>
           </a:xfrm>
           <a:prstGeom prst="rect">
             <a:avLst/>
@@ -7969,27 +9926,27 @@
           <a:p>
             <a:pPr algn="l"/>
             <a:r>
-              <a:rPr sz="1050" b="0" i="0">
+              <a:rPr sz="2200" b="1" i="0">
                 <a:solidFill>
                   <a:srgbClr val="7AA8FF"/>
                 </a:solidFill>
                 <a:latin typeface="JetBrains Mono"/>
               </a:rPr>
-              <a:t>Tip: every card and button in this deck is clickable.</a:t>
-            </a:r>
-          </a:p>
-        </p:txBody>
-      </p:sp>
-      <p:sp>
-        <p:nvSpPr>
-          <p:cNvPr id="37" name="TextBox 36"/>
+              <a:t>11</a:t>
+            </a:r>
+          </a:p>
+        </p:txBody>
+      </p:sp>
+      <p:sp>
+        <p:nvSpPr>
+          <p:cNvPr id="38" name="TextBox 37"/>
           <p:cNvSpPr txBox="1"/>
           <p:nvPr/>
         </p:nvSpPr>
         <p:spPr>
           <a:xfrm>
-            <a:off x="10881360" y="6355080"/>
-            <a:ext cx="914400" cy="365760"/>
+            <a:off x="7406640" y="5148072"/>
+            <a:ext cx="3840480" cy="548640"/>
           </a:xfrm>
           <a:prstGeom prst="rect">
             <a:avLst/>
@@ -8002,6 +9959,96 @@
           </a:bodyPr>
           <a:lstStyle/>
           <a:p>
+            <a:pPr algn="l">
+              <a:spcAft>
+                <a:spcPts val="100"/>
+              </a:spcAft>
+            </a:pPr>
+            <a:r>
+              <a:rPr sz="1550" b="1" i="0">
+                <a:solidFill>
+                  <a:srgbClr val="FFFFFF"/>
+                </a:solidFill>
+                <a:latin typeface="Sora"/>
+              </a:rPr>
+              <a:t>Next steps</a:t>
+            </a:r>
+          </a:p>
+          <a:p>
+            <a:pPr algn="l">
+              <a:spcAft>
+                <a:spcPts val="100"/>
+              </a:spcAft>
+            </a:pPr>
+            <a:r>
+              <a:rPr sz="1050" b="0" i="0">
+                <a:solidFill>
+                  <a:srgbClr val="B3C2E0"/>
+                </a:solidFill>
+                <a:latin typeface="Open Sans"/>
+              </a:rPr>
+              <a:t>Start your free trial</a:t>
+            </a:r>
+          </a:p>
+        </p:txBody>
+      </p:sp>
+      <p:sp>
+        <p:nvSpPr>
+          <p:cNvPr id="39" name="TextBox 38"/>
+          <p:cNvSpPr txBox="1"/>
+          <p:nvPr/>
+        </p:nvSpPr>
+        <p:spPr>
+          <a:xfrm>
+            <a:off x="731520" y="6400800"/>
+            <a:ext cx="7315200" cy="365760"/>
+          </a:xfrm>
+          <a:prstGeom prst="rect">
+            <a:avLst/>
+          </a:prstGeom>
+          <a:noFill/>
+        </p:spPr>
+        <p:txBody>
+          <a:bodyPr wrap="square" anchor="t" lIns="0" rIns="0" tIns="0" bIns="0">
+            <a:spAutoFit/>
+          </a:bodyPr>
+          <a:lstStyle/>
+          <a:p>
+            <a:pPr algn="l"/>
+            <a:r>
+              <a:rPr sz="1050" b="0" i="0">
+                <a:solidFill>
+                  <a:srgbClr val="7AA8FF"/>
+                </a:solidFill>
+                <a:latin typeface="JetBrains Mono"/>
+              </a:rPr>
+              <a:t>Tip: every card and button in this deck is clickable.</a:t>
+            </a:r>
+          </a:p>
+        </p:txBody>
+      </p:sp>
+      <p:sp>
+        <p:nvSpPr>
+          <p:cNvPr id="40" name="TextBox 39"/>
+          <p:cNvSpPr txBox="1"/>
+          <p:nvPr/>
+        </p:nvSpPr>
+        <p:spPr>
+          <a:xfrm>
+            <a:off x="10881360" y="6355080"/>
+            <a:ext cx="914400" cy="365760"/>
+          </a:xfrm>
+          <a:prstGeom prst="rect">
+            <a:avLst/>
+          </a:prstGeom>
+          <a:noFill/>
+        </p:spPr>
+        <p:txBody>
+          <a:bodyPr wrap="square" anchor="t" lIns="0" rIns="0" tIns="0" bIns="0">
+            <a:spAutoFit/>
+          </a:bodyPr>
+          <a:lstStyle/>
+          <a:p>
             <a:pPr algn="r"/>
             <a:r>
               <a:rPr sz="1000" b="0" i="0">
@@ -8010,7 +10057,7 @@
                 </a:solidFill>
                 <a:latin typeface="JetBrains Mono"/>
               </a:rPr>
-              <a:t>02 / 13</a:t>
+              <a:t>02 / 14</a:t>
             </a:r>
           </a:p>
         </p:txBody>
@@ -8833,7 +10880,7 @@
                 </a:solidFill>
                 <a:latin typeface="JetBrains Mono"/>
               </a:rPr>
-              <a:t>03 / 13</a:t>
+              <a:t>03 / 14</a:t>
             </a:r>
           </a:p>
         </p:txBody>
@@ -9881,7 +11928,7 @@
                 </a:solidFill>
                 <a:latin typeface="JetBrains Mono"/>
               </a:rPr>
-              <a:t>04 / 13</a:t>
+              <a:t>04 / 14</a:t>
             </a:r>
           </a:p>
         </p:txBody>
@@ -11193,7 +13240,7 @@
                 </a:solidFill>
                 <a:latin typeface="JetBrains Mono"/>
               </a:rPr>
-              <a:t>05 / 13</a:t>
+              <a:t>05 / 14</a:t>
             </a:r>
           </a:p>
         </p:txBody>
@@ -12015,7 +14062,7 @@
                 </a:solidFill>
                 <a:latin typeface="JetBrains Mono"/>
               </a:rPr>
-              <a:t>06 / 13</a:t>
+              <a:t>06 / 14</a:t>
             </a:r>
           </a:p>
         </p:txBody>
@@ -13637,7 +15684,7 @@
                 </a:solidFill>
                 <a:latin typeface="JetBrains Mono"/>
               </a:rPr>
-              <a:t>07 / 13</a:t>
+              <a:t>07 / 14</a:t>
             </a:r>
           </a:p>
         </p:txBody>
@@ -13695,7 +15742,7 @@
         </p:nvSpPr>
         <p:spPr>
           <a:xfrm>
-            <a:off x="777240" y="777240"/>
+            <a:off x="777240" y="548640"/>
             <a:ext cx="7315200" cy="365760"/>
           </a:xfrm>
           <a:prstGeom prst="rect">
@@ -13717,7 +15764,7 @@
                 </a:solidFill>
                 <a:latin typeface="JetBrains Mono"/>
               </a:rPr>
-              <a:t>06 · WHY LUMA</a:t>
+              <a:t>06 · INSIGHTS</a:t>
             </a:r>
           </a:p>
         </p:txBody>
@@ -13730,8 +15777,8 @@
         </p:nvSpPr>
         <p:spPr>
           <a:xfrm>
-            <a:off x="731520" y="1143000"/>
-            <a:ext cx="10515600" cy="1280160"/>
+            <a:off x="731520" y="868680"/>
+            <a:ext cx="10607040" cy="731520"/>
           </a:xfrm>
           <a:prstGeom prst="rect">
             <a:avLst/>
@@ -13744,132 +15791,81 @@
           </a:bodyPr>
           <a:lstStyle/>
           <a:p>
-            <a:pPr algn="l">
-              <a:lnSpc>
-                <a:spcPct val="105000"/>
-              </a:lnSpc>
-              <a:spcAft>
-                <a:spcPts val="800"/>
-              </a:spcAft>
-            </a:pPr>
-            <a:r>
-              <a:rPr sz="3800" b="1" i="0">
+            <a:pPr algn="l"/>
+            <a:r>
+              <a:rPr sz="3200" b="1" i="0">
                 <a:solidFill>
                   <a:srgbClr val="FFFFFF"/>
                 </a:solidFill>
                 <a:latin typeface="Sora"/>
               </a:rPr>
-              <a:t>Not a generic chatbot. </a:t>
-            </a:r>
-            <a:r>
-              <a:rPr sz="3800" b="1" i="0">
-                <a:solidFill>
-                  <a:srgbClr val="7AA8FF"/>
-                </a:solidFill>
-                <a:latin typeface="Sora"/>
-              </a:rPr>
-              <a:t>A real teammate.</a:t>
-            </a:r>
-          </a:p>
-          <a:p>
-            <a:pPr algn="l">
-              <a:lnSpc>
-                <a:spcPct val="105000"/>
-              </a:lnSpc>
-              <a:spcAft>
-                <a:spcPts val="800"/>
-              </a:spcAft>
-            </a:pPr>
-            <a:r>
-              <a:rPr sz="1500" b="0" i="0">
+              <a:t>Your store’s conversations, made clear</a:t>
+            </a:r>
+          </a:p>
+        </p:txBody>
+      </p:sp>
+      <p:sp>
+        <p:nvSpPr>
+          <p:cNvPr id="5" name="TextBox 4"/>
+          <p:cNvSpPr txBox="1"/>
+          <p:nvPr/>
+        </p:nvSpPr>
+        <p:spPr>
+          <a:xfrm>
+            <a:off x="731520" y="1517904"/>
+            <a:ext cx="10607040" cy="457200"/>
+          </a:xfrm>
+          <a:prstGeom prst="rect">
+            <a:avLst/>
+          </a:prstGeom>
+          <a:noFill/>
+        </p:spPr>
+        <p:txBody>
+          <a:bodyPr wrap="square" anchor="t" lIns="0" rIns="0" tIns="0" bIns="0">
+            <a:spAutoFit/>
+          </a:bodyPr>
+          <a:lstStyle/>
+          <a:p>
+            <a:pPr algn="l"/>
+            <a:r>
+              <a:rPr sz="1350" b="0" i="0">
                 <a:solidFill>
                   <a:srgbClr val="B3C2E0"/>
                 </a:solidFill>
                 <a:latin typeface="Open Sans"/>
               </a:rPr>
-              <a:t>Built from the ground up for merchants who know that fast answers drive sales.</a:t>
-            </a:r>
-          </a:p>
-        </p:txBody>
-      </p:sp>
-      <p:sp>
-        <p:nvSpPr>
-          <p:cNvPr id="5" name="Rounded Rectangle 4"/>
+              <a:t>A simple dashboard, built right into your store — no spreadsheets, no guesswork.</a:t>
+            </a:r>
+          </a:p>
+        </p:txBody>
+      </p:sp>
+      <p:sp>
+        <p:nvSpPr>
+          <p:cNvPr id="6" name="Rounded Rectangle 5"/>
           <p:cNvSpPr/>
           <p:nvPr/>
         </p:nvSpPr>
         <p:spPr>
           <a:xfrm>
-            <a:off x="731520" y="2697480"/>
-            <a:ext cx="5349240" cy="548640"/>
+            <a:off x="731520" y="2057400"/>
+            <a:ext cx="10725912" cy="4069080"/>
           </a:xfrm>
           <a:prstGeom prst="roundRect">
             <a:avLst>
-              <a:gd name="adj" fmla="val 18000"/>
+              <a:gd name="adj" fmla="val 4000"/>
             </a:avLst>
           </a:prstGeom>
           <a:solidFill>
-            <a:srgbClr val="020108">
-              <a:alpha val="70000"/>
+            <a:srgbClr val="080330">
+              <a:alpha val="75000"/>
             </a:srgbClr>
           </a:solidFill>
-          <a:ln>
-            <a:noFill/>
-          </a:ln>
-          <a:effectLst/>
-        </p:spPr>
-        <p:style>
-          <a:lnRef idx="1">
-            <a:schemeClr val="accent1"/>
-          </a:lnRef>
-          <a:fillRef idx="3">
-            <a:schemeClr val="accent1"/>
-          </a:fillRef>
-          <a:effectRef idx="2">
-            <a:schemeClr val="accent1"/>
-          </a:effectRef>
-          <a:fontRef idx="minor">
-            <a:schemeClr val="lt1"/>
-          </a:fontRef>
-        </p:style>
-        <p:txBody>
-          <a:bodyPr rtlCol="0" anchor="ctr" wrap="square" lIns="164592" rIns="164592" tIns="73152" bIns="73152"/>
-          <a:lstStyle/>
-          <a:p>
-            <a:pPr algn="ctr"/>
-            <a:r>
-              <a:rPr sz="1300" b="1" i="0" spc="200">
-                <a:solidFill>
-                  <a:srgbClr val="B3C2E0"/>
-                </a:solidFill>
-                <a:latin typeface="JetBrains Mono"/>
-              </a:rPr>
-              <a:t>GENERIC CHATBOT</a:t>
-            </a:r>
-          </a:p>
-        </p:txBody>
-      </p:sp>
-      <p:sp>
-        <p:nvSpPr>
-          <p:cNvPr id="6" name="Rounded Rectangle 5"/>
-          <p:cNvSpPr/>
-          <p:nvPr/>
-        </p:nvSpPr>
-        <p:spPr>
-          <a:xfrm>
-            <a:off x="6355080" y="2697480"/>
-            <a:ext cx="5074920" cy="548640"/>
-          </a:xfrm>
-          <a:prstGeom prst="roundRect">
-            <a:avLst>
-              <a:gd name="adj" fmla="val 18000"/>
-            </a:avLst>
-          </a:prstGeom>
-          <a:solidFill>
-            <a:srgbClr val="4466FF"/>
-          </a:solidFill>
-          <a:ln>
-            <a:noFill/>
+          <a:ln w="12700">
+            <a:solidFill>
+              <a:srgbClr val="4466FF">
+                <a:alpha val="50000"/>
+              </a:srgbClr>
+            </a:solidFill>
           </a:ln>
           <a:effectLst/>
           <a:effectLst>
@@ -13895,19 +15891,10 @@
           </a:fontRef>
         </p:style>
         <p:txBody>
-          <a:bodyPr rtlCol="0" anchor="ctr" wrap="square" lIns="164592" rIns="164592" tIns="73152" bIns="73152"/>
+          <a:bodyPr rtlCol="0" anchor="ctr"/>
           <a:lstStyle/>
           <a:p>
             <a:pPr algn="ctr"/>
-            <a:r>
-              <a:rPr sz="1300" b="1" i="0" spc="200">
-                <a:solidFill>
-                  <a:srgbClr val="FFFFFF"/>
-                </a:solidFill>
-                <a:latin typeface="JetBrains Mono"/>
-              </a:rPr>
-              <a:t>LUMA</a:t>
-            </a:r>
           </a:p>
         </p:txBody>
       </p:sp>
@@ -13919,23 +15906,23 @@
         </p:nvSpPr>
         <p:spPr>
           <a:xfrm>
-            <a:off x="731520" y="3410712"/>
-            <a:ext cx="5349240" cy="548640"/>
+            <a:off x="960120" y="2331720"/>
+            <a:ext cx="2432304" cy="1051560"/>
           </a:xfrm>
           <a:prstGeom prst="roundRect">
             <a:avLst>
-              <a:gd name="adj" fmla="val 14000"/>
+              <a:gd name="adj" fmla="val 12000"/>
             </a:avLst>
           </a:prstGeom>
           <a:solidFill>
-            <a:srgbClr val="080330">
-              <a:alpha val="45000"/>
+            <a:srgbClr val="020108">
+              <a:alpha val="65000"/>
             </a:srgbClr>
           </a:solidFill>
-          <a:ln w="5080">
+          <a:ln w="7620">
             <a:solidFill>
-              <a:srgbClr val="B3C2E0">
-                <a:alpha val="20000"/>
+              <a:srgbClr val="4466FF">
+                <a:alpha val="40000"/>
               </a:srgbClr>
             </a:solidFill>
           </a:ln>
@@ -13956,56 +15943,108 @@
           </a:fontRef>
         </p:style>
         <p:txBody>
-          <a:bodyPr rtlCol="0" anchor="ctr" wrap="square" lIns="164592" rIns="164592" tIns="73152" bIns="73152"/>
+          <a:bodyPr rtlCol="0" anchor="ctr"/>
+          <a:lstStyle/>
+          <a:p>
+            <a:pPr algn="ctr"/>
+          </a:p>
+        </p:txBody>
+      </p:sp>
+      <p:sp>
+        <p:nvSpPr>
+          <p:cNvPr id="8" name="TextBox 7"/>
+          <p:cNvSpPr txBox="1"/>
+          <p:nvPr/>
+        </p:nvSpPr>
+        <p:spPr>
+          <a:xfrm>
+            <a:off x="1188720" y="2478024"/>
+            <a:ext cx="2066544" cy="502920"/>
+          </a:xfrm>
+          <a:prstGeom prst="rect">
+            <a:avLst/>
+          </a:prstGeom>
+          <a:noFill/>
+        </p:spPr>
+        <p:txBody>
+          <a:bodyPr wrap="square" anchor="t" lIns="0" rIns="0" tIns="0" bIns="0">
+            <a:spAutoFit/>
+          </a:bodyPr>
           <a:lstStyle/>
           <a:p>
             <a:pPr algn="l"/>
             <a:r>
-              <a:rPr sz="1200" b="1" i="0">
-                <a:solidFill>
-                  <a:srgbClr val="FF7A7A"/>
+              <a:rPr sz="3000" b="1" i="0">
+                <a:solidFill>
+                  <a:srgbClr val="7AA8FF"/>
+                </a:solidFill>
+                <a:latin typeface="Sora"/>
+              </a:rPr>
+              <a:t>1,240</a:t>
+            </a:r>
+          </a:p>
+        </p:txBody>
+      </p:sp>
+      <p:sp>
+        <p:nvSpPr>
+          <p:cNvPr id="9" name="TextBox 8"/>
+          <p:cNvSpPr txBox="1"/>
+          <p:nvPr/>
+        </p:nvSpPr>
+        <p:spPr>
+          <a:xfrm>
+            <a:off x="1188720" y="3008376"/>
+            <a:ext cx="2066544" cy="365760"/>
+          </a:xfrm>
+          <a:prstGeom prst="rect">
+            <a:avLst/>
+          </a:prstGeom>
+          <a:noFill/>
+        </p:spPr>
+        <p:txBody>
+          <a:bodyPr wrap="square" anchor="t" lIns="0" rIns="0" tIns="0" bIns="0">
+            <a:spAutoFit/>
+          </a:bodyPr>
+          <a:lstStyle/>
+          <a:p>
+            <a:pPr algn="l"/>
+            <a:r>
+              <a:rPr sz="1000" b="0" i="0">
+                <a:solidFill>
+                  <a:srgbClr val="B3C2E0"/>
                 </a:solidFill>
                 <a:latin typeface="Open Sans"/>
               </a:rPr>
-              <a:t>✕  </a:t>
-            </a:r>
-            <a:r>
-              <a:rPr sz="1250" b="0" i="0">
-                <a:solidFill>
-                  <a:srgbClr val="B3C2E0"/>
-                </a:solidFill>
-                <a:latin typeface="Open Sans"/>
-              </a:rPr>
-              <a:t>Translates word-for-word</a:t>
-            </a:r>
-          </a:p>
-        </p:txBody>
-      </p:sp>
-      <p:sp>
-        <p:nvSpPr>
-          <p:cNvPr id="8" name="Rounded Rectangle 7"/>
+              <a:t>Conversations this month</a:t>
+            </a:r>
+          </a:p>
+        </p:txBody>
+      </p:sp>
+      <p:sp>
+        <p:nvSpPr>
+          <p:cNvPr id="10" name="Rounded Rectangle 9"/>
           <p:cNvSpPr/>
           <p:nvPr/>
         </p:nvSpPr>
         <p:spPr>
           <a:xfrm>
-            <a:off x="6355080" y="3410712"/>
-            <a:ext cx="5074920" cy="548640"/>
+            <a:off x="3557016" y="2331720"/>
+            <a:ext cx="2432304" cy="1051560"/>
           </a:xfrm>
           <a:prstGeom prst="roundRect">
             <a:avLst>
-              <a:gd name="adj" fmla="val 14000"/>
+              <a:gd name="adj" fmla="val 12000"/>
             </a:avLst>
           </a:prstGeom>
           <a:solidFill>
-            <a:srgbClr val="080330">
-              <a:alpha val="70000"/>
+            <a:srgbClr val="020108">
+              <a:alpha val="65000"/>
             </a:srgbClr>
           </a:solidFill>
-          <a:ln w="10160">
+          <a:ln w="7620">
             <a:solidFill>
               <a:srgbClr val="4466FF">
-                <a:alpha val="60000"/>
+                <a:alpha val="40000"/>
               </a:srgbClr>
             </a:solidFill>
           </a:ln>
@@ -14026,56 +16065,108 @@
           </a:fontRef>
         </p:style>
         <p:txBody>
-          <a:bodyPr rtlCol="0" anchor="ctr" wrap="square" lIns="164592" rIns="164592" tIns="73152" bIns="73152"/>
+          <a:bodyPr rtlCol="0" anchor="ctr"/>
+          <a:lstStyle/>
+          <a:p>
+            <a:pPr algn="ctr"/>
+          </a:p>
+        </p:txBody>
+      </p:sp>
+      <p:sp>
+        <p:nvSpPr>
+          <p:cNvPr id="11" name="TextBox 10"/>
+          <p:cNvSpPr txBox="1"/>
+          <p:nvPr/>
+        </p:nvSpPr>
+        <p:spPr>
+          <a:xfrm>
+            <a:off x="3785616" y="2478024"/>
+            <a:ext cx="2066544" cy="502920"/>
+          </a:xfrm>
+          <a:prstGeom prst="rect">
+            <a:avLst/>
+          </a:prstGeom>
+          <a:noFill/>
+        </p:spPr>
+        <p:txBody>
+          <a:bodyPr wrap="square" anchor="t" lIns="0" rIns="0" tIns="0" bIns="0">
+            <a:spAutoFit/>
+          </a:bodyPr>
           <a:lstStyle/>
           <a:p>
             <a:pPr algn="l"/>
             <a:r>
-              <a:rPr sz="1200" b="1" i="0">
-                <a:solidFill>
-                  <a:srgbClr val="22C55E"/>
+              <a:rPr sz="3000" b="1" i="0">
+                <a:solidFill>
+                  <a:srgbClr val="7AA8FF"/>
+                </a:solidFill>
+                <a:latin typeface="Sora"/>
+              </a:rPr>
+              <a:t>94%</a:t>
+            </a:r>
+          </a:p>
+        </p:txBody>
+      </p:sp>
+      <p:sp>
+        <p:nvSpPr>
+          <p:cNvPr id="12" name="TextBox 11"/>
+          <p:cNvSpPr txBox="1"/>
+          <p:nvPr/>
+        </p:nvSpPr>
+        <p:spPr>
+          <a:xfrm>
+            <a:off x="3785616" y="3008376"/>
+            <a:ext cx="2066544" cy="365760"/>
+          </a:xfrm>
+          <a:prstGeom prst="rect">
+            <a:avLst/>
+          </a:prstGeom>
+          <a:noFill/>
+        </p:spPr>
+        <p:txBody>
+          <a:bodyPr wrap="square" anchor="t" lIns="0" rIns="0" tIns="0" bIns="0">
+            <a:spAutoFit/>
+          </a:bodyPr>
+          <a:lstStyle/>
+          <a:p>
+            <a:pPr algn="l"/>
+            <a:r>
+              <a:rPr sz="1000" b="0" i="0">
+                <a:solidFill>
+                  <a:srgbClr val="B3C2E0"/>
                 </a:solidFill>
                 <a:latin typeface="Open Sans"/>
               </a:rPr>
-              <a:t>✓  </a:t>
-            </a:r>
-            <a:r>
-              <a:rPr sz="1250" b="1" i="0">
-                <a:solidFill>
-                  <a:srgbClr val="FFFFFF"/>
-                </a:solidFill>
-                <a:latin typeface="Open Sans"/>
-              </a:rPr>
-              <a:t>Speaks Arabic and Franco-Arabic naturally</a:t>
-            </a:r>
-          </a:p>
-        </p:txBody>
-      </p:sp>
-      <p:sp>
-        <p:nvSpPr>
-          <p:cNvPr id="9" name="Rounded Rectangle 8"/>
+              <a:t>Answered instantly</a:t>
+            </a:r>
+          </a:p>
+        </p:txBody>
+      </p:sp>
+      <p:sp>
+        <p:nvSpPr>
+          <p:cNvPr id="13" name="Rounded Rectangle 12"/>
           <p:cNvSpPr/>
           <p:nvPr/>
         </p:nvSpPr>
         <p:spPr>
           <a:xfrm>
-            <a:off x="731520" y="4050792"/>
-            <a:ext cx="5349240" cy="548640"/>
+            <a:off x="6153912" y="2331720"/>
+            <a:ext cx="2432304" cy="1051560"/>
           </a:xfrm>
           <a:prstGeom prst="roundRect">
             <a:avLst>
-              <a:gd name="adj" fmla="val 14000"/>
+              <a:gd name="adj" fmla="val 12000"/>
             </a:avLst>
           </a:prstGeom>
           <a:solidFill>
-            <a:srgbClr val="080330">
-              <a:alpha val="45000"/>
+            <a:srgbClr val="020108">
+              <a:alpha val="65000"/>
             </a:srgbClr>
           </a:solidFill>
-          <a:ln w="5080">
+          <a:ln w="7620">
             <a:solidFill>
-              <a:srgbClr val="B3C2E0">
-                <a:alpha val="20000"/>
+              <a:srgbClr val="4466FF">
+                <a:alpha val="40000"/>
               </a:srgbClr>
             </a:solidFill>
           </a:ln>
@@ -14096,56 +16187,108 @@
           </a:fontRef>
         </p:style>
         <p:txBody>
-          <a:bodyPr rtlCol="0" anchor="ctr" wrap="square" lIns="164592" rIns="164592" tIns="73152" bIns="73152"/>
+          <a:bodyPr rtlCol="0" anchor="ctr"/>
+          <a:lstStyle/>
+          <a:p>
+            <a:pPr algn="ctr"/>
+          </a:p>
+        </p:txBody>
+      </p:sp>
+      <p:sp>
+        <p:nvSpPr>
+          <p:cNvPr id="14" name="TextBox 13"/>
+          <p:cNvSpPr txBox="1"/>
+          <p:nvPr/>
+        </p:nvSpPr>
+        <p:spPr>
+          <a:xfrm>
+            <a:off x="6382512" y="2478024"/>
+            <a:ext cx="2066544" cy="502920"/>
+          </a:xfrm>
+          <a:prstGeom prst="rect">
+            <a:avLst/>
+          </a:prstGeom>
+          <a:noFill/>
+        </p:spPr>
+        <p:txBody>
+          <a:bodyPr wrap="square" anchor="t" lIns="0" rIns="0" tIns="0" bIns="0">
+            <a:spAutoFit/>
+          </a:bodyPr>
           <a:lstStyle/>
           <a:p>
             <a:pPr algn="l"/>
             <a:r>
-              <a:rPr sz="1200" b="1" i="0">
-                <a:solidFill>
-                  <a:srgbClr val="FF7A7A"/>
+              <a:rPr sz="3000" b="1" i="0">
+                <a:solidFill>
+                  <a:srgbClr val="7AA8FF"/>
+                </a:solidFill>
+                <a:latin typeface="Sora"/>
+              </a:rPr>
+              <a:t>310</a:t>
+            </a:r>
+          </a:p>
+        </p:txBody>
+      </p:sp>
+      <p:sp>
+        <p:nvSpPr>
+          <p:cNvPr id="15" name="TextBox 14"/>
+          <p:cNvSpPr txBox="1"/>
+          <p:nvPr/>
+        </p:nvSpPr>
+        <p:spPr>
+          <a:xfrm>
+            <a:off x="6382512" y="3008376"/>
+            <a:ext cx="2066544" cy="365760"/>
+          </a:xfrm>
+          <a:prstGeom prst="rect">
+            <a:avLst/>
+          </a:prstGeom>
+          <a:noFill/>
+        </p:spPr>
+        <p:txBody>
+          <a:bodyPr wrap="square" anchor="t" lIns="0" rIns="0" tIns="0" bIns="0">
+            <a:spAutoFit/>
+          </a:bodyPr>
+          <a:lstStyle/>
+          <a:p>
+            <a:pPr algn="l"/>
+            <a:r>
+              <a:rPr sz="1000" b="0" i="0">
+                <a:solidFill>
+                  <a:srgbClr val="B3C2E0"/>
                 </a:solidFill>
                 <a:latin typeface="Open Sans"/>
               </a:rPr>
-              <a:t>✕  </a:t>
-            </a:r>
-            <a:r>
-              <a:rPr sz="1250" b="0" i="0">
-                <a:solidFill>
-                  <a:srgbClr val="B3C2E0"/>
-                </a:solidFill>
-                <a:latin typeface="Open Sans"/>
-              </a:rPr>
-              <a:t>Guesses order status</a:t>
-            </a:r>
-          </a:p>
-        </p:txBody>
-      </p:sp>
-      <p:sp>
-        <p:nvSpPr>
-          <p:cNvPr id="10" name="Rounded Rectangle 9"/>
+              <a:t>After-hours chats handled</a:t>
+            </a:r>
+          </a:p>
+        </p:txBody>
+      </p:sp>
+      <p:sp>
+        <p:nvSpPr>
+          <p:cNvPr id="16" name="Rounded Rectangle 15"/>
           <p:cNvSpPr/>
           <p:nvPr/>
         </p:nvSpPr>
         <p:spPr>
           <a:xfrm>
-            <a:off x="6355080" y="4050792"/>
-            <a:ext cx="5074920" cy="548640"/>
+            <a:off x="8750808" y="2331720"/>
+            <a:ext cx="2432304" cy="1051560"/>
           </a:xfrm>
           <a:prstGeom prst="roundRect">
             <a:avLst>
-              <a:gd name="adj" fmla="val 14000"/>
+              <a:gd name="adj" fmla="val 12000"/>
             </a:avLst>
           </a:prstGeom>
           <a:solidFill>
-            <a:srgbClr val="080330">
-              <a:alpha val="70000"/>
+            <a:srgbClr val="020108">
+              <a:alpha val="65000"/>
             </a:srgbClr>
           </a:solidFill>
-          <a:ln w="10160">
+          <a:ln w="7620">
             <a:solidFill>
               <a:srgbClr val="4466FF">
-                <a:alpha val="60000"/>
+                <a:alpha val="40000"/>
               </a:srgbClr>
             </a:solidFill>
           </a:ln>
@@ -14166,58 +16309,141 @@
           </a:fontRef>
         </p:style>
         <p:txBody>
-          <a:bodyPr rtlCol="0" anchor="ctr" wrap="square" lIns="164592" rIns="164592" tIns="73152" bIns="73152"/>
+          <a:bodyPr rtlCol="0" anchor="ctr"/>
+          <a:lstStyle/>
+          <a:p>
+            <a:pPr algn="ctr"/>
+          </a:p>
+        </p:txBody>
+      </p:sp>
+      <p:sp>
+        <p:nvSpPr>
+          <p:cNvPr id="17" name="TextBox 16"/>
+          <p:cNvSpPr txBox="1"/>
+          <p:nvPr/>
+        </p:nvSpPr>
+        <p:spPr>
+          <a:xfrm>
+            <a:off x="8979408" y="2478024"/>
+            <a:ext cx="2066544" cy="502920"/>
+          </a:xfrm>
+          <a:prstGeom prst="rect">
+            <a:avLst/>
+          </a:prstGeom>
+          <a:noFill/>
+        </p:spPr>
+        <p:txBody>
+          <a:bodyPr wrap="square" anchor="t" lIns="0" rIns="0" tIns="0" bIns="0">
+            <a:spAutoFit/>
+          </a:bodyPr>
           <a:lstStyle/>
           <a:p>
             <a:pPr algn="l"/>
             <a:r>
-              <a:rPr sz="1200" b="1" i="0">
-                <a:solidFill>
-                  <a:srgbClr val="22C55E"/>
+              <a:rPr sz="3000" b="1" i="0">
+                <a:solidFill>
+                  <a:srgbClr val="7AA8FF"/>
+                </a:solidFill>
+                <a:latin typeface="Sora"/>
+              </a:rPr>
+              <a:t>4.7 / 5</a:t>
+            </a:r>
+          </a:p>
+        </p:txBody>
+      </p:sp>
+      <p:sp>
+        <p:nvSpPr>
+          <p:cNvPr id="18" name="TextBox 17"/>
+          <p:cNvSpPr txBox="1"/>
+          <p:nvPr/>
+        </p:nvSpPr>
+        <p:spPr>
+          <a:xfrm>
+            <a:off x="8979408" y="3008376"/>
+            <a:ext cx="2066544" cy="365760"/>
+          </a:xfrm>
+          <a:prstGeom prst="rect">
+            <a:avLst/>
+          </a:prstGeom>
+          <a:noFill/>
+        </p:spPr>
+        <p:txBody>
+          <a:bodyPr wrap="square" anchor="t" lIns="0" rIns="0" tIns="0" bIns="0">
+            <a:spAutoFit/>
+          </a:bodyPr>
+          <a:lstStyle/>
+          <a:p>
+            <a:pPr algn="l"/>
+            <a:r>
+              <a:rPr sz="1000" b="0" i="0">
+                <a:solidFill>
+                  <a:srgbClr val="B3C2E0"/>
                 </a:solidFill>
                 <a:latin typeface="Open Sans"/>
               </a:rPr>
-              <a:t>✓  </a:t>
-            </a:r>
-            <a:r>
-              <a:rPr sz="1250" b="1" i="0">
+              <a:t>Average customer rating</a:t>
+            </a:r>
+          </a:p>
+        </p:txBody>
+      </p:sp>
+      <p:sp>
+        <p:nvSpPr>
+          <p:cNvPr id="19" name="TextBox 18"/>
+          <p:cNvSpPr txBox="1"/>
+          <p:nvPr/>
+        </p:nvSpPr>
+        <p:spPr>
+          <a:xfrm>
+            <a:off x="960120" y="3703320"/>
+            <a:ext cx="4572000" cy="365760"/>
+          </a:xfrm>
+          <a:prstGeom prst="rect">
+            <a:avLst/>
+          </a:prstGeom>
+          <a:noFill/>
+        </p:spPr>
+        <p:txBody>
+          <a:bodyPr wrap="square" anchor="t" lIns="0" rIns="0" tIns="0" bIns="0">
+            <a:spAutoFit/>
+          </a:bodyPr>
+          <a:lstStyle/>
+          <a:p>
+            <a:pPr algn="l"/>
+            <a:r>
+              <a:rPr sz="1300" b="1" i="0">
                 <a:solidFill>
                   <a:srgbClr val="FFFFFF"/>
                 </a:solidFill>
-                <a:latin typeface="Open Sans"/>
-              </a:rPr>
-              <a:t>Gives accurate, up-to-date order updates</a:t>
-            </a:r>
-          </a:p>
-        </p:txBody>
-      </p:sp>
-      <p:sp>
-        <p:nvSpPr>
-          <p:cNvPr id="11" name="Rounded Rectangle 10"/>
+                <a:latin typeface="Sora"/>
+              </a:rPr>
+              <a:t>Conversations per day</a:t>
+            </a:r>
+          </a:p>
+        </p:txBody>
+      </p:sp>
+      <p:sp>
+        <p:nvSpPr>
+          <p:cNvPr id="20" name="Rounded Rectangle 19"/>
           <p:cNvSpPr/>
           <p:nvPr/>
         </p:nvSpPr>
         <p:spPr>
           <a:xfrm>
-            <a:off x="731520" y="4690872"/>
-            <a:ext cx="5349240" cy="548640"/>
+            <a:off x="1097280" y="4940046"/>
+            <a:ext cx="457200" cy="729234"/>
           </a:xfrm>
           <a:prstGeom prst="roundRect">
             <a:avLst>
-              <a:gd name="adj" fmla="val 14000"/>
+              <a:gd name="adj" fmla="val 20000"/>
             </a:avLst>
           </a:prstGeom>
           <a:solidFill>
-            <a:srgbClr val="080330">
-              <a:alpha val="45000"/>
+            <a:srgbClr val="4466FF">
+              <a:alpha val="75000"/>
             </a:srgbClr>
           </a:solidFill>
-          <a:ln w="5080">
-            <a:solidFill>
-              <a:srgbClr val="B3C2E0">
-                <a:alpha val="20000"/>
-              </a:srgbClr>
-            </a:solidFill>
+          <a:ln>
+            <a:noFill/>
           </a:ln>
           <a:effectLst/>
         </p:spPr>
@@ -14236,58 +16462,71 @@
           </a:fontRef>
         </p:style>
         <p:txBody>
-          <a:bodyPr rtlCol="0" anchor="ctr" wrap="square" lIns="164592" rIns="164592" tIns="73152" bIns="73152"/>
-          <a:lstStyle/>
-          <a:p>
-            <a:pPr algn="l"/>
-            <a:r>
-              <a:rPr sz="1200" b="1" i="0">
-                <a:solidFill>
-                  <a:srgbClr val="FF7A7A"/>
-                </a:solidFill>
-                <a:latin typeface="Open Sans"/>
-              </a:rPr>
-              <a:t>✕  </a:t>
-            </a:r>
-            <a:r>
-              <a:rPr sz="1250" b="0" i="0">
+          <a:bodyPr rtlCol="0" anchor="ctr"/>
+          <a:lstStyle/>
+          <a:p>
+            <a:pPr algn="ctr"/>
+          </a:p>
+        </p:txBody>
+      </p:sp>
+      <p:sp>
+        <p:nvSpPr>
+          <p:cNvPr id="21" name="TextBox 20"/>
+          <p:cNvSpPr txBox="1"/>
+          <p:nvPr/>
+        </p:nvSpPr>
+        <p:spPr>
+          <a:xfrm>
+            <a:off x="1005840" y="5705856"/>
+            <a:ext cx="640080" cy="274320"/>
+          </a:xfrm>
+          <a:prstGeom prst="rect">
+            <a:avLst/>
+          </a:prstGeom>
+          <a:noFill/>
+        </p:spPr>
+        <p:txBody>
+          <a:bodyPr wrap="square" anchor="t" lIns="0" rIns="0" tIns="0" bIns="0">
+            <a:spAutoFit/>
+          </a:bodyPr>
+          <a:lstStyle/>
+          <a:p>
+            <a:pPr algn="ctr"/>
+            <a:r>
+              <a:rPr sz="850" b="0" i="0">
                 <a:solidFill>
                   <a:srgbClr val="B3C2E0"/>
                 </a:solidFill>
-                <a:latin typeface="Open Sans"/>
-              </a:rPr>
-              <a:t>Yet another app to open</a:t>
-            </a:r>
-          </a:p>
-        </p:txBody>
-      </p:sp>
-      <p:sp>
-        <p:nvSpPr>
-          <p:cNvPr id="12" name="Rounded Rectangle 11"/>
+                <a:latin typeface="JetBrains Mono"/>
+              </a:rPr>
+              <a:t>Mon</a:t>
+            </a:r>
+          </a:p>
+        </p:txBody>
+      </p:sp>
+      <p:sp>
+        <p:nvSpPr>
+          <p:cNvPr id="22" name="Rounded Rectangle 21"/>
           <p:cNvSpPr/>
           <p:nvPr/>
         </p:nvSpPr>
         <p:spPr>
           <a:xfrm>
-            <a:off x="6355080" y="4690872"/>
-            <a:ext cx="5074920" cy="548640"/>
+            <a:off x="1865376" y="4741165"/>
+            <a:ext cx="457200" cy="928115"/>
           </a:xfrm>
           <a:prstGeom prst="roundRect">
             <a:avLst>
-              <a:gd name="adj" fmla="val 14000"/>
+              <a:gd name="adj" fmla="val 20000"/>
             </a:avLst>
           </a:prstGeom>
           <a:solidFill>
-            <a:srgbClr val="080330">
-              <a:alpha val="70000"/>
+            <a:srgbClr val="4466FF">
+              <a:alpha val="75000"/>
             </a:srgbClr>
           </a:solidFill>
-          <a:ln w="10160">
-            <a:solidFill>
-              <a:srgbClr val="4466FF">
-                <a:alpha val="60000"/>
-              </a:srgbClr>
-            </a:solidFill>
+          <a:ln>
+            <a:noFill/>
           </a:ln>
           <a:effectLst/>
         </p:spPr>
@@ -14306,58 +16545,71 @@
           </a:fontRef>
         </p:style>
         <p:txBody>
-          <a:bodyPr rtlCol="0" anchor="ctr" wrap="square" lIns="164592" rIns="164592" tIns="73152" bIns="73152"/>
-          <a:lstStyle/>
-          <a:p>
-            <a:pPr algn="l"/>
-            <a:r>
-              <a:rPr sz="1200" b="1" i="0">
-                <a:solidFill>
-                  <a:srgbClr val="22C55E"/>
-                </a:solidFill>
-                <a:latin typeface="Open Sans"/>
-              </a:rPr>
-              <a:t>✓  </a:t>
-            </a:r>
-            <a:r>
-              <a:rPr sz="1250" b="1" i="0">
-                <a:solidFill>
-                  <a:srgbClr val="FFFFFF"/>
-                </a:solidFill>
-                <a:latin typeface="Open Sans"/>
-              </a:rPr>
-              <a:t>Works right inside your store</a:t>
-            </a:r>
-          </a:p>
-        </p:txBody>
-      </p:sp>
-      <p:sp>
-        <p:nvSpPr>
-          <p:cNvPr id="13" name="Rounded Rectangle 12"/>
+          <a:bodyPr rtlCol="0" anchor="ctr"/>
+          <a:lstStyle/>
+          <a:p>
+            <a:pPr algn="ctr"/>
+          </a:p>
+        </p:txBody>
+      </p:sp>
+      <p:sp>
+        <p:nvSpPr>
+          <p:cNvPr id="23" name="TextBox 22"/>
+          <p:cNvSpPr txBox="1"/>
+          <p:nvPr/>
+        </p:nvSpPr>
+        <p:spPr>
+          <a:xfrm>
+            <a:off x="1773936" y="5705856"/>
+            <a:ext cx="640080" cy="274320"/>
+          </a:xfrm>
+          <a:prstGeom prst="rect">
+            <a:avLst/>
+          </a:prstGeom>
+          <a:noFill/>
+        </p:spPr>
+        <p:txBody>
+          <a:bodyPr wrap="square" anchor="t" lIns="0" rIns="0" tIns="0" bIns="0">
+            <a:spAutoFit/>
+          </a:bodyPr>
+          <a:lstStyle/>
+          <a:p>
+            <a:pPr algn="ctr"/>
+            <a:r>
+              <a:rPr sz="850" b="0" i="0">
+                <a:solidFill>
+                  <a:srgbClr val="B3C2E0"/>
+                </a:solidFill>
+                <a:latin typeface="JetBrains Mono"/>
+              </a:rPr>
+              <a:t>Tue</a:t>
+            </a:r>
+          </a:p>
+        </p:txBody>
+      </p:sp>
+      <p:sp>
+        <p:nvSpPr>
+          <p:cNvPr id="24" name="Rounded Rectangle 23"/>
           <p:cNvSpPr/>
           <p:nvPr/>
         </p:nvSpPr>
         <p:spPr>
           <a:xfrm>
-            <a:off x="731520" y="5330952"/>
-            <a:ext cx="5349240" cy="548640"/>
+            <a:off x="2633472" y="4847235"/>
+            <a:ext cx="457200" cy="822045"/>
           </a:xfrm>
           <a:prstGeom prst="roundRect">
             <a:avLst>
-              <a:gd name="adj" fmla="val 14000"/>
+              <a:gd name="adj" fmla="val 20000"/>
             </a:avLst>
           </a:prstGeom>
           <a:solidFill>
-            <a:srgbClr val="080330">
-              <a:alpha val="45000"/>
+            <a:srgbClr val="4466FF">
+              <a:alpha val="75000"/>
             </a:srgbClr>
           </a:solidFill>
-          <a:ln w="5080">
-            <a:solidFill>
-              <a:srgbClr val="B3C2E0">
-                <a:alpha val="20000"/>
-              </a:srgbClr>
-            </a:solidFill>
+          <a:ln>
+            <a:noFill/>
           </a:ln>
           <a:effectLst/>
         </p:spPr>
@@ -14376,58 +16628,71 @@
           </a:fontRef>
         </p:style>
         <p:txBody>
-          <a:bodyPr rtlCol="0" anchor="ctr" wrap="square" lIns="164592" rIns="164592" tIns="73152" bIns="73152"/>
-          <a:lstStyle/>
-          <a:p>
-            <a:pPr algn="l"/>
-            <a:r>
-              <a:rPr sz="1200" b="1" i="0">
-                <a:solidFill>
-                  <a:srgbClr val="FF7A7A"/>
-                </a:solidFill>
-                <a:latin typeface="Open Sans"/>
-              </a:rPr>
-              <a:t>✕  </a:t>
-            </a:r>
-            <a:r>
-              <a:rPr sz="1250" b="0" i="0">
+          <a:bodyPr rtlCol="0" anchor="ctr"/>
+          <a:lstStyle/>
+          <a:p>
+            <a:pPr algn="ctr"/>
+          </a:p>
+        </p:txBody>
+      </p:sp>
+      <p:sp>
+        <p:nvSpPr>
+          <p:cNvPr id="25" name="TextBox 24"/>
+          <p:cNvSpPr txBox="1"/>
+          <p:nvPr/>
+        </p:nvSpPr>
+        <p:spPr>
+          <a:xfrm>
+            <a:off x="2542032" y="5705856"/>
+            <a:ext cx="640080" cy="274320"/>
+          </a:xfrm>
+          <a:prstGeom prst="rect">
+            <a:avLst/>
+          </a:prstGeom>
+          <a:noFill/>
+        </p:spPr>
+        <p:txBody>
+          <a:bodyPr wrap="square" anchor="t" lIns="0" rIns="0" tIns="0" bIns="0">
+            <a:spAutoFit/>
+          </a:bodyPr>
+          <a:lstStyle/>
+          <a:p>
+            <a:pPr algn="ctr"/>
+            <a:r>
+              <a:rPr sz="850" b="0" i="0">
                 <a:solidFill>
                   <a:srgbClr val="B3C2E0"/>
                 </a:solidFill>
-                <a:latin typeface="Open Sans"/>
-              </a:rPr>
-              <a:t>Replies sound robotic</a:t>
-            </a:r>
-          </a:p>
-        </p:txBody>
-      </p:sp>
-      <p:sp>
-        <p:nvSpPr>
-          <p:cNvPr id="14" name="Rounded Rectangle 13"/>
+                <a:latin typeface="JetBrains Mono"/>
+              </a:rPr>
+              <a:t>Wed</a:t>
+            </a:r>
+          </a:p>
+        </p:txBody>
+      </p:sp>
+      <p:sp>
+        <p:nvSpPr>
+          <p:cNvPr id="26" name="Rounded Rectangle 25"/>
           <p:cNvSpPr/>
           <p:nvPr/>
         </p:nvSpPr>
         <p:spPr>
           <a:xfrm>
-            <a:off x="6355080" y="5330952"/>
-            <a:ext cx="5074920" cy="548640"/>
+            <a:off x="3401568" y="4542282"/>
+            <a:ext cx="457200" cy="1126998"/>
           </a:xfrm>
           <a:prstGeom prst="roundRect">
             <a:avLst>
-              <a:gd name="adj" fmla="val 14000"/>
+              <a:gd name="adj" fmla="val 20000"/>
             </a:avLst>
           </a:prstGeom>
           <a:solidFill>
-            <a:srgbClr val="080330">
-              <a:alpha val="70000"/>
+            <a:srgbClr val="4466FF">
+              <a:alpha val="75000"/>
             </a:srgbClr>
           </a:solidFill>
-          <a:ln w="10160">
-            <a:solidFill>
-              <a:srgbClr val="4466FF">
-                <a:alpha val="60000"/>
-              </a:srgbClr>
-            </a:solidFill>
+          <a:ln>
+            <a:noFill/>
           </a:ln>
           <a:effectLst/>
         </p:spPr>
@@ -14446,58 +16711,71 @@
           </a:fontRef>
         </p:style>
         <p:txBody>
-          <a:bodyPr rtlCol="0" anchor="ctr" wrap="square" lIns="164592" rIns="164592" tIns="73152" bIns="73152"/>
-          <a:lstStyle/>
-          <a:p>
-            <a:pPr algn="l"/>
-            <a:r>
-              <a:rPr sz="1200" b="1" i="0">
-                <a:solidFill>
-                  <a:srgbClr val="22C55E"/>
-                </a:solidFill>
-                <a:latin typeface="Open Sans"/>
-              </a:rPr>
-              <a:t>✓  </a:t>
-            </a:r>
-            <a:r>
-              <a:rPr sz="1250" b="1" i="0">
-                <a:solidFill>
-                  <a:srgbClr val="FFFFFF"/>
-                </a:solidFill>
-                <a:latin typeface="Open Sans"/>
-              </a:rPr>
-              <a:t>Sounds like your brand</a:t>
-            </a:r>
-          </a:p>
-        </p:txBody>
-      </p:sp>
-      <p:sp>
-        <p:nvSpPr>
-          <p:cNvPr id="15" name="Rounded Rectangle 14"/>
+          <a:bodyPr rtlCol="0" anchor="ctr"/>
+          <a:lstStyle/>
+          <a:p>
+            <a:pPr algn="ctr"/>
+          </a:p>
+        </p:txBody>
+      </p:sp>
+      <p:sp>
+        <p:nvSpPr>
+          <p:cNvPr id="27" name="TextBox 26"/>
+          <p:cNvSpPr txBox="1"/>
+          <p:nvPr/>
+        </p:nvSpPr>
+        <p:spPr>
+          <a:xfrm>
+            <a:off x="3310128" y="5705856"/>
+            <a:ext cx="640080" cy="274320"/>
+          </a:xfrm>
+          <a:prstGeom prst="rect">
+            <a:avLst/>
+          </a:prstGeom>
+          <a:noFill/>
+        </p:spPr>
+        <p:txBody>
+          <a:bodyPr wrap="square" anchor="t" lIns="0" rIns="0" tIns="0" bIns="0">
+            <a:spAutoFit/>
+          </a:bodyPr>
+          <a:lstStyle/>
+          <a:p>
+            <a:pPr algn="ctr"/>
+            <a:r>
+              <a:rPr sz="850" b="0" i="0">
+                <a:solidFill>
+                  <a:srgbClr val="B3C2E0"/>
+                </a:solidFill>
+                <a:latin typeface="JetBrains Mono"/>
+              </a:rPr>
+              <a:t>Thu</a:t>
+            </a:r>
+          </a:p>
+        </p:txBody>
+      </p:sp>
+      <p:sp>
+        <p:nvSpPr>
+          <p:cNvPr id="28" name="Rounded Rectangle 27"/>
           <p:cNvSpPr/>
           <p:nvPr/>
         </p:nvSpPr>
         <p:spPr>
           <a:xfrm>
-            <a:off x="731520" y="5971032"/>
-            <a:ext cx="5349240" cy="548640"/>
+            <a:off x="4169664" y="4343400"/>
+            <a:ext cx="457200" cy="1325880"/>
           </a:xfrm>
           <a:prstGeom prst="roundRect">
             <a:avLst>
-              <a:gd name="adj" fmla="val 14000"/>
+              <a:gd name="adj" fmla="val 20000"/>
             </a:avLst>
           </a:prstGeom>
           <a:solidFill>
-            <a:srgbClr val="080330">
-              <a:alpha val="45000"/>
+            <a:srgbClr val="7AA8FF">
+              <a:alpha val="100000"/>
             </a:srgbClr>
           </a:solidFill>
-          <a:ln w="5080">
-            <a:solidFill>
-              <a:srgbClr val="B3C2E0">
-                <a:alpha val="20000"/>
-              </a:srgbClr>
-            </a:solidFill>
+          <a:ln>
+            <a:noFill/>
           </a:ln>
           <a:effectLst/>
         </p:spPr>
@@ -14516,58 +16794,71 @@
           </a:fontRef>
         </p:style>
         <p:txBody>
-          <a:bodyPr rtlCol="0" anchor="ctr" wrap="square" lIns="164592" rIns="164592" tIns="73152" bIns="73152"/>
-          <a:lstStyle/>
-          <a:p>
-            <a:pPr algn="l"/>
-            <a:r>
-              <a:rPr sz="1200" b="1" i="0">
-                <a:solidFill>
-                  <a:srgbClr val="FF7A7A"/>
-                </a:solidFill>
-                <a:latin typeface="Open Sans"/>
-              </a:rPr>
-              <a:t>✕  </a:t>
-            </a:r>
-            <a:r>
-              <a:rPr sz="1250" b="0" i="0">
+          <a:bodyPr rtlCol="0" anchor="ctr"/>
+          <a:lstStyle/>
+          <a:p>
+            <a:pPr algn="ctr"/>
+          </a:p>
+        </p:txBody>
+      </p:sp>
+      <p:sp>
+        <p:nvSpPr>
+          <p:cNvPr id="29" name="TextBox 28"/>
+          <p:cNvSpPr txBox="1"/>
+          <p:nvPr/>
+        </p:nvSpPr>
+        <p:spPr>
+          <a:xfrm>
+            <a:off x="4078224" y="5705856"/>
+            <a:ext cx="640080" cy="274320"/>
+          </a:xfrm>
+          <a:prstGeom prst="rect">
+            <a:avLst/>
+          </a:prstGeom>
+          <a:noFill/>
+        </p:spPr>
+        <p:txBody>
+          <a:bodyPr wrap="square" anchor="t" lIns="0" rIns="0" tIns="0" bIns="0">
+            <a:spAutoFit/>
+          </a:bodyPr>
+          <a:lstStyle/>
+          <a:p>
+            <a:pPr algn="ctr"/>
+            <a:r>
+              <a:rPr sz="850" b="0" i="0">
                 <a:solidFill>
                   <a:srgbClr val="B3C2E0"/>
                 </a:solidFill>
-                <a:latin typeface="Open Sans"/>
-              </a:rPr>
-              <a:t>Gets stuck when confused</a:t>
-            </a:r>
-          </a:p>
-        </p:txBody>
-      </p:sp>
-      <p:sp>
-        <p:nvSpPr>
-          <p:cNvPr id="16" name="Rounded Rectangle 15"/>
+                <a:latin typeface="JetBrains Mono"/>
+              </a:rPr>
+              <a:t>Fri</a:t>
+            </a:r>
+          </a:p>
+        </p:txBody>
+      </p:sp>
+      <p:sp>
+        <p:nvSpPr>
+          <p:cNvPr id="30" name="Rounded Rectangle 29"/>
           <p:cNvSpPr/>
           <p:nvPr/>
         </p:nvSpPr>
         <p:spPr>
           <a:xfrm>
-            <a:off x="6355080" y="5971032"/>
-            <a:ext cx="5074920" cy="548640"/>
+            <a:off x="4937760" y="4449471"/>
+            <a:ext cx="457200" cy="1219809"/>
           </a:xfrm>
           <a:prstGeom prst="roundRect">
             <a:avLst>
-              <a:gd name="adj" fmla="val 14000"/>
+              <a:gd name="adj" fmla="val 20000"/>
             </a:avLst>
           </a:prstGeom>
           <a:solidFill>
-            <a:srgbClr val="080330">
-              <a:alpha val="70000"/>
+            <a:srgbClr val="4466FF">
+              <a:alpha val="75000"/>
             </a:srgbClr>
           </a:solidFill>
-          <a:ln w="10160">
-            <a:solidFill>
-              <a:srgbClr val="4466FF">
-                <a:alpha val="60000"/>
-              </a:srgbClr>
-            </a:solidFill>
+          <a:ln>
+            <a:noFill/>
           </a:ln>
           <a:effectLst/>
         </p:spPr>
@@ -14586,34 +16877,541 @@
           </a:fontRef>
         </p:style>
         <p:txBody>
-          <a:bodyPr rtlCol="0" anchor="ctr" wrap="square" lIns="164592" rIns="164592" tIns="73152" bIns="73152"/>
+          <a:bodyPr rtlCol="0" anchor="ctr"/>
+          <a:lstStyle/>
+          <a:p>
+            <a:pPr algn="ctr"/>
+          </a:p>
+        </p:txBody>
+      </p:sp>
+      <p:sp>
+        <p:nvSpPr>
+          <p:cNvPr id="31" name="TextBox 30"/>
+          <p:cNvSpPr txBox="1"/>
+          <p:nvPr/>
+        </p:nvSpPr>
+        <p:spPr>
+          <a:xfrm>
+            <a:off x="4846320" y="5705856"/>
+            <a:ext cx="640080" cy="274320"/>
+          </a:xfrm>
+          <a:prstGeom prst="rect">
+            <a:avLst/>
+          </a:prstGeom>
+          <a:noFill/>
+        </p:spPr>
+        <p:txBody>
+          <a:bodyPr wrap="square" anchor="t" lIns="0" rIns="0" tIns="0" bIns="0">
+            <a:spAutoFit/>
+          </a:bodyPr>
+          <a:lstStyle/>
+          <a:p>
+            <a:pPr algn="ctr"/>
+            <a:r>
+              <a:rPr sz="850" b="0" i="0">
+                <a:solidFill>
+                  <a:srgbClr val="B3C2E0"/>
+                </a:solidFill>
+                <a:latin typeface="JetBrains Mono"/>
+              </a:rPr>
+              <a:t>Sat</a:t>
+            </a:r>
+          </a:p>
+        </p:txBody>
+      </p:sp>
+      <p:sp>
+        <p:nvSpPr>
+          <p:cNvPr id="32" name="Rounded Rectangle 31"/>
+          <p:cNvSpPr/>
+          <p:nvPr/>
+        </p:nvSpPr>
+        <p:spPr>
+          <a:xfrm>
+            <a:off x="5705856" y="4767682"/>
+            <a:ext cx="457200" cy="901598"/>
+          </a:xfrm>
+          <a:prstGeom prst="roundRect">
+            <a:avLst>
+              <a:gd name="adj" fmla="val 20000"/>
+            </a:avLst>
+          </a:prstGeom>
+          <a:solidFill>
+            <a:srgbClr val="4466FF">
+              <a:alpha val="75000"/>
+            </a:srgbClr>
+          </a:solidFill>
+          <a:ln>
+            <a:noFill/>
+          </a:ln>
+          <a:effectLst/>
+        </p:spPr>
+        <p:style>
+          <a:lnRef idx="1">
+            <a:schemeClr val="accent1"/>
+          </a:lnRef>
+          <a:fillRef idx="3">
+            <a:schemeClr val="accent1"/>
+          </a:fillRef>
+          <a:effectRef idx="2">
+            <a:schemeClr val="accent1"/>
+          </a:effectRef>
+          <a:fontRef idx="minor">
+            <a:schemeClr val="lt1"/>
+          </a:fontRef>
+        </p:style>
+        <p:txBody>
+          <a:bodyPr rtlCol="0" anchor="ctr"/>
+          <a:lstStyle/>
+          <a:p>
+            <a:pPr algn="ctr"/>
+          </a:p>
+        </p:txBody>
+      </p:sp>
+      <p:sp>
+        <p:nvSpPr>
+          <p:cNvPr id="33" name="TextBox 32"/>
+          <p:cNvSpPr txBox="1"/>
+          <p:nvPr/>
+        </p:nvSpPr>
+        <p:spPr>
+          <a:xfrm>
+            <a:off x="5614416" y="5705856"/>
+            <a:ext cx="640080" cy="274320"/>
+          </a:xfrm>
+          <a:prstGeom prst="rect">
+            <a:avLst/>
+          </a:prstGeom>
+          <a:noFill/>
+        </p:spPr>
+        <p:txBody>
+          <a:bodyPr wrap="square" anchor="t" lIns="0" rIns="0" tIns="0" bIns="0">
+            <a:spAutoFit/>
+          </a:bodyPr>
+          <a:lstStyle/>
+          <a:p>
+            <a:pPr algn="ctr"/>
+            <a:r>
+              <a:rPr sz="850" b="0" i="0">
+                <a:solidFill>
+                  <a:srgbClr val="B3C2E0"/>
+                </a:solidFill>
+                <a:latin typeface="JetBrains Mono"/>
+              </a:rPr>
+              <a:t>Sun</a:t>
+            </a:r>
+          </a:p>
+        </p:txBody>
+      </p:sp>
+      <p:sp>
+        <p:nvSpPr>
+          <p:cNvPr id="34" name="TextBox 33"/>
+          <p:cNvSpPr txBox="1"/>
+          <p:nvPr/>
+        </p:nvSpPr>
+        <p:spPr>
+          <a:xfrm>
+            <a:off x="7086600" y="3703320"/>
+            <a:ext cx="4114800" cy="365760"/>
+          </a:xfrm>
+          <a:prstGeom prst="rect">
+            <a:avLst/>
+          </a:prstGeom>
+          <a:noFill/>
+        </p:spPr>
+        <p:txBody>
+          <a:bodyPr wrap="square" anchor="t" lIns="0" rIns="0" tIns="0" bIns="0">
+            <a:spAutoFit/>
+          </a:bodyPr>
           <a:lstStyle/>
           <a:p>
             <a:pPr algn="l"/>
             <a:r>
+              <a:rPr sz="1300" b="1" i="0">
+                <a:solidFill>
+                  <a:srgbClr val="FFFFFF"/>
+                </a:solidFill>
+                <a:latin typeface="Sora"/>
+              </a:rPr>
+              <a:t>How messages were handled</a:t>
+            </a:r>
+          </a:p>
+        </p:txBody>
+      </p:sp>
+      <p:sp>
+        <p:nvSpPr>
+          <p:cNvPr id="35" name="TextBox 34"/>
+          <p:cNvSpPr txBox="1"/>
+          <p:nvPr/>
+        </p:nvSpPr>
+        <p:spPr>
+          <a:xfrm>
+            <a:off x="7086600" y="4224528"/>
+            <a:ext cx="2926080" cy="274320"/>
+          </a:xfrm>
+          <a:prstGeom prst="rect">
+            <a:avLst/>
+          </a:prstGeom>
+          <a:noFill/>
+        </p:spPr>
+        <p:txBody>
+          <a:bodyPr wrap="square" anchor="t" lIns="0" rIns="0" tIns="0" bIns="0">
+            <a:spAutoFit/>
+          </a:bodyPr>
+          <a:lstStyle/>
+          <a:p>
+            <a:pPr algn="l"/>
+            <a:r>
+              <a:rPr sz="1100" b="0" i="0">
+                <a:solidFill>
+                  <a:srgbClr val="FFFFFF"/>
+                </a:solidFill>
+                <a:latin typeface="Open Sans"/>
+              </a:rPr>
+              <a:t>Answered instantly</a:t>
+            </a:r>
+          </a:p>
+        </p:txBody>
+      </p:sp>
+      <p:sp>
+        <p:nvSpPr>
+          <p:cNvPr id="36" name="TextBox 35"/>
+          <p:cNvSpPr txBox="1"/>
+          <p:nvPr/>
+        </p:nvSpPr>
+        <p:spPr>
+          <a:xfrm>
+            <a:off x="9646920" y="4224528"/>
+            <a:ext cx="1554480" cy="274320"/>
+          </a:xfrm>
+          <a:prstGeom prst="rect">
+            <a:avLst/>
+          </a:prstGeom>
+          <a:noFill/>
+        </p:spPr>
+        <p:txBody>
+          <a:bodyPr wrap="square" anchor="t" lIns="0" rIns="0" tIns="0" bIns="0">
+            <a:spAutoFit/>
+          </a:bodyPr>
+          <a:lstStyle/>
+          <a:p>
+            <a:pPr algn="r"/>
+            <a:r>
               <a:rPr sz="1200" b="1" i="0">
                 <a:solidFill>
-                  <a:srgbClr val="22C55E"/>
+                  <a:srgbClr val="4466FF"/>
+                </a:solidFill>
+                <a:latin typeface="JetBrains Mono"/>
+              </a:rPr>
+              <a:t>82%</a:t>
+            </a:r>
+          </a:p>
+        </p:txBody>
+      </p:sp>
+      <p:sp>
+        <p:nvSpPr>
+          <p:cNvPr id="37" name="Rounded Rectangle 36"/>
+          <p:cNvSpPr/>
+          <p:nvPr/>
+        </p:nvSpPr>
+        <p:spPr>
+          <a:xfrm>
+            <a:off x="7086600" y="4535424"/>
+            <a:ext cx="3657600" cy="182880"/>
+          </a:xfrm>
+          <a:prstGeom prst="roundRect">
+            <a:avLst>
+              <a:gd name="adj" fmla="val 50000"/>
+            </a:avLst>
+          </a:prstGeom>
+          <a:solidFill>
+            <a:srgbClr val="020108">
+              <a:alpha val="45000"/>
+            </a:srgbClr>
+          </a:solidFill>
+          <a:ln>
+            <a:noFill/>
+          </a:ln>
+          <a:effectLst/>
+        </p:spPr>
+        <p:style>
+          <a:lnRef idx="1">
+            <a:schemeClr val="accent1"/>
+          </a:lnRef>
+          <a:fillRef idx="3">
+            <a:schemeClr val="accent1"/>
+          </a:fillRef>
+          <a:effectRef idx="2">
+            <a:schemeClr val="accent1"/>
+          </a:effectRef>
+          <a:fontRef idx="minor">
+            <a:schemeClr val="lt1"/>
+          </a:fontRef>
+        </p:style>
+        <p:txBody>
+          <a:bodyPr rtlCol="0" anchor="ctr"/>
+          <a:lstStyle/>
+          <a:p>
+            <a:pPr algn="ctr"/>
+          </a:p>
+        </p:txBody>
+      </p:sp>
+      <p:sp>
+        <p:nvSpPr>
+          <p:cNvPr id="38" name="Rounded Rectangle 37"/>
+          <p:cNvSpPr/>
+          <p:nvPr/>
+        </p:nvSpPr>
+        <p:spPr>
+          <a:xfrm>
+            <a:off x="7086600" y="4535424"/>
+            <a:ext cx="2999232" cy="182880"/>
+          </a:xfrm>
+          <a:prstGeom prst="roundRect">
+            <a:avLst>
+              <a:gd name="adj" fmla="val 50000"/>
+            </a:avLst>
+          </a:prstGeom>
+          <a:solidFill>
+            <a:srgbClr val="4466FF"/>
+          </a:solidFill>
+          <a:ln>
+            <a:noFill/>
+          </a:ln>
+          <a:effectLst/>
+        </p:spPr>
+        <p:style>
+          <a:lnRef idx="1">
+            <a:schemeClr val="accent1"/>
+          </a:lnRef>
+          <a:fillRef idx="3">
+            <a:schemeClr val="accent1"/>
+          </a:fillRef>
+          <a:effectRef idx="2">
+            <a:schemeClr val="accent1"/>
+          </a:effectRef>
+          <a:fontRef idx="minor">
+            <a:schemeClr val="lt1"/>
+          </a:fontRef>
+        </p:style>
+        <p:txBody>
+          <a:bodyPr rtlCol="0" anchor="ctr"/>
+          <a:lstStyle/>
+          <a:p>
+            <a:pPr algn="ctr"/>
+          </a:p>
+        </p:txBody>
+      </p:sp>
+      <p:sp>
+        <p:nvSpPr>
+          <p:cNvPr id="39" name="TextBox 38"/>
+          <p:cNvSpPr txBox="1"/>
+          <p:nvPr/>
+        </p:nvSpPr>
+        <p:spPr>
+          <a:xfrm>
+            <a:off x="7086600" y="5065776"/>
+            <a:ext cx="2926080" cy="274320"/>
+          </a:xfrm>
+          <a:prstGeom prst="rect">
+            <a:avLst/>
+          </a:prstGeom>
+          <a:noFill/>
+        </p:spPr>
+        <p:txBody>
+          <a:bodyPr wrap="square" anchor="t" lIns="0" rIns="0" tIns="0" bIns="0">
+            <a:spAutoFit/>
+          </a:bodyPr>
+          <a:lstStyle/>
+          <a:p>
+            <a:pPr algn="l"/>
+            <a:r>
+              <a:rPr sz="1100" b="0" i="0">
+                <a:solidFill>
+                  <a:srgbClr val="FFFFFF"/>
                 </a:solidFill>
                 <a:latin typeface="Open Sans"/>
               </a:rPr>
-              <a:t>✓  </a:t>
-            </a:r>
-            <a:r>
-              <a:rPr sz="1250" b="1" i="0">
-                <a:solidFill>
-                  <a:srgbClr val="FFFFFF"/>
+              <a:t>Passed to your team</a:t>
+            </a:r>
+          </a:p>
+        </p:txBody>
+      </p:sp>
+      <p:sp>
+        <p:nvSpPr>
+          <p:cNvPr id="40" name="TextBox 39"/>
+          <p:cNvSpPr txBox="1"/>
+          <p:nvPr/>
+        </p:nvSpPr>
+        <p:spPr>
+          <a:xfrm>
+            <a:off x="9646920" y="5065776"/>
+            <a:ext cx="1554480" cy="274320"/>
+          </a:xfrm>
+          <a:prstGeom prst="rect">
+            <a:avLst/>
+          </a:prstGeom>
+          <a:noFill/>
+        </p:spPr>
+        <p:txBody>
+          <a:bodyPr wrap="square" anchor="t" lIns="0" rIns="0" tIns="0" bIns="0">
+            <a:spAutoFit/>
+          </a:bodyPr>
+          <a:lstStyle/>
+          <a:p>
+            <a:pPr algn="r"/>
+            <a:r>
+              <a:rPr sz="1200" b="1" i="0">
+                <a:solidFill>
+                  <a:srgbClr val="7AA8FF"/>
+                </a:solidFill>
+                <a:latin typeface="JetBrains Mono"/>
+              </a:rPr>
+              <a:t>18%</a:t>
+            </a:r>
+          </a:p>
+        </p:txBody>
+      </p:sp>
+      <p:sp>
+        <p:nvSpPr>
+          <p:cNvPr id="41" name="Rounded Rectangle 40"/>
+          <p:cNvSpPr/>
+          <p:nvPr/>
+        </p:nvSpPr>
+        <p:spPr>
+          <a:xfrm>
+            <a:off x="7086600" y="5376672"/>
+            <a:ext cx="3657600" cy="182880"/>
+          </a:xfrm>
+          <a:prstGeom prst="roundRect">
+            <a:avLst>
+              <a:gd name="adj" fmla="val 50000"/>
+            </a:avLst>
+          </a:prstGeom>
+          <a:solidFill>
+            <a:srgbClr val="020108">
+              <a:alpha val="45000"/>
+            </a:srgbClr>
+          </a:solidFill>
+          <a:ln>
+            <a:noFill/>
+          </a:ln>
+          <a:effectLst/>
+        </p:spPr>
+        <p:style>
+          <a:lnRef idx="1">
+            <a:schemeClr val="accent1"/>
+          </a:lnRef>
+          <a:fillRef idx="3">
+            <a:schemeClr val="accent1"/>
+          </a:fillRef>
+          <a:effectRef idx="2">
+            <a:schemeClr val="accent1"/>
+          </a:effectRef>
+          <a:fontRef idx="minor">
+            <a:schemeClr val="lt1"/>
+          </a:fontRef>
+        </p:style>
+        <p:txBody>
+          <a:bodyPr rtlCol="0" anchor="ctr"/>
+          <a:lstStyle/>
+          <a:p>
+            <a:pPr algn="ctr"/>
+          </a:p>
+        </p:txBody>
+      </p:sp>
+      <p:sp>
+        <p:nvSpPr>
+          <p:cNvPr id="42" name="Rounded Rectangle 41"/>
+          <p:cNvSpPr/>
+          <p:nvPr/>
+        </p:nvSpPr>
+        <p:spPr>
+          <a:xfrm>
+            <a:off x="7086600" y="5376672"/>
+            <a:ext cx="658368" cy="182880"/>
+          </a:xfrm>
+          <a:prstGeom prst="roundRect">
+            <a:avLst>
+              <a:gd name="adj" fmla="val 50000"/>
+            </a:avLst>
+          </a:prstGeom>
+          <a:solidFill>
+            <a:srgbClr val="7AA8FF"/>
+          </a:solidFill>
+          <a:ln>
+            <a:noFill/>
+          </a:ln>
+          <a:effectLst/>
+        </p:spPr>
+        <p:style>
+          <a:lnRef idx="1">
+            <a:schemeClr val="accent1"/>
+          </a:lnRef>
+          <a:fillRef idx="3">
+            <a:schemeClr val="accent1"/>
+          </a:fillRef>
+          <a:effectRef idx="2">
+            <a:schemeClr val="accent1"/>
+          </a:effectRef>
+          <a:fontRef idx="minor">
+            <a:schemeClr val="lt1"/>
+          </a:fontRef>
+        </p:style>
+        <p:txBody>
+          <a:bodyPr rtlCol="0" anchor="ctr"/>
+          <a:lstStyle/>
+          <a:p>
+            <a:pPr algn="ctr"/>
+          </a:p>
+        </p:txBody>
+      </p:sp>
+      <p:sp>
+        <p:nvSpPr>
+          <p:cNvPr id="43" name="TextBox 42"/>
+          <p:cNvSpPr txBox="1"/>
+          <p:nvPr/>
+        </p:nvSpPr>
+        <p:spPr>
+          <a:xfrm>
+            <a:off x="7086600" y="5650992"/>
+            <a:ext cx="4206240" cy="365760"/>
+          </a:xfrm>
+          <a:prstGeom prst="rect">
+            <a:avLst/>
+          </a:prstGeom>
+          <a:noFill/>
+        </p:spPr>
+        <p:txBody>
+          <a:bodyPr wrap="square" anchor="t" lIns="0" rIns="0" tIns="0" bIns="0">
+            <a:spAutoFit/>
+          </a:bodyPr>
+          <a:lstStyle/>
+          <a:p>
+            <a:pPr algn="l"/>
+            <a:r>
+              <a:rPr sz="1100" b="0" i="0">
+                <a:solidFill>
+                  <a:srgbClr val="B3C2E0"/>
                 </a:solidFill>
                 <a:latin typeface="Open Sans"/>
               </a:rPr>
-              <a:t>Hands off to your team smoothly</a:t>
-            </a:r>
-          </a:p>
-        </p:txBody>
-      </p:sp>
-      <p:sp>
-        <p:nvSpPr>
-          <p:cNvPr id="17" name="Rounded Rectangle 16">
+              <a:t>Most asked:  </a:t>
+            </a:r>
+            <a:r>
+              <a:rPr sz="1100" b="1" i="0">
+                <a:solidFill>
+                  <a:srgbClr val="7AA8FF"/>
+                </a:solidFill>
+                <a:latin typeface="Open Sans"/>
+              </a:rPr>
+              <a:t>“Where’s my order?”</a:t>
+            </a:r>
+          </a:p>
+        </p:txBody>
+      </p:sp>
+      <p:sp>
+        <p:nvSpPr>
+          <p:cNvPr id="44" name="Rounded Rectangle 43">
             <a:hlinkClick r:id="rId3" action="ppaction://hlinksldjump"/>
           </p:cNvPr>
           <p:cNvSpPr/>
@@ -14672,7 +17470,7 @@
       </p:sp>
       <p:sp>
         <p:nvSpPr>
-          <p:cNvPr id="18" name="TextBox 17"/>
+          <p:cNvPr id="45" name="TextBox 44"/>
           <p:cNvSpPr txBox="1"/>
           <p:nvPr/>
         </p:nvSpPr>
@@ -14700,7 +17498,7 @@
                 </a:solidFill>
                 <a:latin typeface="JetBrains Mono"/>
               </a:rPr>
-              <a:t>08 / 13</a:t>
+              <a:t>08 / 14</a:t>
             </a:r>
           </a:p>
         </p:txBody>
@@ -14711,7 +17509,7 @@
     <a:masterClrMapping/>
   </p:clrMapOvr>
   <p:transition spd="med">
-    <p:wipe dir="u"/>
+    <p:cover dir="l"/>
   </p:transition>
 </p:sld>
 </file>
@@ -14728,7 +17526,7 @@
       <p:grpSpPr/>
       <p:pic>
         <p:nvPicPr>
-          <p:cNvPr id="2" name="Picture 1" descr="bg_cover.png"/>
+          <p:cNvPr id="2" name="Picture 1" descr="bg_light.png"/>
           <p:cNvPicPr>
             <a:picLocks noChangeAspect="1"/>
           </p:cNvPicPr>
@@ -14758,7 +17556,7 @@
         </p:nvSpPr>
         <p:spPr>
           <a:xfrm>
-            <a:off x="777240" y="868680"/>
+            <a:off x="777240" y="640080"/>
             <a:ext cx="7315200" cy="365760"/>
           </a:xfrm>
           <a:prstGeom prst="rect">
@@ -14776,11 +17574,11 @@
             <a:r>
               <a:rPr sz="1250" b="1" i="0" spc="260">
                 <a:solidFill>
-                  <a:srgbClr val="B3CCFF"/>
+                  <a:srgbClr val="4466FF"/>
                 </a:solidFill>
                 <a:latin typeface="JetBrains Mono"/>
               </a:rPr>
-              <a:t>07 · PROVEN PERFORMANCE</a:t>
+              <a:t>06 · INSIGHTS</a:t>
             </a:r>
           </a:p>
         </p:txBody>
@@ -14793,8 +17591,8 @@
         </p:nvSpPr>
         <p:spPr>
           <a:xfrm>
-            <a:off x="731520" y="1234440"/>
-            <a:ext cx="10515600" cy="914400"/>
+            <a:off x="731520" y="960120"/>
+            <a:ext cx="10515600" cy="731520"/>
           </a:xfrm>
           <a:prstGeom prst="rect">
             <a:avLst/>
@@ -14811,34 +17609,60 @@
             <a:r>
               <a:rPr sz="3400" b="1" i="0">
                 <a:solidFill>
-                  <a:srgbClr val="FFFFFF"/>
+                  <a:srgbClr val="0A0A2E"/>
                 </a:solidFill>
                 <a:latin typeface="Sora"/>
               </a:rPr>
-              <a:t>Numbers that turn conversations into </a:t>
-            </a:r>
-            <a:r>
-              <a:rPr sz="3400" b="1" i="0">
-                <a:solidFill>
-                  <a:srgbClr val="7AA8FF"/>
-                </a:solidFill>
-                <a:latin typeface="Sora"/>
-              </a:rPr>
-              <a:t>revenue</a:t>
-            </a:r>
-          </a:p>
-        </p:txBody>
-      </p:sp>
-      <p:sp>
-        <p:nvSpPr>
-          <p:cNvPr id="5" name="Rounded Rectangle 4"/>
+              <a:t>Turn insight into action</a:t>
+            </a:r>
+          </a:p>
+        </p:txBody>
+      </p:sp>
+      <p:sp>
+        <p:nvSpPr>
+          <p:cNvPr id="5" name="TextBox 4"/>
+          <p:cNvSpPr txBox="1"/>
+          <p:nvPr/>
+        </p:nvSpPr>
+        <p:spPr>
+          <a:xfrm>
+            <a:off x="731520" y="1627632"/>
+            <a:ext cx="10515600" cy="457200"/>
+          </a:xfrm>
+          <a:prstGeom prst="rect">
+            <a:avLst/>
+          </a:prstGeom>
+          <a:noFill/>
+        </p:spPr>
+        <p:txBody>
+          <a:bodyPr wrap="square" anchor="t" lIns="0" rIns="0" tIns="0" bIns="0">
+            <a:spAutoFit/>
+          </a:bodyPr>
+          <a:lstStyle/>
+          <a:p>
+            <a:pPr algn="l"/>
+            <a:r>
+              <a:rPr sz="1350" b="0" i="0">
+                <a:solidFill>
+                  <a:srgbClr val="556080"/>
+                </a:solidFill>
+                <a:latin typeface="Open Sans"/>
+              </a:rPr>
+              <a:t>Spot patterns, staff smarter, and see exactly what turns chats into sales.</a:t>
+            </a:r>
+          </a:p>
+        </p:txBody>
+      </p:sp>
+      <p:sp>
+        <p:nvSpPr>
+          <p:cNvPr id="6" name="Rounded Rectangle 5"/>
           <p:cNvSpPr/>
           <p:nvPr/>
         </p:nvSpPr>
         <p:spPr>
           <a:xfrm>
-            <a:off x="731520" y="2743200"/>
-            <a:ext cx="2606040" cy="2743200"/>
+            <a:off x="731520" y="2286000"/>
+            <a:ext cx="3520440" cy="3657600"/>
           </a:xfrm>
           <a:prstGeom prst="roundRect">
             <a:avLst>
@@ -14846,14 +17670,12 @@
             </a:avLst>
           </a:prstGeom>
           <a:solidFill>
-            <a:srgbClr val="080330">
-              <a:alpha val="70000"/>
-            </a:srgbClr>
+            <a:srgbClr val="FFFFFF"/>
           </a:solidFill>
           <a:ln w="12700">
             <a:solidFill>
               <a:srgbClr val="4466FF">
-                <a:alpha val="55000"/>
+                <a:alpha val="20000"/>
               </a:srgbClr>
             </a:solidFill>
           </a:ln>
@@ -14890,110 +17712,14 @@
       </p:sp>
       <p:sp>
         <p:nvSpPr>
-          <p:cNvPr id="6" name="TextBox 5"/>
-          <p:cNvSpPr txBox="1"/>
-          <p:nvPr/>
-        </p:nvSpPr>
-        <p:spPr>
-          <a:xfrm>
-            <a:off x="731520" y="3154680"/>
-            <a:ext cx="2606040" cy="1097280"/>
-          </a:xfrm>
-          <a:prstGeom prst="rect">
-            <a:avLst/>
-          </a:prstGeom>
-          <a:noFill/>
-        </p:spPr>
-        <p:txBody>
-          <a:bodyPr wrap="square" anchor="t" lIns="0" rIns="0" tIns="0" bIns="0">
-            <a:spAutoFit/>
-          </a:bodyPr>
-          <a:lstStyle/>
-          <a:p>
-            <a:pPr algn="ctr"/>
-            <a:r>
-              <a:rPr sz="5800" b="1" i="0">
-                <a:solidFill>
-                  <a:srgbClr val="7AA8FF"/>
-                </a:solidFill>
-                <a:latin typeface="Sora"/>
-              </a:rPr>
-              <a:t>Seconds</a:t>
-            </a:r>
-          </a:p>
-        </p:txBody>
-      </p:sp>
-      <p:sp>
-        <p:nvSpPr>
-          <p:cNvPr id="7" name="TextBox 6"/>
-          <p:cNvSpPr txBox="1"/>
-          <p:nvPr/>
-        </p:nvSpPr>
-        <p:spPr>
-          <a:xfrm>
-            <a:off x="960120" y="4343400"/>
-            <a:ext cx="2148840" cy="1005840"/>
-          </a:xfrm>
-          <a:prstGeom prst="rect">
-            <a:avLst/>
-          </a:prstGeom>
-          <a:noFill/>
-        </p:spPr>
-        <p:txBody>
-          <a:bodyPr wrap="square" anchor="t" lIns="0" rIns="0" tIns="0" bIns="0">
-            <a:spAutoFit/>
-          </a:bodyPr>
-          <a:lstStyle/>
-          <a:p>
-            <a:pPr algn="ctr">
-              <a:lnSpc>
-                <a:spcPct val="105000"/>
-              </a:lnSpc>
-              <a:spcAft>
-                <a:spcPts val="400"/>
-              </a:spcAft>
-            </a:pPr>
-            <a:r>
-              <a:rPr sz="1800" b="1" i="0">
-                <a:solidFill>
-                  <a:srgbClr val="FFFFFF"/>
-                </a:solidFill>
-                <a:latin typeface="Sora"/>
-              </a:rPr>
-              <a:t>Reply time</a:t>
-            </a:r>
-          </a:p>
-          <a:p>
-            <a:pPr algn="ctr">
-              <a:lnSpc>
-                <a:spcPct val="105000"/>
-              </a:lnSpc>
-              <a:spcAft>
-                <a:spcPts val="400"/>
-              </a:spcAft>
-            </a:pPr>
-            <a:r>
-              <a:rPr sz="1150" b="0" i="0">
-                <a:solidFill>
-                  <a:srgbClr val="B3C2E0"/>
-                </a:solidFill>
-                <a:latin typeface="Open Sans"/>
-              </a:rPr>
-              <a:t>Customers get an answer almost the moment they ask.</a:t>
-            </a:r>
-          </a:p>
-        </p:txBody>
-      </p:sp>
-      <p:sp>
-        <p:nvSpPr>
-          <p:cNvPr id="8" name="Rounded Rectangle 7"/>
+          <p:cNvPr id="7" name="Rounded Rectangle 6"/>
           <p:cNvSpPr/>
           <p:nvPr/>
         </p:nvSpPr>
         <p:spPr>
           <a:xfrm>
-            <a:off x="3611880" y="2743200"/>
-            <a:ext cx="2606040" cy="2743200"/>
+            <a:off x="4562856" y="2286000"/>
+            <a:ext cx="3520440" cy="3657600"/>
           </a:xfrm>
           <a:prstGeom prst="roundRect">
             <a:avLst>
@@ -15001,14 +17727,12 @@
             </a:avLst>
           </a:prstGeom>
           <a:solidFill>
-            <a:srgbClr val="080330">
-              <a:alpha val="70000"/>
-            </a:srgbClr>
+            <a:srgbClr val="FFFFFF"/>
           </a:solidFill>
           <a:ln w="12700">
             <a:solidFill>
               <a:srgbClr val="4466FF">
-                <a:alpha val="55000"/>
+                <a:alpha val="20000"/>
               </a:srgbClr>
             </a:solidFill>
           </a:ln>
@@ -15045,110 +17769,14 @@
       </p:sp>
       <p:sp>
         <p:nvSpPr>
-          <p:cNvPr id="9" name="TextBox 8"/>
-          <p:cNvSpPr txBox="1"/>
-          <p:nvPr/>
-        </p:nvSpPr>
-        <p:spPr>
-          <a:xfrm>
-            <a:off x="3611880" y="3154680"/>
-            <a:ext cx="2606040" cy="1097280"/>
-          </a:xfrm>
-          <a:prstGeom prst="rect">
-            <a:avLst/>
-          </a:prstGeom>
-          <a:noFill/>
-        </p:spPr>
-        <p:txBody>
-          <a:bodyPr wrap="square" anchor="t" lIns="0" rIns="0" tIns="0" bIns="0">
-            <a:spAutoFit/>
-          </a:bodyPr>
-          <a:lstStyle/>
-          <a:p>
-            <a:pPr algn="ctr"/>
-            <a:r>
-              <a:rPr sz="5800" b="1" i="0">
-                <a:solidFill>
-                  <a:srgbClr val="7AA8FF"/>
-                </a:solidFill>
-                <a:latin typeface="Sora"/>
-              </a:rPr>
-              <a:t>3</a:t>
-            </a:r>
-          </a:p>
-        </p:txBody>
-      </p:sp>
-      <p:sp>
-        <p:nvSpPr>
-          <p:cNvPr id="10" name="TextBox 9"/>
-          <p:cNvSpPr txBox="1"/>
-          <p:nvPr/>
-        </p:nvSpPr>
-        <p:spPr>
-          <a:xfrm>
-            <a:off x="3840480" y="4343400"/>
-            <a:ext cx="2148840" cy="1005840"/>
-          </a:xfrm>
-          <a:prstGeom prst="rect">
-            <a:avLst/>
-          </a:prstGeom>
-          <a:noFill/>
-        </p:spPr>
-        <p:txBody>
-          <a:bodyPr wrap="square" anchor="t" lIns="0" rIns="0" tIns="0" bIns="0">
-            <a:spAutoFit/>
-          </a:bodyPr>
-          <a:lstStyle/>
-          <a:p>
-            <a:pPr algn="ctr">
-              <a:lnSpc>
-                <a:spcPct val="105000"/>
-              </a:lnSpc>
-              <a:spcAft>
-                <a:spcPts val="400"/>
-              </a:spcAft>
-            </a:pPr>
-            <a:r>
-              <a:rPr sz="1800" b="1" i="0">
-                <a:solidFill>
-                  <a:srgbClr val="FFFFFF"/>
-                </a:solidFill>
-                <a:latin typeface="Sora"/>
-              </a:rPr>
-              <a:t>Languages</a:t>
-            </a:r>
-          </a:p>
-          <a:p>
-            <a:pPr algn="ctr">
-              <a:lnSpc>
-                <a:spcPct val="105000"/>
-              </a:lnSpc>
-              <a:spcAft>
-                <a:spcPts val="400"/>
-              </a:spcAft>
-            </a:pPr>
-            <a:r>
-              <a:rPr sz="1150" b="0" i="0">
-                <a:solidFill>
-                  <a:srgbClr val="B3C2E0"/>
-                </a:solidFill>
-                <a:latin typeface="Open Sans"/>
-              </a:rPr>
-              <a:t>Arabic, English and Franco-Arabic, understood automatically.</a:t>
-            </a:r>
-          </a:p>
-        </p:txBody>
-      </p:sp>
-      <p:sp>
-        <p:nvSpPr>
-          <p:cNvPr id="11" name="Rounded Rectangle 10"/>
+          <p:cNvPr id="8" name="Rounded Rectangle 7"/>
           <p:cNvSpPr/>
           <p:nvPr/>
         </p:nvSpPr>
         <p:spPr>
           <a:xfrm>
-            <a:off x="6492240" y="2743200"/>
-            <a:ext cx="2606040" cy="2743200"/>
+            <a:off x="8394192" y="2286000"/>
+            <a:ext cx="3520440" cy="3657600"/>
           </a:xfrm>
           <a:prstGeom prst="roundRect">
             <a:avLst>
@@ -15156,14 +17784,12 @@
             </a:avLst>
           </a:prstGeom>
           <a:solidFill>
-            <a:srgbClr val="080330">
-              <a:alpha val="70000"/>
-            </a:srgbClr>
+            <a:srgbClr val="FFFFFF"/>
           </a:solidFill>
           <a:ln w="12700">
             <a:solidFill>
               <a:srgbClr val="4466FF">
-                <a:alpha val="55000"/>
+                <a:alpha val="20000"/>
               </a:srgbClr>
             </a:solidFill>
           </a:ln>
@@ -15200,14 +17826,14 @@
       </p:sp>
       <p:sp>
         <p:nvSpPr>
-          <p:cNvPr id="12" name="TextBox 11"/>
+          <p:cNvPr id="9" name="TextBox 8"/>
           <p:cNvSpPr txBox="1"/>
           <p:nvPr/>
         </p:nvSpPr>
         <p:spPr>
           <a:xfrm>
-            <a:off x="6492240" y="3154680"/>
-            <a:ext cx="2606040" cy="1097280"/>
+            <a:off x="1024128" y="2542032"/>
+            <a:ext cx="3017520" cy="457200"/>
           </a:xfrm>
           <a:prstGeom prst="rect">
             <a:avLst/>
@@ -15220,116 +17846,44 @@
           </a:bodyPr>
           <a:lstStyle/>
           <a:p>
-            <a:pPr algn="ctr"/>
-            <a:r>
-              <a:rPr sz="5800" b="1" i="0">
-                <a:solidFill>
-                  <a:srgbClr val="7AA8FF"/>
+            <a:pPr algn="l"/>
+            <a:r>
+              <a:rPr sz="1600" b="1" i="0">
+                <a:solidFill>
+                  <a:srgbClr val="0A0A2E"/>
                 </a:solidFill>
                 <a:latin typeface="Sora"/>
               </a:rPr>
-              <a:t>24/7</a:t>
-            </a:r>
-          </a:p>
-        </p:txBody>
-      </p:sp>
-      <p:sp>
-        <p:nvSpPr>
-          <p:cNvPr id="13" name="TextBox 12"/>
-          <p:cNvSpPr txBox="1"/>
-          <p:nvPr/>
-        </p:nvSpPr>
-        <p:spPr>
-          <a:xfrm>
-            <a:off x="6720840" y="4343400"/>
-            <a:ext cx="2148840" cy="1005840"/>
-          </a:xfrm>
-          <a:prstGeom prst="rect">
-            <a:avLst/>
-          </a:prstGeom>
-          <a:noFill/>
-        </p:spPr>
-        <p:txBody>
-          <a:bodyPr wrap="square" anchor="t" lIns="0" rIns="0" tIns="0" bIns="0">
-            <a:spAutoFit/>
-          </a:bodyPr>
-          <a:lstStyle/>
-          <a:p>
-            <a:pPr algn="ctr">
-              <a:lnSpc>
-                <a:spcPct val="105000"/>
-              </a:lnSpc>
-              <a:spcAft>
-                <a:spcPts val="400"/>
-              </a:spcAft>
-            </a:pPr>
-            <a:r>
-              <a:rPr sz="1800" b="1" i="0">
-                <a:solidFill>
-                  <a:srgbClr val="FFFFFF"/>
-                </a:solidFill>
-                <a:latin typeface="Sora"/>
-              </a:rPr>
-              <a:t>Always on</a:t>
-            </a:r>
-          </a:p>
-          <a:p>
-            <a:pPr algn="ctr">
-              <a:lnSpc>
-                <a:spcPct val="105000"/>
-              </a:lnSpc>
-              <a:spcAft>
-                <a:spcPts val="400"/>
-              </a:spcAft>
-            </a:pPr>
-            <a:r>
-              <a:rPr sz="1150" b="0" i="0">
-                <a:solidFill>
-                  <a:srgbClr val="B3C2E0"/>
-                </a:solidFill>
-                <a:latin typeface="Open Sans"/>
-              </a:rPr>
-              <a:t>Never sleeps — your customers always hear back.</a:t>
-            </a:r>
-          </a:p>
-        </p:txBody>
-      </p:sp>
-      <p:sp>
-        <p:nvSpPr>
-          <p:cNvPr id="14" name="Rounded Rectangle 13"/>
+              <a:t>Your busiest hours</a:t>
+            </a:r>
+          </a:p>
+        </p:txBody>
+      </p:sp>
+      <p:sp>
+        <p:nvSpPr>
+          <p:cNvPr id="10" name="Rounded Rectangle 9"/>
           <p:cNvSpPr/>
           <p:nvPr/>
         </p:nvSpPr>
         <p:spPr>
           <a:xfrm>
-            <a:off x="9372600" y="2743200"/>
-            <a:ext cx="2606040" cy="2743200"/>
+            <a:off x="1042416" y="3200400"/>
+            <a:ext cx="384048" cy="384048"/>
           </a:xfrm>
           <a:prstGeom prst="roundRect">
             <a:avLst>
-              <a:gd name="adj" fmla="val 8000"/>
+              <a:gd name="adj" fmla="val 22000"/>
             </a:avLst>
           </a:prstGeom>
           <a:solidFill>
-            <a:srgbClr val="080330">
-              <a:alpha val="70000"/>
+            <a:srgbClr val="4466FF">
+              <a:alpha val="20000"/>
             </a:srgbClr>
           </a:solidFill>
-          <a:ln w="12700">
-            <a:solidFill>
-              <a:srgbClr val="4466FF">
-                <a:alpha val="55000"/>
-              </a:srgbClr>
-            </a:solidFill>
+          <a:ln>
+            <a:noFill/>
           </a:ln>
           <a:effectLst/>
-          <a:effectLst>
-            <a:outerShdw blurRad="180000" dist="90000" dir="5400000" rotWithShape="0">
-              <a:srgbClr val="1A1A6E">
-                <a:alpha val="34000"/>
-              </a:srgbClr>
-            </a:outerShdw>
-          </a:effectLst>
         </p:spPr>
         <p:style>
           <a:lnRef idx="1">
@@ -15355,14 +17909,1118 @@
       </p:sp>
       <p:sp>
         <p:nvSpPr>
-          <p:cNvPr id="15" name="TextBox 14"/>
+          <p:cNvPr id="11" name="Rounded Rectangle 10"/>
+          <p:cNvSpPr/>
+          <p:nvPr/>
+        </p:nvSpPr>
+        <p:spPr>
+          <a:xfrm>
+            <a:off x="1517904" y="3200400"/>
+            <a:ext cx="384048" cy="384048"/>
+          </a:xfrm>
+          <a:prstGeom prst="roundRect">
+            <a:avLst>
+              <a:gd name="adj" fmla="val 22000"/>
+            </a:avLst>
+          </a:prstGeom>
+          <a:solidFill>
+            <a:srgbClr val="4466FF">
+              <a:alpha val="30000"/>
+            </a:srgbClr>
+          </a:solidFill>
+          <a:ln>
+            <a:noFill/>
+          </a:ln>
+          <a:effectLst/>
+        </p:spPr>
+        <p:style>
+          <a:lnRef idx="1">
+            <a:schemeClr val="accent1"/>
+          </a:lnRef>
+          <a:fillRef idx="3">
+            <a:schemeClr val="accent1"/>
+          </a:fillRef>
+          <a:effectRef idx="2">
+            <a:schemeClr val="accent1"/>
+          </a:effectRef>
+          <a:fontRef idx="minor">
+            <a:schemeClr val="lt1"/>
+          </a:fontRef>
+        </p:style>
+        <p:txBody>
+          <a:bodyPr rtlCol="0" anchor="ctr"/>
+          <a:lstStyle/>
+          <a:p>
+            <a:pPr algn="ctr"/>
+          </a:p>
+        </p:txBody>
+      </p:sp>
+      <p:sp>
+        <p:nvSpPr>
+          <p:cNvPr id="12" name="Rounded Rectangle 11"/>
+          <p:cNvSpPr/>
+          <p:nvPr/>
+        </p:nvSpPr>
+        <p:spPr>
+          <a:xfrm>
+            <a:off x="1993392" y="3200400"/>
+            <a:ext cx="384048" cy="384048"/>
+          </a:xfrm>
+          <a:prstGeom prst="roundRect">
+            <a:avLst>
+              <a:gd name="adj" fmla="val 22000"/>
+            </a:avLst>
+          </a:prstGeom>
+          <a:solidFill>
+            <a:srgbClr val="4466FF">
+              <a:alpha val="25000"/>
+            </a:srgbClr>
+          </a:solidFill>
+          <a:ln>
+            <a:noFill/>
+          </a:ln>
+          <a:effectLst/>
+        </p:spPr>
+        <p:style>
+          <a:lnRef idx="1">
+            <a:schemeClr val="accent1"/>
+          </a:lnRef>
+          <a:fillRef idx="3">
+            <a:schemeClr val="accent1"/>
+          </a:fillRef>
+          <a:effectRef idx="2">
+            <a:schemeClr val="accent1"/>
+          </a:effectRef>
+          <a:fontRef idx="minor">
+            <a:schemeClr val="lt1"/>
+          </a:fontRef>
+        </p:style>
+        <p:txBody>
+          <a:bodyPr rtlCol="0" anchor="ctr"/>
+          <a:lstStyle/>
+          <a:p>
+            <a:pPr algn="ctr"/>
+          </a:p>
+        </p:txBody>
+      </p:sp>
+      <p:sp>
+        <p:nvSpPr>
+          <p:cNvPr id="13" name="Rounded Rectangle 12"/>
+          <p:cNvSpPr/>
+          <p:nvPr/>
+        </p:nvSpPr>
+        <p:spPr>
+          <a:xfrm>
+            <a:off x="2468880" y="3200400"/>
+            <a:ext cx="384048" cy="384048"/>
+          </a:xfrm>
+          <a:prstGeom prst="roundRect">
+            <a:avLst>
+              <a:gd name="adj" fmla="val 22000"/>
+            </a:avLst>
+          </a:prstGeom>
+          <a:solidFill>
+            <a:srgbClr val="4466FF">
+              <a:alpha val="40000"/>
+            </a:srgbClr>
+          </a:solidFill>
+          <a:ln>
+            <a:noFill/>
+          </a:ln>
+          <a:effectLst/>
+        </p:spPr>
+        <p:style>
+          <a:lnRef idx="1">
+            <a:schemeClr val="accent1"/>
+          </a:lnRef>
+          <a:fillRef idx="3">
+            <a:schemeClr val="accent1"/>
+          </a:fillRef>
+          <a:effectRef idx="2">
+            <a:schemeClr val="accent1"/>
+          </a:effectRef>
+          <a:fontRef idx="minor">
+            <a:schemeClr val="lt1"/>
+          </a:fontRef>
+        </p:style>
+        <p:txBody>
+          <a:bodyPr rtlCol="0" anchor="ctr"/>
+          <a:lstStyle/>
+          <a:p>
+            <a:pPr algn="ctr"/>
+          </a:p>
+        </p:txBody>
+      </p:sp>
+      <p:sp>
+        <p:nvSpPr>
+          <p:cNvPr id="14" name="Rounded Rectangle 13"/>
+          <p:cNvSpPr/>
+          <p:nvPr/>
+        </p:nvSpPr>
+        <p:spPr>
+          <a:xfrm>
+            <a:off x="2944368" y="3200400"/>
+            <a:ext cx="384048" cy="384048"/>
+          </a:xfrm>
+          <a:prstGeom prst="roundRect">
+            <a:avLst>
+              <a:gd name="adj" fmla="val 22000"/>
+            </a:avLst>
+          </a:prstGeom>
+          <a:solidFill>
+            <a:srgbClr val="4466FF">
+              <a:alpha val="55000"/>
+            </a:srgbClr>
+          </a:solidFill>
+          <a:ln>
+            <a:noFill/>
+          </a:ln>
+          <a:effectLst/>
+        </p:spPr>
+        <p:style>
+          <a:lnRef idx="1">
+            <a:schemeClr val="accent1"/>
+          </a:lnRef>
+          <a:fillRef idx="3">
+            <a:schemeClr val="accent1"/>
+          </a:fillRef>
+          <a:effectRef idx="2">
+            <a:schemeClr val="accent1"/>
+          </a:effectRef>
+          <a:fontRef idx="minor">
+            <a:schemeClr val="lt1"/>
+          </a:fontRef>
+        </p:style>
+        <p:txBody>
+          <a:bodyPr rtlCol="0" anchor="ctr"/>
+          <a:lstStyle/>
+          <a:p>
+            <a:pPr algn="ctr"/>
+          </a:p>
+        </p:txBody>
+      </p:sp>
+      <p:sp>
+        <p:nvSpPr>
+          <p:cNvPr id="15" name="Rounded Rectangle 14"/>
+          <p:cNvSpPr/>
+          <p:nvPr/>
+        </p:nvSpPr>
+        <p:spPr>
+          <a:xfrm>
+            <a:off x="3419856" y="3200400"/>
+            <a:ext cx="384048" cy="384048"/>
+          </a:xfrm>
+          <a:prstGeom prst="roundRect">
+            <a:avLst>
+              <a:gd name="adj" fmla="val 22000"/>
+            </a:avLst>
+          </a:prstGeom>
+          <a:solidFill>
+            <a:srgbClr val="4466FF">
+              <a:alpha val="45000"/>
+            </a:srgbClr>
+          </a:solidFill>
+          <a:ln>
+            <a:noFill/>
+          </a:ln>
+          <a:effectLst/>
+        </p:spPr>
+        <p:style>
+          <a:lnRef idx="1">
+            <a:schemeClr val="accent1"/>
+          </a:lnRef>
+          <a:fillRef idx="3">
+            <a:schemeClr val="accent1"/>
+          </a:fillRef>
+          <a:effectRef idx="2">
+            <a:schemeClr val="accent1"/>
+          </a:effectRef>
+          <a:fontRef idx="minor">
+            <a:schemeClr val="lt1"/>
+          </a:fontRef>
+        </p:style>
+        <p:txBody>
+          <a:bodyPr rtlCol="0" anchor="ctr"/>
+          <a:lstStyle/>
+          <a:p>
+            <a:pPr algn="ctr"/>
+          </a:p>
+        </p:txBody>
+      </p:sp>
+      <p:sp>
+        <p:nvSpPr>
+          <p:cNvPr id="16" name="Rounded Rectangle 15"/>
+          <p:cNvSpPr/>
+          <p:nvPr/>
+        </p:nvSpPr>
+        <p:spPr>
+          <a:xfrm>
+            <a:off x="1042416" y="3675888"/>
+            <a:ext cx="384048" cy="384048"/>
+          </a:xfrm>
+          <a:prstGeom prst="roundRect">
+            <a:avLst>
+              <a:gd name="adj" fmla="val 22000"/>
+            </a:avLst>
+          </a:prstGeom>
+          <a:solidFill>
+            <a:srgbClr val="4466FF">
+              <a:alpha val="30000"/>
+            </a:srgbClr>
+          </a:solidFill>
+          <a:ln>
+            <a:noFill/>
+          </a:ln>
+          <a:effectLst/>
+        </p:spPr>
+        <p:style>
+          <a:lnRef idx="1">
+            <a:schemeClr val="accent1"/>
+          </a:lnRef>
+          <a:fillRef idx="3">
+            <a:schemeClr val="accent1"/>
+          </a:fillRef>
+          <a:effectRef idx="2">
+            <a:schemeClr val="accent1"/>
+          </a:effectRef>
+          <a:fontRef idx="minor">
+            <a:schemeClr val="lt1"/>
+          </a:fontRef>
+        </p:style>
+        <p:txBody>
+          <a:bodyPr rtlCol="0" anchor="ctr"/>
+          <a:lstStyle/>
+          <a:p>
+            <a:pPr algn="ctr"/>
+          </a:p>
+        </p:txBody>
+      </p:sp>
+      <p:sp>
+        <p:nvSpPr>
+          <p:cNvPr id="17" name="Rounded Rectangle 16"/>
+          <p:cNvSpPr/>
+          <p:nvPr/>
+        </p:nvSpPr>
+        <p:spPr>
+          <a:xfrm>
+            <a:off x="1517904" y="3675888"/>
+            <a:ext cx="384048" cy="384048"/>
+          </a:xfrm>
+          <a:prstGeom prst="roundRect">
+            <a:avLst>
+              <a:gd name="adj" fmla="val 22000"/>
+            </a:avLst>
+          </a:prstGeom>
+          <a:solidFill>
+            <a:srgbClr val="4466FF">
+              <a:alpha val="45000"/>
+            </a:srgbClr>
+          </a:solidFill>
+          <a:ln>
+            <a:noFill/>
+          </a:ln>
+          <a:effectLst/>
+        </p:spPr>
+        <p:style>
+          <a:lnRef idx="1">
+            <a:schemeClr val="accent1"/>
+          </a:lnRef>
+          <a:fillRef idx="3">
+            <a:schemeClr val="accent1"/>
+          </a:fillRef>
+          <a:effectRef idx="2">
+            <a:schemeClr val="accent1"/>
+          </a:effectRef>
+          <a:fontRef idx="minor">
+            <a:schemeClr val="lt1"/>
+          </a:fontRef>
+        </p:style>
+        <p:txBody>
+          <a:bodyPr rtlCol="0" anchor="ctr"/>
+          <a:lstStyle/>
+          <a:p>
+            <a:pPr algn="ctr"/>
+          </a:p>
+        </p:txBody>
+      </p:sp>
+      <p:sp>
+        <p:nvSpPr>
+          <p:cNvPr id="18" name="Rounded Rectangle 17"/>
+          <p:cNvSpPr/>
+          <p:nvPr/>
+        </p:nvSpPr>
+        <p:spPr>
+          <a:xfrm>
+            <a:off x="1993392" y="3675888"/>
+            <a:ext cx="384048" cy="384048"/>
+          </a:xfrm>
+          <a:prstGeom prst="roundRect">
+            <a:avLst>
+              <a:gd name="adj" fmla="val 22000"/>
+            </a:avLst>
+          </a:prstGeom>
+          <a:solidFill>
+            <a:srgbClr val="4466FF">
+              <a:alpha val="55000"/>
+            </a:srgbClr>
+          </a:solidFill>
+          <a:ln>
+            <a:noFill/>
+          </a:ln>
+          <a:effectLst/>
+        </p:spPr>
+        <p:style>
+          <a:lnRef idx="1">
+            <a:schemeClr val="accent1"/>
+          </a:lnRef>
+          <a:fillRef idx="3">
+            <a:schemeClr val="accent1"/>
+          </a:fillRef>
+          <a:effectRef idx="2">
+            <a:schemeClr val="accent1"/>
+          </a:effectRef>
+          <a:fontRef idx="minor">
+            <a:schemeClr val="lt1"/>
+          </a:fontRef>
+        </p:style>
+        <p:txBody>
+          <a:bodyPr rtlCol="0" anchor="ctr"/>
+          <a:lstStyle/>
+          <a:p>
+            <a:pPr algn="ctr"/>
+          </a:p>
+        </p:txBody>
+      </p:sp>
+      <p:sp>
+        <p:nvSpPr>
+          <p:cNvPr id="19" name="Rounded Rectangle 18"/>
+          <p:cNvSpPr/>
+          <p:nvPr/>
+        </p:nvSpPr>
+        <p:spPr>
+          <a:xfrm>
+            <a:off x="2468880" y="3675888"/>
+            <a:ext cx="384048" cy="384048"/>
+          </a:xfrm>
+          <a:prstGeom prst="roundRect">
+            <a:avLst>
+              <a:gd name="adj" fmla="val 22000"/>
+            </a:avLst>
+          </a:prstGeom>
+          <a:solidFill>
+            <a:srgbClr val="4466FF">
+              <a:alpha val="70000"/>
+            </a:srgbClr>
+          </a:solidFill>
+          <a:ln>
+            <a:noFill/>
+          </a:ln>
+          <a:effectLst/>
+        </p:spPr>
+        <p:style>
+          <a:lnRef idx="1">
+            <a:schemeClr val="accent1"/>
+          </a:lnRef>
+          <a:fillRef idx="3">
+            <a:schemeClr val="accent1"/>
+          </a:fillRef>
+          <a:effectRef idx="2">
+            <a:schemeClr val="accent1"/>
+          </a:effectRef>
+          <a:fontRef idx="minor">
+            <a:schemeClr val="lt1"/>
+          </a:fontRef>
+        </p:style>
+        <p:txBody>
+          <a:bodyPr rtlCol="0" anchor="ctr"/>
+          <a:lstStyle/>
+          <a:p>
+            <a:pPr algn="ctr"/>
+          </a:p>
+        </p:txBody>
+      </p:sp>
+      <p:sp>
+        <p:nvSpPr>
+          <p:cNvPr id="20" name="Rounded Rectangle 19"/>
+          <p:cNvSpPr/>
+          <p:nvPr/>
+        </p:nvSpPr>
+        <p:spPr>
+          <a:xfrm>
+            <a:off x="2944368" y="3675888"/>
+            <a:ext cx="384048" cy="384048"/>
+          </a:xfrm>
+          <a:prstGeom prst="roundRect">
+            <a:avLst>
+              <a:gd name="adj" fmla="val 22000"/>
+            </a:avLst>
+          </a:prstGeom>
+          <a:solidFill>
+            <a:srgbClr val="4466FF">
+              <a:alpha val="85000"/>
+            </a:srgbClr>
+          </a:solidFill>
+          <a:ln>
+            <a:noFill/>
+          </a:ln>
+          <a:effectLst/>
+        </p:spPr>
+        <p:style>
+          <a:lnRef idx="1">
+            <a:schemeClr val="accent1"/>
+          </a:lnRef>
+          <a:fillRef idx="3">
+            <a:schemeClr val="accent1"/>
+          </a:fillRef>
+          <a:effectRef idx="2">
+            <a:schemeClr val="accent1"/>
+          </a:effectRef>
+          <a:fontRef idx="minor">
+            <a:schemeClr val="lt1"/>
+          </a:fontRef>
+        </p:style>
+        <p:txBody>
+          <a:bodyPr rtlCol="0" anchor="ctr"/>
+          <a:lstStyle/>
+          <a:p>
+            <a:pPr algn="ctr"/>
+          </a:p>
+        </p:txBody>
+      </p:sp>
+      <p:sp>
+        <p:nvSpPr>
+          <p:cNvPr id="21" name="Rounded Rectangle 20"/>
+          <p:cNvSpPr/>
+          <p:nvPr/>
+        </p:nvSpPr>
+        <p:spPr>
+          <a:xfrm>
+            <a:off x="3419856" y="3675888"/>
+            <a:ext cx="384048" cy="384048"/>
+          </a:xfrm>
+          <a:prstGeom prst="roundRect">
+            <a:avLst>
+              <a:gd name="adj" fmla="val 22000"/>
+            </a:avLst>
+          </a:prstGeom>
+          <a:solidFill>
+            <a:srgbClr val="4466FF">
+              <a:alpha val="60000"/>
+            </a:srgbClr>
+          </a:solidFill>
+          <a:ln>
+            <a:noFill/>
+          </a:ln>
+          <a:effectLst/>
+        </p:spPr>
+        <p:style>
+          <a:lnRef idx="1">
+            <a:schemeClr val="accent1"/>
+          </a:lnRef>
+          <a:fillRef idx="3">
+            <a:schemeClr val="accent1"/>
+          </a:fillRef>
+          <a:effectRef idx="2">
+            <a:schemeClr val="accent1"/>
+          </a:effectRef>
+          <a:fontRef idx="minor">
+            <a:schemeClr val="lt1"/>
+          </a:fontRef>
+        </p:style>
+        <p:txBody>
+          <a:bodyPr rtlCol="0" anchor="ctr"/>
+          <a:lstStyle/>
+          <a:p>
+            <a:pPr algn="ctr"/>
+          </a:p>
+        </p:txBody>
+      </p:sp>
+      <p:sp>
+        <p:nvSpPr>
+          <p:cNvPr id="22" name="Rounded Rectangle 21"/>
+          <p:cNvSpPr/>
+          <p:nvPr/>
+        </p:nvSpPr>
+        <p:spPr>
+          <a:xfrm>
+            <a:off x="1042416" y="4151376"/>
+            <a:ext cx="384048" cy="384048"/>
+          </a:xfrm>
+          <a:prstGeom prst="roundRect">
+            <a:avLst>
+              <a:gd name="adj" fmla="val 22000"/>
+            </a:avLst>
+          </a:prstGeom>
+          <a:solidFill>
+            <a:srgbClr val="4466FF">
+              <a:alpha val="40000"/>
+            </a:srgbClr>
+          </a:solidFill>
+          <a:ln>
+            <a:noFill/>
+          </a:ln>
+          <a:effectLst/>
+        </p:spPr>
+        <p:style>
+          <a:lnRef idx="1">
+            <a:schemeClr val="accent1"/>
+          </a:lnRef>
+          <a:fillRef idx="3">
+            <a:schemeClr val="accent1"/>
+          </a:fillRef>
+          <a:effectRef idx="2">
+            <a:schemeClr val="accent1"/>
+          </a:effectRef>
+          <a:fontRef idx="minor">
+            <a:schemeClr val="lt1"/>
+          </a:fontRef>
+        </p:style>
+        <p:txBody>
+          <a:bodyPr rtlCol="0" anchor="ctr"/>
+          <a:lstStyle/>
+          <a:p>
+            <a:pPr algn="ctr"/>
+          </a:p>
+        </p:txBody>
+      </p:sp>
+      <p:sp>
+        <p:nvSpPr>
+          <p:cNvPr id="23" name="Rounded Rectangle 22"/>
+          <p:cNvSpPr/>
+          <p:nvPr/>
+        </p:nvSpPr>
+        <p:spPr>
+          <a:xfrm>
+            <a:off x="1517904" y="4151376"/>
+            <a:ext cx="384048" cy="384048"/>
+          </a:xfrm>
+          <a:prstGeom prst="roundRect">
+            <a:avLst>
+              <a:gd name="adj" fmla="val 22000"/>
+            </a:avLst>
+          </a:prstGeom>
+          <a:solidFill>
+            <a:srgbClr val="4466FF">
+              <a:alpha val="60000"/>
+            </a:srgbClr>
+          </a:solidFill>
+          <a:ln>
+            <a:noFill/>
+          </a:ln>
+          <a:effectLst/>
+        </p:spPr>
+        <p:style>
+          <a:lnRef idx="1">
+            <a:schemeClr val="accent1"/>
+          </a:lnRef>
+          <a:fillRef idx="3">
+            <a:schemeClr val="accent1"/>
+          </a:fillRef>
+          <a:effectRef idx="2">
+            <a:schemeClr val="accent1"/>
+          </a:effectRef>
+          <a:fontRef idx="minor">
+            <a:schemeClr val="lt1"/>
+          </a:fontRef>
+        </p:style>
+        <p:txBody>
+          <a:bodyPr rtlCol="0" anchor="ctr"/>
+          <a:lstStyle/>
+          <a:p>
+            <a:pPr algn="ctr"/>
+          </a:p>
+        </p:txBody>
+      </p:sp>
+      <p:sp>
+        <p:nvSpPr>
+          <p:cNvPr id="24" name="Rounded Rectangle 23"/>
+          <p:cNvSpPr/>
+          <p:nvPr/>
+        </p:nvSpPr>
+        <p:spPr>
+          <a:xfrm>
+            <a:off x="1993392" y="4151376"/>
+            <a:ext cx="384048" cy="384048"/>
+          </a:xfrm>
+          <a:prstGeom prst="roundRect">
+            <a:avLst>
+              <a:gd name="adj" fmla="val 22000"/>
+            </a:avLst>
+          </a:prstGeom>
+          <a:solidFill>
+            <a:srgbClr val="4466FF">
+              <a:alpha val="75000"/>
+            </a:srgbClr>
+          </a:solidFill>
+          <a:ln>
+            <a:noFill/>
+          </a:ln>
+          <a:effectLst/>
+        </p:spPr>
+        <p:style>
+          <a:lnRef idx="1">
+            <a:schemeClr val="accent1"/>
+          </a:lnRef>
+          <a:fillRef idx="3">
+            <a:schemeClr val="accent1"/>
+          </a:fillRef>
+          <a:effectRef idx="2">
+            <a:schemeClr val="accent1"/>
+          </a:effectRef>
+          <a:fontRef idx="minor">
+            <a:schemeClr val="lt1"/>
+          </a:fontRef>
+        </p:style>
+        <p:txBody>
+          <a:bodyPr rtlCol="0" anchor="ctr"/>
+          <a:lstStyle/>
+          <a:p>
+            <a:pPr algn="ctr"/>
+          </a:p>
+        </p:txBody>
+      </p:sp>
+      <p:sp>
+        <p:nvSpPr>
+          <p:cNvPr id="25" name="Rounded Rectangle 24"/>
+          <p:cNvSpPr/>
+          <p:nvPr/>
+        </p:nvSpPr>
+        <p:spPr>
+          <a:xfrm>
+            <a:off x="2468880" y="4151376"/>
+            <a:ext cx="384048" cy="384048"/>
+          </a:xfrm>
+          <a:prstGeom prst="roundRect">
+            <a:avLst>
+              <a:gd name="adj" fmla="val 22000"/>
+            </a:avLst>
+          </a:prstGeom>
+          <a:solidFill>
+            <a:srgbClr val="4466FF">
+              <a:alpha val="90000"/>
+            </a:srgbClr>
+          </a:solidFill>
+          <a:ln>
+            <a:noFill/>
+          </a:ln>
+          <a:effectLst/>
+        </p:spPr>
+        <p:style>
+          <a:lnRef idx="1">
+            <a:schemeClr val="accent1"/>
+          </a:lnRef>
+          <a:fillRef idx="3">
+            <a:schemeClr val="accent1"/>
+          </a:fillRef>
+          <a:effectRef idx="2">
+            <a:schemeClr val="accent1"/>
+          </a:effectRef>
+          <a:fontRef idx="minor">
+            <a:schemeClr val="lt1"/>
+          </a:fontRef>
+        </p:style>
+        <p:txBody>
+          <a:bodyPr rtlCol="0" anchor="ctr"/>
+          <a:lstStyle/>
+          <a:p>
+            <a:pPr algn="ctr"/>
+          </a:p>
+        </p:txBody>
+      </p:sp>
+      <p:sp>
+        <p:nvSpPr>
+          <p:cNvPr id="26" name="Rounded Rectangle 25"/>
+          <p:cNvSpPr/>
+          <p:nvPr/>
+        </p:nvSpPr>
+        <p:spPr>
+          <a:xfrm>
+            <a:off x="2944368" y="4151376"/>
+            <a:ext cx="384048" cy="384048"/>
+          </a:xfrm>
+          <a:prstGeom prst="roundRect">
+            <a:avLst>
+              <a:gd name="adj" fmla="val 22000"/>
+            </a:avLst>
+          </a:prstGeom>
+          <a:solidFill>
+            <a:srgbClr val="4466FF">
+              <a:alpha val="100000"/>
+            </a:srgbClr>
+          </a:solidFill>
+          <a:ln>
+            <a:noFill/>
+          </a:ln>
+          <a:effectLst/>
+        </p:spPr>
+        <p:style>
+          <a:lnRef idx="1">
+            <a:schemeClr val="accent1"/>
+          </a:lnRef>
+          <a:fillRef idx="3">
+            <a:schemeClr val="accent1"/>
+          </a:fillRef>
+          <a:effectRef idx="2">
+            <a:schemeClr val="accent1"/>
+          </a:effectRef>
+          <a:fontRef idx="minor">
+            <a:schemeClr val="lt1"/>
+          </a:fontRef>
+        </p:style>
+        <p:txBody>
+          <a:bodyPr rtlCol="0" anchor="ctr"/>
+          <a:lstStyle/>
+          <a:p>
+            <a:pPr algn="ctr"/>
+          </a:p>
+        </p:txBody>
+      </p:sp>
+      <p:sp>
+        <p:nvSpPr>
+          <p:cNvPr id="27" name="Rounded Rectangle 26"/>
+          <p:cNvSpPr/>
+          <p:nvPr/>
+        </p:nvSpPr>
+        <p:spPr>
+          <a:xfrm>
+            <a:off x="3419856" y="4151376"/>
+            <a:ext cx="384048" cy="384048"/>
+          </a:xfrm>
+          <a:prstGeom prst="roundRect">
+            <a:avLst>
+              <a:gd name="adj" fmla="val 22000"/>
+            </a:avLst>
+          </a:prstGeom>
+          <a:solidFill>
+            <a:srgbClr val="4466FF">
+              <a:alpha val="80000"/>
+            </a:srgbClr>
+          </a:solidFill>
+          <a:ln>
+            <a:noFill/>
+          </a:ln>
+          <a:effectLst/>
+        </p:spPr>
+        <p:style>
+          <a:lnRef idx="1">
+            <a:schemeClr val="accent1"/>
+          </a:lnRef>
+          <a:fillRef idx="3">
+            <a:schemeClr val="accent1"/>
+          </a:fillRef>
+          <a:effectRef idx="2">
+            <a:schemeClr val="accent1"/>
+          </a:effectRef>
+          <a:fontRef idx="minor">
+            <a:schemeClr val="lt1"/>
+          </a:fontRef>
+        </p:style>
+        <p:txBody>
+          <a:bodyPr rtlCol="0" anchor="ctr"/>
+          <a:lstStyle/>
+          <a:p>
+            <a:pPr algn="ctr"/>
+          </a:p>
+        </p:txBody>
+      </p:sp>
+      <p:sp>
+        <p:nvSpPr>
+          <p:cNvPr id="28" name="Rounded Rectangle 27"/>
+          <p:cNvSpPr/>
+          <p:nvPr/>
+        </p:nvSpPr>
+        <p:spPr>
+          <a:xfrm>
+            <a:off x="1042416" y="4626864"/>
+            <a:ext cx="384048" cy="384048"/>
+          </a:xfrm>
+          <a:prstGeom prst="roundRect">
+            <a:avLst>
+              <a:gd name="adj" fmla="val 22000"/>
+            </a:avLst>
+          </a:prstGeom>
+          <a:solidFill>
+            <a:srgbClr val="4466FF">
+              <a:alpha val="25000"/>
+            </a:srgbClr>
+          </a:solidFill>
+          <a:ln>
+            <a:noFill/>
+          </a:ln>
+          <a:effectLst/>
+        </p:spPr>
+        <p:style>
+          <a:lnRef idx="1">
+            <a:schemeClr val="accent1"/>
+          </a:lnRef>
+          <a:fillRef idx="3">
+            <a:schemeClr val="accent1"/>
+          </a:fillRef>
+          <a:effectRef idx="2">
+            <a:schemeClr val="accent1"/>
+          </a:effectRef>
+          <a:fontRef idx="minor">
+            <a:schemeClr val="lt1"/>
+          </a:fontRef>
+        </p:style>
+        <p:txBody>
+          <a:bodyPr rtlCol="0" anchor="ctr"/>
+          <a:lstStyle/>
+          <a:p>
+            <a:pPr algn="ctr"/>
+          </a:p>
+        </p:txBody>
+      </p:sp>
+      <p:sp>
+        <p:nvSpPr>
+          <p:cNvPr id="29" name="Rounded Rectangle 28"/>
+          <p:cNvSpPr/>
+          <p:nvPr/>
+        </p:nvSpPr>
+        <p:spPr>
+          <a:xfrm>
+            <a:off x="1517904" y="4626864"/>
+            <a:ext cx="384048" cy="384048"/>
+          </a:xfrm>
+          <a:prstGeom prst="roundRect">
+            <a:avLst>
+              <a:gd name="adj" fmla="val 22000"/>
+            </a:avLst>
+          </a:prstGeom>
+          <a:solidFill>
+            <a:srgbClr val="4466FF">
+              <a:alpha val="40000"/>
+            </a:srgbClr>
+          </a:solidFill>
+          <a:ln>
+            <a:noFill/>
+          </a:ln>
+          <a:effectLst/>
+        </p:spPr>
+        <p:style>
+          <a:lnRef idx="1">
+            <a:schemeClr val="accent1"/>
+          </a:lnRef>
+          <a:fillRef idx="3">
+            <a:schemeClr val="accent1"/>
+          </a:fillRef>
+          <a:effectRef idx="2">
+            <a:schemeClr val="accent1"/>
+          </a:effectRef>
+          <a:fontRef idx="minor">
+            <a:schemeClr val="lt1"/>
+          </a:fontRef>
+        </p:style>
+        <p:txBody>
+          <a:bodyPr rtlCol="0" anchor="ctr"/>
+          <a:lstStyle/>
+          <a:p>
+            <a:pPr algn="ctr"/>
+          </a:p>
+        </p:txBody>
+      </p:sp>
+      <p:sp>
+        <p:nvSpPr>
+          <p:cNvPr id="30" name="Rounded Rectangle 29"/>
+          <p:cNvSpPr/>
+          <p:nvPr/>
+        </p:nvSpPr>
+        <p:spPr>
+          <a:xfrm>
+            <a:off x="1993392" y="4626864"/>
+            <a:ext cx="384048" cy="384048"/>
+          </a:xfrm>
+          <a:prstGeom prst="roundRect">
+            <a:avLst>
+              <a:gd name="adj" fmla="val 22000"/>
+            </a:avLst>
+          </a:prstGeom>
+          <a:solidFill>
+            <a:srgbClr val="4466FF">
+              <a:alpha val="50000"/>
+            </a:srgbClr>
+          </a:solidFill>
+          <a:ln>
+            <a:noFill/>
+          </a:ln>
+          <a:effectLst/>
+        </p:spPr>
+        <p:style>
+          <a:lnRef idx="1">
+            <a:schemeClr val="accent1"/>
+          </a:lnRef>
+          <a:fillRef idx="3">
+            <a:schemeClr val="accent1"/>
+          </a:fillRef>
+          <a:effectRef idx="2">
+            <a:schemeClr val="accent1"/>
+          </a:effectRef>
+          <a:fontRef idx="minor">
+            <a:schemeClr val="lt1"/>
+          </a:fontRef>
+        </p:style>
+        <p:txBody>
+          <a:bodyPr rtlCol="0" anchor="ctr"/>
+          <a:lstStyle/>
+          <a:p>
+            <a:pPr algn="ctr"/>
+          </a:p>
+        </p:txBody>
+      </p:sp>
+      <p:sp>
+        <p:nvSpPr>
+          <p:cNvPr id="31" name="Rounded Rectangle 30"/>
+          <p:cNvSpPr/>
+          <p:nvPr/>
+        </p:nvSpPr>
+        <p:spPr>
+          <a:xfrm>
+            <a:off x="2468880" y="4626864"/>
+            <a:ext cx="384048" cy="384048"/>
+          </a:xfrm>
+          <a:prstGeom prst="roundRect">
+            <a:avLst>
+              <a:gd name="adj" fmla="val 22000"/>
+            </a:avLst>
+          </a:prstGeom>
+          <a:solidFill>
+            <a:srgbClr val="4466FF">
+              <a:alpha val="65000"/>
+            </a:srgbClr>
+          </a:solidFill>
+          <a:ln>
+            <a:noFill/>
+          </a:ln>
+          <a:effectLst/>
+        </p:spPr>
+        <p:style>
+          <a:lnRef idx="1">
+            <a:schemeClr val="accent1"/>
+          </a:lnRef>
+          <a:fillRef idx="3">
+            <a:schemeClr val="accent1"/>
+          </a:fillRef>
+          <a:effectRef idx="2">
+            <a:schemeClr val="accent1"/>
+          </a:effectRef>
+          <a:fontRef idx="minor">
+            <a:schemeClr val="lt1"/>
+          </a:fontRef>
+        </p:style>
+        <p:txBody>
+          <a:bodyPr rtlCol="0" anchor="ctr"/>
+          <a:lstStyle/>
+          <a:p>
+            <a:pPr algn="ctr"/>
+          </a:p>
+        </p:txBody>
+      </p:sp>
+      <p:sp>
+        <p:nvSpPr>
+          <p:cNvPr id="32" name="Rounded Rectangle 31"/>
+          <p:cNvSpPr/>
+          <p:nvPr/>
+        </p:nvSpPr>
+        <p:spPr>
+          <a:xfrm>
+            <a:off x="2944368" y="4626864"/>
+            <a:ext cx="384048" cy="384048"/>
+          </a:xfrm>
+          <a:prstGeom prst="roundRect">
+            <a:avLst>
+              <a:gd name="adj" fmla="val 22000"/>
+            </a:avLst>
+          </a:prstGeom>
+          <a:solidFill>
+            <a:srgbClr val="4466FF">
+              <a:alpha val="55000"/>
+            </a:srgbClr>
+          </a:solidFill>
+          <a:ln>
+            <a:noFill/>
+          </a:ln>
+          <a:effectLst/>
+        </p:spPr>
+        <p:style>
+          <a:lnRef idx="1">
+            <a:schemeClr val="accent1"/>
+          </a:lnRef>
+          <a:fillRef idx="3">
+            <a:schemeClr val="accent1"/>
+          </a:fillRef>
+          <a:effectRef idx="2">
+            <a:schemeClr val="accent1"/>
+          </a:effectRef>
+          <a:fontRef idx="minor">
+            <a:schemeClr val="lt1"/>
+          </a:fontRef>
+        </p:style>
+        <p:txBody>
+          <a:bodyPr rtlCol="0" anchor="ctr"/>
+          <a:lstStyle/>
+          <a:p>
+            <a:pPr algn="ctr"/>
+          </a:p>
+        </p:txBody>
+      </p:sp>
+      <p:sp>
+        <p:nvSpPr>
+          <p:cNvPr id="33" name="Rounded Rectangle 32"/>
+          <p:cNvSpPr/>
+          <p:nvPr/>
+        </p:nvSpPr>
+        <p:spPr>
+          <a:xfrm>
+            <a:off x="3419856" y="4626864"/>
+            <a:ext cx="384048" cy="384048"/>
+          </a:xfrm>
+          <a:prstGeom prst="roundRect">
+            <a:avLst>
+              <a:gd name="adj" fmla="val 22000"/>
+            </a:avLst>
+          </a:prstGeom>
+          <a:solidFill>
+            <a:srgbClr val="4466FF">
+              <a:alpha val="35000"/>
+            </a:srgbClr>
+          </a:solidFill>
+          <a:ln>
+            <a:noFill/>
+          </a:ln>
+          <a:effectLst/>
+        </p:spPr>
+        <p:style>
+          <a:lnRef idx="1">
+            <a:schemeClr val="accent1"/>
+          </a:lnRef>
+          <a:fillRef idx="3">
+            <a:schemeClr val="accent1"/>
+          </a:fillRef>
+          <a:effectRef idx="2">
+            <a:schemeClr val="accent1"/>
+          </a:effectRef>
+          <a:fontRef idx="minor">
+            <a:schemeClr val="lt1"/>
+          </a:fontRef>
+        </p:style>
+        <p:txBody>
+          <a:bodyPr rtlCol="0" anchor="ctr"/>
+          <a:lstStyle/>
+          <a:p>
+            <a:pPr algn="ctr"/>
+          </a:p>
+        </p:txBody>
+      </p:sp>
+      <p:sp>
+        <p:nvSpPr>
+          <p:cNvPr id="34" name="TextBox 33"/>
           <p:cNvSpPr txBox="1"/>
           <p:nvPr/>
         </p:nvSpPr>
         <p:spPr>
           <a:xfrm>
-            <a:off x="9372600" y="3154680"/>
-            <a:ext cx="2606040" cy="1097280"/>
+            <a:off x="1024128" y="5349240"/>
+            <a:ext cx="2971800" cy="548640"/>
           </a:xfrm>
           <a:prstGeom prst="rect">
             <a:avLst/>
@@ -15375,29 +19033,33 @@
           </a:bodyPr>
           <a:lstStyle/>
           <a:p>
-            <a:pPr algn="ctr"/>
-            <a:r>
-              <a:rPr sz="5800" b="1" i="0">
-                <a:solidFill>
-                  <a:srgbClr val="7AA8FF"/>
-                </a:solidFill>
-                <a:latin typeface="Sora"/>
-              </a:rPr>
-              <a:t>3</a:t>
-            </a:r>
-          </a:p>
-        </p:txBody>
-      </p:sp>
-      <p:sp>
-        <p:nvSpPr>
-          <p:cNvPr id="16" name="TextBox 15"/>
+            <a:pPr algn="l">
+              <a:lnSpc>
+                <a:spcPct val="105000"/>
+              </a:lnSpc>
+            </a:pPr>
+            <a:r>
+              <a:rPr sz="1100" b="0" i="0">
+                <a:solidFill>
+                  <a:srgbClr val="556080"/>
+                </a:solidFill>
+                <a:latin typeface="Open Sans"/>
+              </a:rPr>
+              <a:t>Evenings are your peak — staff up when it matters most.</a:t>
+            </a:r>
+          </a:p>
+        </p:txBody>
+      </p:sp>
+      <p:sp>
+        <p:nvSpPr>
+          <p:cNvPr id="35" name="TextBox 34"/>
           <p:cNvSpPr txBox="1"/>
           <p:nvPr/>
         </p:nvSpPr>
         <p:spPr>
           <a:xfrm>
-            <a:off x="9601200" y="4343400"/>
-            <a:ext cx="2148840" cy="1005840"/>
+            <a:off x="4855464" y="2542032"/>
+            <a:ext cx="3017520" cy="457200"/>
           </a:xfrm>
           <a:prstGeom prst="rect">
             <a:avLst/>
@@ -15410,48 +19072,1111 @@
           </a:bodyPr>
           <a:lstStyle/>
           <a:p>
-            <a:pPr algn="ctr">
+            <a:pPr algn="l"/>
+            <a:r>
+              <a:rPr sz="1600" b="1" i="0">
+                <a:solidFill>
+                  <a:srgbClr val="0A0A2E"/>
+                </a:solidFill>
+                <a:latin typeface="Sora"/>
+              </a:rPr>
+              <a:t>Top questions</a:t>
+            </a:r>
+          </a:p>
+        </p:txBody>
+      </p:sp>
+      <p:sp>
+        <p:nvSpPr>
+          <p:cNvPr id="36" name="TextBox 35"/>
+          <p:cNvSpPr txBox="1"/>
+          <p:nvPr/>
+        </p:nvSpPr>
+        <p:spPr>
+          <a:xfrm>
+            <a:off x="4873752" y="3246120"/>
+            <a:ext cx="2286000" cy="274320"/>
+          </a:xfrm>
+          <a:prstGeom prst="rect">
+            <a:avLst/>
+          </a:prstGeom>
+          <a:noFill/>
+        </p:spPr>
+        <p:txBody>
+          <a:bodyPr wrap="square" anchor="t" lIns="0" rIns="0" tIns="0" bIns="0">
+            <a:spAutoFit/>
+          </a:bodyPr>
+          <a:lstStyle/>
+          <a:p>
+            <a:pPr algn="l"/>
+            <a:r>
+              <a:rPr sz="1100" b="0" i="0">
+                <a:solidFill>
+                  <a:srgbClr val="0A0A2E"/>
+                </a:solidFill>
+                <a:latin typeface="Open Sans"/>
+              </a:rPr>
+              <a:t>Where’s my order?</a:t>
+            </a:r>
+          </a:p>
+        </p:txBody>
+      </p:sp>
+      <p:sp>
+        <p:nvSpPr>
+          <p:cNvPr id="37" name="TextBox 36"/>
+          <p:cNvSpPr txBox="1"/>
+          <p:nvPr/>
+        </p:nvSpPr>
+        <p:spPr>
+          <a:xfrm>
+            <a:off x="7031736" y="3246120"/>
+            <a:ext cx="777240" cy="274320"/>
+          </a:xfrm>
+          <a:prstGeom prst="rect">
+            <a:avLst/>
+          </a:prstGeom>
+          <a:noFill/>
+        </p:spPr>
+        <p:txBody>
+          <a:bodyPr wrap="square" anchor="t" lIns="0" rIns="0" tIns="0" bIns="0">
+            <a:spAutoFit/>
+          </a:bodyPr>
+          <a:lstStyle/>
+          <a:p>
+            <a:pPr algn="r"/>
+            <a:r>
+              <a:rPr sz="1100" b="1" i="0">
+                <a:solidFill>
+                  <a:srgbClr val="4466FF"/>
+                </a:solidFill>
+                <a:latin typeface="JetBrains Mono"/>
+              </a:rPr>
+              <a:t>34%</a:t>
+            </a:r>
+          </a:p>
+        </p:txBody>
+      </p:sp>
+      <p:sp>
+        <p:nvSpPr>
+          <p:cNvPr id="38" name="Rounded Rectangle 37"/>
+          <p:cNvSpPr/>
+          <p:nvPr/>
+        </p:nvSpPr>
+        <p:spPr>
+          <a:xfrm>
+            <a:off x="4873752" y="3520440"/>
+            <a:ext cx="2788920" cy="128016"/>
+          </a:xfrm>
+          <a:prstGeom prst="roundRect">
+            <a:avLst>
+              <a:gd name="adj" fmla="val 50000"/>
+            </a:avLst>
+          </a:prstGeom>
+          <a:solidFill>
+            <a:srgbClr val="4466FF">
+              <a:alpha val="12000"/>
+            </a:srgbClr>
+          </a:solidFill>
+          <a:ln>
+            <a:noFill/>
+          </a:ln>
+          <a:effectLst/>
+        </p:spPr>
+        <p:style>
+          <a:lnRef idx="1">
+            <a:schemeClr val="accent1"/>
+          </a:lnRef>
+          <a:fillRef idx="3">
+            <a:schemeClr val="accent1"/>
+          </a:fillRef>
+          <a:effectRef idx="2">
+            <a:schemeClr val="accent1"/>
+          </a:effectRef>
+          <a:fontRef idx="minor">
+            <a:schemeClr val="lt1"/>
+          </a:fontRef>
+        </p:style>
+        <p:txBody>
+          <a:bodyPr rtlCol="0" anchor="ctr"/>
+          <a:lstStyle/>
+          <a:p>
+            <a:pPr algn="ctr"/>
+          </a:p>
+        </p:txBody>
+      </p:sp>
+      <p:sp>
+        <p:nvSpPr>
+          <p:cNvPr id="39" name="Rounded Rectangle 38"/>
+          <p:cNvSpPr/>
+          <p:nvPr/>
+        </p:nvSpPr>
+        <p:spPr>
+          <a:xfrm>
+            <a:off x="4873752" y="3520440"/>
+            <a:ext cx="948232" cy="128016"/>
+          </a:xfrm>
+          <a:prstGeom prst="roundRect">
+            <a:avLst>
+              <a:gd name="adj" fmla="val 50000"/>
+            </a:avLst>
+          </a:prstGeom>
+          <a:solidFill>
+            <a:srgbClr val="4466FF"/>
+          </a:solidFill>
+          <a:ln>
+            <a:noFill/>
+          </a:ln>
+          <a:effectLst/>
+        </p:spPr>
+        <p:style>
+          <a:lnRef idx="1">
+            <a:schemeClr val="accent1"/>
+          </a:lnRef>
+          <a:fillRef idx="3">
+            <a:schemeClr val="accent1"/>
+          </a:fillRef>
+          <a:effectRef idx="2">
+            <a:schemeClr val="accent1"/>
+          </a:effectRef>
+          <a:fontRef idx="minor">
+            <a:schemeClr val="lt1"/>
+          </a:fontRef>
+        </p:style>
+        <p:txBody>
+          <a:bodyPr rtlCol="0" anchor="ctr"/>
+          <a:lstStyle/>
+          <a:p>
+            <a:pPr algn="ctr"/>
+          </a:p>
+        </p:txBody>
+      </p:sp>
+      <p:sp>
+        <p:nvSpPr>
+          <p:cNvPr id="40" name="TextBox 39"/>
+          <p:cNvSpPr txBox="1"/>
+          <p:nvPr/>
+        </p:nvSpPr>
+        <p:spPr>
+          <a:xfrm>
+            <a:off x="4873752" y="3904488"/>
+            <a:ext cx="2286000" cy="274320"/>
+          </a:xfrm>
+          <a:prstGeom prst="rect">
+            <a:avLst/>
+          </a:prstGeom>
+          <a:noFill/>
+        </p:spPr>
+        <p:txBody>
+          <a:bodyPr wrap="square" anchor="t" lIns="0" rIns="0" tIns="0" bIns="0">
+            <a:spAutoFit/>
+          </a:bodyPr>
+          <a:lstStyle/>
+          <a:p>
+            <a:pPr algn="l"/>
+            <a:r>
+              <a:rPr sz="1100" b="0" i="0">
+                <a:solidFill>
+                  <a:srgbClr val="0A0A2E"/>
+                </a:solidFill>
+                <a:latin typeface="Open Sans"/>
+              </a:rPr>
+              <a:t>Is this in stock?</a:t>
+            </a:r>
+          </a:p>
+        </p:txBody>
+      </p:sp>
+      <p:sp>
+        <p:nvSpPr>
+          <p:cNvPr id="41" name="TextBox 40"/>
+          <p:cNvSpPr txBox="1"/>
+          <p:nvPr/>
+        </p:nvSpPr>
+        <p:spPr>
+          <a:xfrm>
+            <a:off x="7031736" y="3904488"/>
+            <a:ext cx="777240" cy="274320"/>
+          </a:xfrm>
+          <a:prstGeom prst="rect">
+            <a:avLst/>
+          </a:prstGeom>
+          <a:noFill/>
+        </p:spPr>
+        <p:txBody>
+          <a:bodyPr wrap="square" anchor="t" lIns="0" rIns="0" tIns="0" bIns="0">
+            <a:spAutoFit/>
+          </a:bodyPr>
+          <a:lstStyle/>
+          <a:p>
+            <a:pPr algn="r"/>
+            <a:r>
+              <a:rPr sz="1100" b="1" i="0">
+                <a:solidFill>
+                  <a:srgbClr val="4466FF"/>
+                </a:solidFill>
+                <a:latin typeface="JetBrains Mono"/>
+              </a:rPr>
+              <a:t>26%</a:t>
+            </a:r>
+          </a:p>
+        </p:txBody>
+      </p:sp>
+      <p:sp>
+        <p:nvSpPr>
+          <p:cNvPr id="42" name="Rounded Rectangle 41"/>
+          <p:cNvSpPr/>
+          <p:nvPr/>
+        </p:nvSpPr>
+        <p:spPr>
+          <a:xfrm>
+            <a:off x="4873752" y="4178808"/>
+            <a:ext cx="2788920" cy="128016"/>
+          </a:xfrm>
+          <a:prstGeom prst="roundRect">
+            <a:avLst>
+              <a:gd name="adj" fmla="val 50000"/>
+            </a:avLst>
+          </a:prstGeom>
+          <a:solidFill>
+            <a:srgbClr val="4466FF">
+              <a:alpha val="12000"/>
+            </a:srgbClr>
+          </a:solidFill>
+          <a:ln>
+            <a:noFill/>
+          </a:ln>
+          <a:effectLst/>
+        </p:spPr>
+        <p:style>
+          <a:lnRef idx="1">
+            <a:schemeClr val="accent1"/>
+          </a:lnRef>
+          <a:fillRef idx="3">
+            <a:schemeClr val="accent1"/>
+          </a:fillRef>
+          <a:effectRef idx="2">
+            <a:schemeClr val="accent1"/>
+          </a:effectRef>
+          <a:fontRef idx="minor">
+            <a:schemeClr val="lt1"/>
+          </a:fontRef>
+        </p:style>
+        <p:txBody>
+          <a:bodyPr rtlCol="0" anchor="ctr"/>
+          <a:lstStyle/>
+          <a:p>
+            <a:pPr algn="ctr"/>
+          </a:p>
+        </p:txBody>
+      </p:sp>
+      <p:sp>
+        <p:nvSpPr>
+          <p:cNvPr id="43" name="Rounded Rectangle 42"/>
+          <p:cNvSpPr/>
+          <p:nvPr/>
+        </p:nvSpPr>
+        <p:spPr>
+          <a:xfrm>
+            <a:off x="4873752" y="4178808"/>
+            <a:ext cx="725119" cy="128016"/>
+          </a:xfrm>
+          <a:prstGeom prst="roundRect">
+            <a:avLst>
+              <a:gd name="adj" fmla="val 50000"/>
+            </a:avLst>
+          </a:prstGeom>
+          <a:solidFill>
+            <a:srgbClr val="4466FF"/>
+          </a:solidFill>
+          <a:ln>
+            <a:noFill/>
+          </a:ln>
+          <a:effectLst/>
+        </p:spPr>
+        <p:style>
+          <a:lnRef idx="1">
+            <a:schemeClr val="accent1"/>
+          </a:lnRef>
+          <a:fillRef idx="3">
+            <a:schemeClr val="accent1"/>
+          </a:fillRef>
+          <a:effectRef idx="2">
+            <a:schemeClr val="accent1"/>
+          </a:effectRef>
+          <a:fontRef idx="minor">
+            <a:schemeClr val="lt1"/>
+          </a:fontRef>
+        </p:style>
+        <p:txBody>
+          <a:bodyPr rtlCol="0" anchor="ctr"/>
+          <a:lstStyle/>
+          <a:p>
+            <a:pPr algn="ctr"/>
+          </a:p>
+        </p:txBody>
+      </p:sp>
+      <p:sp>
+        <p:nvSpPr>
+          <p:cNvPr id="44" name="TextBox 43"/>
+          <p:cNvSpPr txBox="1"/>
+          <p:nvPr/>
+        </p:nvSpPr>
+        <p:spPr>
+          <a:xfrm>
+            <a:off x="4873752" y="4562856"/>
+            <a:ext cx="2286000" cy="274320"/>
+          </a:xfrm>
+          <a:prstGeom prst="rect">
+            <a:avLst/>
+          </a:prstGeom>
+          <a:noFill/>
+        </p:spPr>
+        <p:txBody>
+          <a:bodyPr wrap="square" anchor="t" lIns="0" rIns="0" tIns="0" bIns="0">
+            <a:spAutoFit/>
+          </a:bodyPr>
+          <a:lstStyle/>
+          <a:p>
+            <a:pPr algn="l"/>
+            <a:r>
+              <a:rPr sz="1100" b="0" i="0">
+                <a:solidFill>
+                  <a:srgbClr val="0A0A2E"/>
+                </a:solidFill>
+                <a:latin typeface="Open Sans"/>
+              </a:rPr>
+              <a:t>Shipping &amp; delivery</a:t>
+            </a:r>
+          </a:p>
+        </p:txBody>
+      </p:sp>
+      <p:sp>
+        <p:nvSpPr>
+          <p:cNvPr id="45" name="TextBox 44"/>
+          <p:cNvSpPr txBox="1"/>
+          <p:nvPr/>
+        </p:nvSpPr>
+        <p:spPr>
+          <a:xfrm>
+            <a:off x="7031736" y="4562856"/>
+            <a:ext cx="777240" cy="274320"/>
+          </a:xfrm>
+          <a:prstGeom prst="rect">
+            <a:avLst/>
+          </a:prstGeom>
+          <a:noFill/>
+        </p:spPr>
+        <p:txBody>
+          <a:bodyPr wrap="square" anchor="t" lIns="0" rIns="0" tIns="0" bIns="0">
+            <a:spAutoFit/>
+          </a:bodyPr>
+          <a:lstStyle/>
+          <a:p>
+            <a:pPr algn="r"/>
+            <a:r>
+              <a:rPr sz="1100" b="1" i="0">
+                <a:solidFill>
+                  <a:srgbClr val="4466FF"/>
+                </a:solidFill>
+                <a:latin typeface="JetBrains Mono"/>
+              </a:rPr>
+              <a:t>21%</a:t>
+            </a:r>
+          </a:p>
+        </p:txBody>
+      </p:sp>
+      <p:sp>
+        <p:nvSpPr>
+          <p:cNvPr id="46" name="Rounded Rectangle 45"/>
+          <p:cNvSpPr/>
+          <p:nvPr/>
+        </p:nvSpPr>
+        <p:spPr>
+          <a:xfrm>
+            <a:off x="4873752" y="4837176"/>
+            <a:ext cx="2788920" cy="128016"/>
+          </a:xfrm>
+          <a:prstGeom prst="roundRect">
+            <a:avLst>
+              <a:gd name="adj" fmla="val 50000"/>
+            </a:avLst>
+          </a:prstGeom>
+          <a:solidFill>
+            <a:srgbClr val="4466FF">
+              <a:alpha val="12000"/>
+            </a:srgbClr>
+          </a:solidFill>
+          <a:ln>
+            <a:noFill/>
+          </a:ln>
+          <a:effectLst/>
+        </p:spPr>
+        <p:style>
+          <a:lnRef idx="1">
+            <a:schemeClr val="accent1"/>
+          </a:lnRef>
+          <a:fillRef idx="3">
+            <a:schemeClr val="accent1"/>
+          </a:fillRef>
+          <a:effectRef idx="2">
+            <a:schemeClr val="accent1"/>
+          </a:effectRef>
+          <a:fontRef idx="minor">
+            <a:schemeClr val="lt1"/>
+          </a:fontRef>
+        </p:style>
+        <p:txBody>
+          <a:bodyPr rtlCol="0" anchor="ctr"/>
+          <a:lstStyle/>
+          <a:p>
+            <a:pPr algn="ctr"/>
+          </a:p>
+        </p:txBody>
+      </p:sp>
+      <p:sp>
+        <p:nvSpPr>
+          <p:cNvPr id="47" name="Rounded Rectangle 46"/>
+          <p:cNvSpPr/>
+          <p:nvPr/>
+        </p:nvSpPr>
+        <p:spPr>
+          <a:xfrm>
+            <a:off x="4873752" y="4837176"/>
+            <a:ext cx="585673" cy="128016"/>
+          </a:xfrm>
+          <a:prstGeom prst="roundRect">
+            <a:avLst>
+              <a:gd name="adj" fmla="val 50000"/>
+            </a:avLst>
+          </a:prstGeom>
+          <a:solidFill>
+            <a:srgbClr val="4466FF"/>
+          </a:solidFill>
+          <a:ln>
+            <a:noFill/>
+          </a:ln>
+          <a:effectLst/>
+        </p:spPr>
+        <p:style>
+          <a:lnRef idx="1">
+            <a:schemeClr val="accent1"/>
+          </a:lnRef>
+          <a:fillRef idx="3">
+            <a:schemeClr val="accent1"/>
+          </a:fillRef>
+          <a:effectRef idx="2">
+            <a:schemeClr val="accent1"/>
+          </a:effectRef>
+          <a:fontRef idx="minor">
+            <a:schemeClr val="lt1"/>
+          </a:fontRef>
+        </p:style>
+        <p:txBody>
+          <a:bodyPr rtlCol="0" anchor="ctr"/>
+          <a:lstStyle/>
+          <a:p>
+            <a:pPr algn="ctr"/>
+          </a:p>
+        </p:txBody>
+      </p:sp>
+      <p:sp>
+        <p:nvSpPr>
+          <p:cNvPr id="48" name="TextBox 47"/>
+          <p:cNvSpPr txBox="1"/>
+          <p:nvPr/>
+        </p:nvSpPr>
+        <p:spPr>
+          <a:xfrm>
+            <a:off x="4873752" y="5221224"/>
+            <a:ext cx="2286000" cy="274320"/>
+          </a:xfrm>
+          <a:prstGeom prst="rect">
+            <a:avLst/>
+          </a:prstGeom>
+          <a:noFill/>
+        </p:spPr>
+        <p:txBody>
+          <a:bodyPr wrap="square" anchor="t" lIns="0" rIns="0" tIns="0" bIns="0">
+            <a:spAutoFit/>
+          </a:bodyPr>
+          <a:lstStyle/>
+          <a:p>
+            <a:pPr algn="l"/>
+            <a:r>
+              <a:rPr sz="1100" b="0" i="0">
+                <a:solidFill>
+                  <a:srgbClr val="0A0A2E"/>
+                </a:solidFill>
+                <a:latin typeface="Open Sans"/>
+              </a:rPr>
+              <a:t>Returns &amp; exchanges</a:t>
+            </a:r>
+          </a:p>
+        </p:txBody>
+      </p:sp>
+      <p:sp>
+        <p:nvSpPr>
+          <p:cNvPr id="49" name="TextBox 48"/>
+          <p:cNvSpPr txBox="1"/>
+          <p:nvPr/>
+        </p:nvSpPr>
+        <p:spPr>
+          <a:xfrm>
+            <a:off x="7031736" y="5221224"/>
+            <a:ext cx="777240" cy="274320"/>
+          </a:xfrm>
+          <a:prstGeom prst="rect">
+            <a:avLst/>
+          </a:prstGeom>
+          <a:noFill/>
+        </p:spPr>
+        <p:txBody>
+          <a:bodyPr wrap="square" anchor="t" lIns="0" rIns="0" tIns="0" bIns="0">
+            <a:spAutoFit/>
+          </a:bodyPr>
+          <a:lstStyle/>
+          <a:p>
+            <a:pPr algn="r"/>
+            <a:r>
+              <a:rPr sz="1100" b="1" i="0">
+                <a:solidFill>
+                  <a:srgbClr val="4466FF"/>
+                </a:solidFill>
+                <a:latin typeface="JetBrains Mono"/>
+              </a:rPr>
+              <a:t>12%</a:t>
+            </a:r>
+          </a:p>
+        </p:txBody>
+      </p:sp>
+      <p:sp>
+        <p:nvSpPr>
+          <p:cNvPr id="50" name="Rounded Rectangle 49"/>
+          <p:cNvSpPr/>
+          <p:nvPr/>
+        </p:nvSpPr>
+        <p:spPr>
+          <a:xfrm>
+            <a:off x="4873752" y="5495544"/>
+            <a:ext cx="2788920" cy="128016"/>
+          </a:xfrm>
+          <a:prstGeom prst="roundRect">
+            <a:avLst>
+              <a:gd name="adj" fmla="val 50000"/>
+            </a:avLst>
+          </a:prstGeom>
+          <a:solidFill>
+            <a:srgbClr val="4466FF">
+              <a:alpha val="12000"/>
+            </a:srgbClr>
+          </a:solidFill>
+          <a:ln>
+            <a:noFill/>
+          </a:ln>
+          <a:effectLst/>
+        </p:spPr>
+        <p:style>
+          <a:lnRef idx="1">
+            <a:schemeClr val="accent1"/>
+          </a:lnRef>
+          <a:fillRef idx="3">
+            <a:schemeClr val="accent1"/>
+          </a:fillRef>
+          <a:effectRef idx="2">
+            <a:schemeClr val="accent1"/>
+          </a:effectRef>
+          <a:fontRef idx="minor">
+            <a:schemeClr val="lt1"/>
+          </a:fontRef>
+        </p:style>
+        <p:txBody>
+          <a:bodyPr rtlCol="0" anchor="ctr"/>
+          <a:lstStyle/>
+          <a:p>
+            <a:pPr algn="ctr"/>
+          </a:p>
+        </p:txBody>
+      </p:sp>
+      <p:sp>
+        <p:nvSpPr>
+          <p:cNvPr id="51" name="Rounded Rectangle 50"/>
+          <p:cNvSpPr/>
+          <p:nvPr/>
+        </p:nvSpPr>
+        <p:spPr>
+          <a:xfrm>
+            <a:off x="4873752" y="5495544"/>
+            <a:ext cx="334670" cy="128016"/>
+          </a:xfrm>
+          <a:prstGeom prst="roundRect">
+            <a:avLst>
+              <a:gd name="adj" fmla="val 50000"/>
+            </a:avLst>
+          </a:prstGeom>
+          <a:solidFill>
+            <a:srgbClr val="4466FF"/>
+          </a:solidFill>
+          <a:ln>
+            <a:noFill/>
+          </a:ln>
+          <a:effectLst/>
+        </p:spPr>
+        <p:style>
+          <a:lnRef idx="1">
+            <a:schemeClr val="accent1"/>
+          </a:lnRef>
+          <a:fillRef idx="3">
+            <a:schemeClr val="accent1"/>
+          </a:fillRef>
+          <a:effectRef idx="2">
+            <a:schemeClr val="accent1"/>
+          </a:effectRef>
+          <a:fontRef idx="minor">
+            <a:schemeClr val="lt1"/>
+          </a:fontRef>
+        </p:style>
+        <p:txBody>
+          <a:bodyPr rtlCol="0" anchor="ctr"/>
+          <a:lstStyle/>
+          <a:p>
+            <a:pPr algn="ctr"/>
+          </a:p>
+        </p:txBody>
+      </p:sp>
+      <p:sp>
+        <p:nvSpPr>
+          <p:cNvPr id="52" name="TextBox 51"/>
+          <p:cNvSpPr txBox="1"/>
+          <p:nvPr/>
+        </p:nvSpPr>
+        <p:spPr>
+          <a:xfrm>
+            <a:off x="8686800" y="2542032"/>
+            <a:ext cx="3017520" cy="457200"/>
+          </a:xfrm>
+          <a:prstGeom prst="rect">
+            <a:avLst/>
+          </a:prstGeom>
+          <a:noFill/>
+        </p:spPr>
+        <p:txBody>
+          <a:bodyPr wrap="square" anchor="t" lIns="0" rIns="0" tIns="0" bIns="0">
+            <a:spAutoFit/>
+          </a:bodyPr>
+          <a:lstStyle/>
+          <a:p>
+            <a:pPr algn="l"/>
+            <a:r>
+              <a:rPr sz="1600" b="1" i="0">
+                <a:solidFill>
+                  <a:srgbClr val="0A0A2E"/>
+                </a:solidFill>
+                <a:latin typeface="Sora"/>
+              </a:rPr>
+              <a:t>Chats that became sales</a:t>
+            </a:r>
+          </a:p>
+        </p:txBody>
+      </p:sp>
+      <p:sp>
+        <p:nvSpPr>
+          <p:cNvPr id="53" name="TextBox 52"/>
+          <p:cNvSpPr txBox="1"/>
+          <p:nvPr/>
+        </p:nvSpPr>
+        <p:spPr>
+          <a:xfrm>
+            <a:off x="8668512" y="3154680"/>
+            <a:ext cx="2743200" cy="822960"/>
+          </a:xfrm>
+          <a:prstGeom prst="rect">
+            <a:avLst/>
+          </a:prstGeom>
+          <a:noFill/>
+        </p:spPr>
+        <p:txBody>
+          <a:bodyPr wrap="square" anchor="t" lIns="0" rIns="0" tIns="0" bIns="0">
+            <a:spAutoFit/>
+          </a:bodyPr>
+          <a:lstStyle/>
+          <a:p>
+            <a:pPr algn="l"/>
+            <a:r>
+              <a:rPr sz="5200" b="1" i="0">
+                <a:solidFill>
+                  <a:srgbClr val="4466FF"/>
+                </a:solidFill>
+                <a:latin typeface="Sora"/>
+              </a:rPr>
+              <a:t>19%</a:t>
+            </a:r>
+          </a:p>
+        </p:txBody>
+      </p:sp>
+      <p:sp>
+        <p:nvSpPr>
+          <p:cNvPr id="54" name="TextBox 53"/>
+          <p:cNvSpPr txBox="1"/>
+          <p:nvPr/>
+        </p:nvSpPr>
+        <p:spPr>
+          <a:xfrm>
+            <a:off x="8705088" y="4114800"/>
+            <a:ext cx="2971800" cy="548640"/>
+          </a:xfrm>
+          <a:prstGeom prst="rect">
+            <a:avLst/>
+          </a:prstGeom>
+          <a:noFill/>
+        </p:spPr>
+        <p:txBody>
+          <a:bodyPr wrap="square" anchor="t" lIns="0" rIns="0" tIns="0" bIns="0">
+            <a:spAutoFit/>
+          </a:bodyPr>
+          <a:lstStyle/>
+          <a:p>
+            <a:pPr algn="l">
               <a:lnSpc>
                 <a:spcPct val="105000"/>
               </a:lnSpc>
-              <a:spcAft>
-                <a:spcPts val="400"/>
-              </a:spcAft>
             </a:pPr>
             <a:r>
-              <a:rPr sz="1800" b="1" i="0">
-                <a:solidFill>
-                  <a:srgbClr val="FFFFFF"/>
-                </a:solidFill>
-                <a:latin typeface="Sora"/>
-              </a:rPr>
-              <a:t>Channels</a:t>
-            </a:r>
-          </a:p>
-          <a:p>
-            <a:pPr algn="ctr">
-              <a:lnSpc>
-                <a:spcPct val="105000"/>
-              </a:lnSpc>
-              <a:spcAft>
-                <a:spcPts val="400"/>
-              </a:spcAft>
-            </a:pPr>
-            <a:r>
               <a:rPr sz="1150" b="0" i="0">
                 <a:solidFill>
-                  <a:srgbClr val="B3C2E0"/>
+                  <a:srgbClr val="556080"/>
                 </a:solidFill>
                 <a:latin typeface="Open Sans"/>
               </a:rPr>
-              <a:t>Instagram and website chat today, WhatsApp soon.</a:t>
-            </a:r>
-          </a:p>
-        </p:txBody>
-      </p:sp>
-      <p:sp>
-        <p:nvSpPr>
-          <p:cNvPr id="17" name="Rounded Rectangle 16">
+              <a:t>of conversations led to a purchase.</a:t>
+            </a:r>
+          </a:p>
+        </p:txBody>
+      </p:sp>
+      <p:sp>
+        <p:nvSpPr>
+          <p:cNvPr id="55" name="Rounded Rectangle 54"/>
+          <p:cNvSpPr/>
+          <p:nvPr/>
+        </p:nvSpPr>
+        <p:spPr>
+          <a:xfrm>
+            <a:off x="8759952" y="5074920"/>
+            <a:ext cx="502920" cy="411480"/>
+          </a:xfrm>
+          <a:prstGeom prst="roundRect">
+            <a:avLst>
+              <a:gd name="adj" fmla="val 20000"/>
+            </a:avLst>
+          </a:prstGeom>
+          <a:solidFill>
+            <a:srgbClr val="7AA8FF"/>
+          </a:solidFill>
+          <a:ln>
+            <a:noFill/>
+          </a:ln>
+          <a:effectLst/>
+        </p:spPr>
+        <p:style>
+          <a:lnRef idx="1">
+            <a:schemeClr val="accent1"/>
+          </a:lnRef>
+          <a:fillRef idx="3">
+            <a:schemeClr val="accent1"/>
+          </a:fillRef>
+          <a:effectRef idx="2">
+            <a:schemeClr val="accent1"/>
+          </a:effectRef>
+          <a:fontRef idx="minor">
+            <a:schemeClr val="lt1"/>
+          </a:fontRef>
+        </p:style>
+        <p:txBody>
+          <a:bodyPr rtlCol="0" anchor="ctr"/>
+          <a:lstStyle/>
+          <a:p>
+            <a:pPr algn="ctr"/>
+          </a:p>
+        </p:txBody>
+      </p:sp>
+      <p:sp>
+        <p:nvSpPr>
+          <p:cNvPr id="56" name="TextBox 55"/>
+          <p:cNvSpPr txBox="1"/>
+          <p:nvPr/>
+        </p:nvSpPr>
+        <p:spPr>
+          <a:xfrm>
+            <a:off x="8686800" y="5522976"/>
+            <a:ext cx="640080" cy="274320"/>
+          </a:xfrm>
+          <a:prstGeom prst="rect">
+            <a:avLst/>
+          </a:prstGeom>
+          <a:noFill/>
+        </p:spPr>
+        <p:txBody>
+          <a:bodyPr wrap="square" anchor="t" lIns="0" rIns="0" tIns="0" bIns="0">
+            <a:spAutoFit/>
+          </a:bodyPr>
+          <a:lstStyle/>
+          <a:p>
+            <a:pPr algn="ctr"/>
+            <a:r>
+              <a:rPr sz="850" b="0" i="0">
+                <a:solidFill>
+                  <a:srgbClr val="556080"/>
+                </a:solidFill>
+                <a:latin typeface="JetBrains Mono"/>
+              </a:rPr>
+              <a:t>Wk1</a:t>
+            </a:r>
+          </a:p>
+        </p:txBody>
+      </p:sp>
+      <p:sp>
+        <p:nvSpPr>
+          <p:cNvPr id="57" name="Rounded Rectangle 56"/>
+          <p:cNvSpPr/>
+          <p:nvPr/>
+        </p:nvSpPr>
+        <p:spPr>
+          <a:xfrm>
+            <a:off x="9473184" y="4892040"/>
+            <a:ext cx="502920" cy="594360"/>
+          </a:xfrm>
+          <a:prstGeom prst="roundRect">
+            <a:avLst>
+              <a:gd name="adj" fmla="val 20000"/>
+            </a:avLst>
+          </a:prstGeom>
+          <a:solidFill>
+            <a:srgbClr val="7AA8FF"/>
+          </a:solidFill>
+          <a:ln>
+            <a:noFill/>
+          </a:ln>
+          <a:effectLst/>
+        </p:spPr>
+        <p:style>
+          <a:lnRef idx="1">
+            <a:schemeClr val="accent1"/>
+          </a:lnRef>
+          <a:fillRef idx="3">
+            <a:schemeClr val="accent1"/>
+          </a:fillRef>
+          <a:effectRef idx="2">
+            <a:schemeClr val="accent1"/>
+          </a:effectRef>
+          <a:fontRef idx="minor">
+            <a:schemeClr val="lt1"/>
+          </a:fontRef>
+        </p:style>
+        <p:txBody>
+          <a:bodyPr rtlCol="0" anchor="ctr"/>
+          <a:lstStyle/>
+          <a:p>
+            <a:pPr algn="ctr"/>
+          </a:p>
+        </p:txBody>
+      </p:sp>
+      <p:sp>
+        <p:nvSpPr>
+          <p:cNvPr id="58" name="TextBox 57"/>
+          <p:cNvSpPr txBox="1"/>
+          <p:nvPr/>
+        </p:nvSpPr>
+        <p:spPr>
+          <a:xfrm>
+            <a:off x="9400032" y="5522976"/>
+            <a:ext cx="640080" cy="274320"/>
+          </a:xfrm>
+          <a:prstGeom prst="rect">
+            <a:avLst/>
+          </a:prstGeom>
+          <a:noFill/>
+        </p:spPr>
+        <p:txBody>
+          <a:bodyPr wrap="square" anchor="t" lIns="0" rIns="0" tIns="0" bIns="0">
+            <a:spAutoFit/>
+          </a:bodyPr>
+          <a:lstStyle/>
+          <a:p>
+            <a:pPr algn="ctr"/>
+            <a:r>
+              <a:rPr sz="850" b="0" i="0">
+                <a:solidFill>
+                  <a:srgbClr val="556080"/>
+                </a:solidFill>
+                <a:latin typeface="JetBrains Mono"/>
+              </a:rPr>
+              <a:t>Wk2</a:t>
+            </a:r>
+          </a:p>
+        </p:txBody>
+      </p:sp>
+      <p:sp>
+        <p:nvSpPr>
+          <p:cNvPr id="59" name="Rounded Rectangle 58"/>
+          <p:cNvSpPr/>
+          <p:nvPr/>
+        </p:nvSpPr>
+        <p:spPr>
+          <a:xfrm>
+            <a:off x="10186416" y="4709160"/>
+            <a:ext cx="502920" cy="777240"/>
+          </a:xfrm>
+          <a:prstGeom prst="roundRect">
+            <a:avLst>
+              <a:gd name="adj" fmla="val 20000"/>
+            </a:avLst>
+          </a:prstGeom>
+          <a:solidFill>
+            <a:srgbClr val="7AA8FF"/>
+          </a:solidFill>
+          <a:ln>
+            <a:noFill/>
+          </a:ln>
+          <a:effectLst/>
+        </p:spPr>
+        <p:style>
+          <a:lnRef idx="1">
+            <a:schemeClr val="accent1"/>
+          </a:lnRef>
+          <a:fillRef idx="3">
+            <a:schemeClr val="accent1"/>
+          </a:fillRef>
+          <a:effectRef idx="2">
+            <a:schemeClr val="accent1"/>
+          </a:effectRef>
+          <a:fontRef idx="minor">
+            <a:schemeClr val="lt1"/>
+          </a:fontRef>
+        </p:style>
+        <p:txBody>
+          <a:bodyPr rtlCol="0" anchor="ctr"/>
+          <a:lstStyle/>
+          <a:p>
+            <a:pPr algn="ctr"/>
+          </a:p>
+        </p:txBody>
+      </p:sp>
+      <p:sp>
+        <p:nvSpPr>
+          <p:cNvPr id="60" name="TextBox 59"/>
+          <p:cNvSpPr txBox="1"/>
+          <p:nvPr/>
+        </p:nvSpPr>
+        <p:spPr>
+          <a:xfrm>
+            <a:off x="10113264" y="5522976"/>
+            <a:ext cx="640080" cy="274320"/>
+          </a:xfrm>
+          <a:prstGeom prst="rect">
+            <a:avLst/>
+          </a:prstGeom>
+          <a:noFill/>
+        </p:spPr>
+        <p:txBody>
+          <a:bodyPr wrap="square" anchor="t" lIns="0" rIns="0" tIns="0" bIns="0">
+            <a:spAutoFit/>
+          </a:bodyPr>
+          <a:lstStyle/>
+          <a:p>
+            <a:pPr algn="ctr"/>
+            <a:r>
+              <a:rPr sz="850" b="0" i="0">
+                <a:solidFill>
+                  <a:srgbClr val="556080"/>
+                </a:solidFill>
+                <a:latin typeface="JetBrains Mono"/>
+              </a:rPr>
+              <a:t>Wk3</a:t>
+            </a:r>
+          </a:p>
+        </p:txBody>
+      </p:sp>
+      <p:sp>
+        <p:nvSpPr>
+          <p:cNvPr id="61" name="Rounded Rectangle 60"/>
+          <p:cNvSpPr/>
+          <p:nvPr/>
+        </p:nvSpPr>
+        <p:spPr>
+          <a:xfrm>
+            <a:off x="10899648" y="4572000"/>
+            <a:ext cx="502920" cy="914400"/>
+          </a:xfrm>
+          <a:prstGeom prst="roundRect">
+            <a:avLst>
+              <a:gd name="adj" fmla="val 20000"/>
+            </a:avLst>
+          </a:prstGeom>
+          <a:solidFill>
+            <a:srgbClr val="7AA8FF"/>
+          </a:solidFill>
+          <a:ln>
+            <a:noFill/>
+          </a:ln>
+          <a:effectLst/>
+        </p:spPr>
+        <p:style>
+          <a:lnRef idx="1">
+            <a:schemeClr val="accent1"/>
+          </a:lnRef>
+          <a:fillRef idx="3">
+            <a:schemeClr val="accent1"/>
+          </a:fillRef>
+          <a:effectRef idx="2">
+            <a:schemeClr val="accent1"/>
+          </a:effectRef>
+          <a:fontRef idx="minor">
+            <a:schemeClr val="lt1"/>
+          </a:fontRef>
+        </p:style>
+        <p:txBody>
+          <a:bodyPr rtlCol="0" anchor="ctr"/>
+          <a:lstStyle/>
+          <a:p>
+            <a:pPr algn="ctr"/>
+          </a:p>
+        </p:txBody>
+      </p:sp>
+      <p:sp>
+        <p:nvSpPr>
+          <p:cNvPr id="62" name="TextBox 61"/>
+          <p:cNvSpPr txBox="1"/>
+          <p:nvPr/>
+        </p:nvSpPr>
+        <p:spPr>
+          <a:xfrm>
+            <a:off x="10826496" y="5522976"/>
+            <a:ext cx="640080" cy="274320"/>
+          </a:xfrm>
+          <a:prstGeom prst="rect">
+            <a:avLst/>
+          </a:prstGeom>
+          <a:noFill/>
+        </p:spPr>
+        <p:txBody>
+          <a:bodyPr wrap="square" anchor="t" lIns="0" rIns="0" tIns="0" bIns="0">
+            <a:spAutoFit/>
+          </a:bodyPr>
+          <a:lstStyle/>
+          <a:p>
+            <a:pPr algn="ctr"/>
+            <a:r>
+              <a:rPr sz="850" b="0" i="0">
+                <a:solidFill>
+                  <a:srgbClr val="556080"/>
+                </a:solidFill>
+                <a:latin typeface="JetBrains Mono"/>
+              </a:rPr>
+              <a:t>Wk4</a:t>
+            </a:r>
+          </a:p>
+        </p:txBody>
+      </p:sp>
+      <p:sp>
+        <p:nvSpPr>
+          <p:cNvPr id="63" name="Rounded Rectangle 62">
             <a:hlinkClick r:id="rId3" action="ppaction://hlinksldjump"/>
           </p:cNvPr>
           <p:cNvSpPr/>
@@ -15510,7 +20235,7 @@
       </p:sp>
       <p:sp>
         <p:nvSpPr>
-          <p:cNvPr id="18" name="TextBox 17"/>
+          <p:cNvPr id="64" name="TextBox 63"/>
           <p:cNvSpPr txBox="1"/>
           <p:nvPr/>
         </p:nvSpPr>
@@ -15534,11 +20259,11 @@
             <a:r>
               <a:rPr sz="1000" b="0" i="0">
                 <a:solidFill>
-                  <a:srgbClr val="B3C2E0"/>
+                  <a:srgbClr val="556080"/>
                 </a:solidFill>
                 <a:latin typeface="JetBrains Mono"/>
               </a:rPr>
-              <a:t>09 / 13</a:t>
+              <a:t>09 / 14</a:t>
             </a:r>
           </a:p>
         </p:txBody>
@@ -15549,7 +20274,7 @@
     <a:masterClrMapping/>
   </p:clrMapOvr>
   <p:transition spd="med">
-    <p:cover dir="u"/>
+    <p:split orient="horz" dir="out"/>
   </p:transition>
 </p:sld>
 </file>
